--- a/lectures/CYBER444_Week01_Introduction_and_Environment_Setup.pptx
+++ b/lectures/CYBER444_Week01_Introduction_and_Environment_Setup.pptx
@@ -31,6 +31,11 @@
     <p:sldId id="276" r:id="rId22"/>
     <p:sldId id="277" r:id="rId23"/>
     <p:sldId id="278" r:id="rId24"/>
+    <p:sldId id="281" r:id="rId32"/>
+    <p:sldId id="282" r:id="rId33"/>
+    <p:sldId id="283" r:id="rId34"/>
+    <p:sldId id="284" r:id="rId35"/>
+    <p:sldId id="285" r:id="rId36"/>
     <p:sldId id="279" r:id="rId25"/>
     <p:sldId id="280" r:id="rId26"/>
   </p:sldIdLst>
@@ -2848,7 +2853,7 @@
                 <a:ea typeface="Calibri" pitchFamily="34" charset="-122"/>
                 <a:cs typeface="Calibri" pitchFamily="34" charset="-120"/>
               </a:rPr>
-              <a:t>Tuesdays &amp; Thursdays, 4:00–5:50 PM  ·  CTB 345</a:t>
+              <a:t>Tuesdays &amp; Thursdays, 4:00–5:50 PM  ·  CTB 350</a:t>
             </a:r>
             <a:endParaRPr lang="en-US" sz="1800" dirty="0"/>
           </a:p>
@@ -4160,7 +4165,29 @@
                 <a:ea typeface="Calibri" pitchFamily="34" charset="-122"/>
                 <a:cs typeface="Calibri" pitchFamily="34" charset="-120"/>
               </a:rPr>
-              <a:t>Workflow: branch → write labs/lab-NN.md as a runbook (commands, expected vs. actual output, screenshots, analysis) → commit supporting artifacts → open a PR titled "Lab NN: [Topic]" → TA reviews → address feedback → merge</a:t>
+              <a:t>Workflow: branch → write labs/lab-NN.md as a runbook (commands, expected vs. actual output, screenshots, analysis) → commit supporting artifacts → open a PR titled “Grade: lab-NN" → </a:t>
+            </a:r>
+            <a:r>
+              <a:rPr lang="en-US" sz="1600" dirty="0" err="1">
+                <a:solidFill>
+                  <a:srgbClr val="3D5A80"/>
+                </a:solidFill>
+                <a:latin typeface="Calibri" pitchFamily="34" charset="0"/>
+                <a:ea typeface="Calibri" pitchFamily="34" charset="-122"/>
+                <a:cs typeface="Calibri" pitchFamily="34" charset="-120"/>
+              </a:rPr>
+              <a:t>Autograder</a:t>
+            </a:r>
+            <a:r>
+              <a:rPr lang="en-US" sz="1600" dirty="0">
+                <a:solidFill>
+                  <a:srgbClr val="3D5A80"/>
+                </a:solidFill>
+                <a:latin typeface="Calibri" pitchFamily="34" charset="0"/>
+                <a:ea typeface="Calibri" pitchFamily="34" charset="-122"/>
+                <a:cs typeface="Calibri" pitchFamily="34" charset="-120"/>
+              </a:rPr>
+              <a:t> checks your work→ address feedback → merge</a:t>
             </a:r>
             <a:endParaRPr lang="en-US" sz="1600" dirty="0"/>
           </a:p>
@@ -4202,7 +4229,7 @@
                 <a:ea typeface="Calibri" pitchFamily="34" charset="-122"/>
                 <a:cs typeface="Calibri" pitchFamily="34" charset="-120"/>
               </a:rPr>
-              <a:t>Your repository grows into a real technical portfolio: 13 lab reports, supporting scripts/configs, and final project documentation by the end of the semester</a:t>
+              <a:t>Lowest lab and homework score will be dropped.</a:t>
             </a:r>
             <a:endParaRPr lang="en-US" sz="1600" dirty="0"/>
           </a:p>
@@ -4495,7 +4522,7 @@
                 <a:ea typeface="Calibri" pitchFamily="34" charset="-122"/>
                 <a:cs typeface="Calibri" pitchFamily="34" charset="-120"/>
               </a:rPr>
-              <a:t>Week 8 · 5% of grade</a:t>
+              <a:t>Week 9 · 5% of grade</a:t>
             </a:r>
             <a:endParaRPr lang="en-US" sz="1500" dirty="0"/>
           </a:p>
@@ -4537,7 +4564,7 @@
                 <a:ea typeface="Calibri" pitchFamily="34" charset="-122"/>
                 <a:cs typeface="Calibri" pitchFamily="34" charset="-120"/>
               </a:rPr>
-              <a:t>Same shared scenario for both tracks, covering Weeks 1–8 lecture material</a:t>
+              <a:t>Same scenarios for both tracks, covering Weeks 1–8 lecture material</a:t>
             </a:r>
             <a:endParaRPr lang="en-US" sz="1500" dirty="0"/>
           </a:p>
@@ -4580,6 +4607,26 @@
                 <a:cs typeface="Calibri" pitchFamily="34" charset="-120"/>
               </a:rPr>
               <a:t>No make-up midterms except university-recognized excused absences arranged in advance</a:t>
+            </a:r>
+          </a:p>
+          <a:p>
+            <a:pPr marL="279400" indent="-279400" algn="l">
+              <a:spcAft>
+                <a:spcPts val="1400"/>
+              </a:spcAft>
+              <a:buSzPct val="100000"/>
+              <a:buChar char="●"/>
+            </a:pPr>
+            <a:r>
+              <a:rPr lang="en-US" sz="1500" dirty="0">
+                <a:solidFill>
+                  <a:srgbClr val="3D5A80"/>
+                </a:solidFill>
+                <a:latin typeface="Calibri" pitchFamily="34" charset="0"/>
+                <a:ea typeface="Calibri" pitchFamily="34" charset="-122"/>
+                <a:cs typeface="Calibri" pitchFamily="34" charset="-120"/>
+              </a:rPr>
+              <a:t>This is a new system, so everyone will get a minimum of 60% for just taking the exam</a:t>
             </a:r>
             <a:endParaRPr lang="en-US" sz="1500" dirty="0"/>
           </a:p>
@@ -4778,7 +4825,7 @@
                 <a:ea typeface="Calibri" pitchFamily="34" charset="-122"/>
                 <a:cs typeface="Calibri" pitchFamily="34" charset="-120"/>
               </a:rPr>
-              <a:t>Proposal due Week 8; final deliverable and live presentation due the last class day (Dec 10)</a:t>
+              <a:t>Proposal due Week 9; final deliverable and live presentation due the last class day (Dec 10)</a:t>
             </a:r>
             <a:endParaRPr lang="en-US" sz="1500" dirty="0"/>
           </a:p>
@@ -5350,7 +5397,7 @@
           <a:bodyPr wrap="square" lIns="0" tIns="0" rIns="0" bIns="0" rtlCol="0" anchor="t"/>
           <a:lstStyle/>
           <a:p>
-            <a:pPr marL="279400" indent="-279400" algn="l">
+            <a:pPr marL="279400" indent="-279400">
               <a:spcAft>
                 <a:spcPts val="1400"/>
               </a:spcAft>
@@ -5368,10 +5415,9 @@
               </a:rPr>
               <a:t>Best ways to reach the instructor: Discord or email, both monitored equally</a:t>
             </a:r>
-            <a:endParaRPr lang="en-US" sz="1600" dirty="0"/>
-          </a:p>
-          <a:p>
-            <a:pPr marL="279400" indent="-279400" algn="l">
+          </a:p>
+          <a:p>
+            <a:pPr marL="279400" indent="-279400">
               <a:spcAft>
                 <a:spcPts val="1400"/>
               </a:spcAft>
@@ -5389,10 +5435,9 @@
               </a:rPr>
               <a:t>Expect a reply within one business day; weekend/after-5 PM messages are answered the next business day (Hours: M–F, 9 AM–5 PM)</a:t>
             </a:r>
-            <a:endParaRPr lang="en-US" sz="1600" dirty="0"/>
-          </a:p>
-          <a:p>
-            <a:pPr marL="279400" indent="-279400" algn="l">
+          </a:p>
+          <a:p>
+            <a:pPr marL="279400" indent="-279400">
               <a:spcAft>
                 <a:spcPts val="1400"/>
               </a:spcAft>
@@ -5410,10 +5455,9 @@
               </a:rPr>
               <a:t>For lab-related questions, grading questions, or troubleshooting, contact the Teaching Assistant first for the fastest turnaround</a:t>
             </a:r>
-            <a:endParaRPr lang="en-US" sz="1600" dirty="0"/>
-          </a:p>
-          <a:p>
-            <a:pPr marL="279400" indent="-279400" algn="l">
+          </a:p>
+          <a:p>
+            <a:pPr marL="279400" indent="-279400">
               <a:spcAft>
                 <a:spcPts val="1400"/>
               </a:spcAft>
@@ -5431,7 +5475,6 @@
               </a:rPr>
               <a:t>Post questions others might benefit from in the Discord channel rather than a DM; keep personal matters (grade disputes, accommodations) to email or a private message</a:t>
             </a:r>
-            <a:endParaRPr lang="en-US" sz="1600" dirty="0"/>
           </a:p>
         </p:txBody>
       </p:sp>
@@ -5536,7 +5579,7 @@
               <a:buChar char="●"/>
             </a:pPr>
             <a:r>
-              <a:rPr lang="en-US" sz="1300" dirty="0">
+              <a:rPr lang="en-US" sz="1600" dirty="0">
                 <a:solidFill>
                   <a:srgbClr val="3D5A80"/>
                 </a:solidFill>
@@ -5546,7 +5589,7 @@
               </a:rPr>
               <a:t>Generative AI (ChatGPT, Claude, Copilot, Gemini, and similar) is permitted as a study/reference aid, in roughly the same spirit as a search engine, man page, or Stack Overflow</a:t>
             </a:r>
-            <a:endParaRPr lang="en-US" sz="1300" dirty="0"/>
+            <a:endParaRPr lang="en-US" sz="1600" dirty="0"/>
           </a:p>
           <a:p>
             <a:pPr marL="279400" indent="-279400" algn="l">
@@ -5557,7 +5600,7 @@
               <a:buChar char="●"/>
             </a:pPr>
             <a:r>
-              <a:rPr lang="en-US" sz="1300" dirty="0">
+              <a:rPr lang="en-US" sz="1600" dirty="0">
                 <a:solidFill>
                   <a:srgbClr val="3D5A80"/>
                 </a:solidFill>
@@ -5567,7 +5610,7 @@
               </a:rPr>
               <a:t>Not permitted: using AI to produce the substance of your work. Submitting AI-generated or heavily-rewritten output as your own is an Academic Honesty violation, regardless of how much you edited it afterward</a:t>
             </a:r>
-            <a:endParaRPr lang="en-US" sz="1300" dirty="0"/>
+            <a:endParaRPr lang="en-US" sz="1600" dirty="0"/>
           </a:p>
           <a:p>
             <a:pPr marL="279400" indent="-279400" algn="l">
@@ -5578,7 +5621,7 @@
               <a:buChar char="●"/>
             </a:pPr>
             <a:r>
-              <a:rPr lang="en-US" sz="1300" dirty="0">
+              <a:rPr lang="en-US" sz="1600" dirty="0">
                 <a:solidFill>
                   <a:srgbClr val="3D5A80"/>
                 </a:solidFill>
@@ -5588,7 +5631,7 @@
               </a:rPr>
               <a:t>Permitted: explaining a concept, looking up syntax, a short boilerplate snippet you build on and understand, feedback on something you already wrote</a:t>
             </a:r>
-            <a:endParaRPr lang="en-US" sz="1300" dirty="0"/>
+            <a:endParaRPr lang="en-US" sz="1600" dirty="0"/>
           </a:p>
           <a:p>
             <a:pPr marL="279400" indent="-279400" algn="l">
@@ -5599,7 +5642,7 @@
               <a:buChar char="●"/>
             </a:pPr>
             <a:r>
-              <a:rPr lang="en-US" sz="1300" dirty="0">
+              <a:rPr lang="en-US" sz="1600" dirty="0">
                 <a:solidFill>
                   <a:srgbClr val="3D5A80"/>
                 </a:solidFill>
@@ -5609,7 +5652,7 @@
               </a:rPr>
               <a:t>Not permitted: generating a full/majority lab report or homework response, having AI write or restructure your scripts/configs, using AI to answer reflection questions meant to demonstrate your own understanding</a:t>
             </a:r>
-            <a:endParaRPr lang="en-US" sz="1300" dirty="0"/>
+            <a:endParaRPr lang="en-US" sz="1600" dirty="0"/>
           </a:p>
           <a:p>
             <a:pPr marL="279400" indent="-279400" algn="l">
@@ -5620,7 +5663,7 @@
               <a:buChar char="●"/>
             </a:pPr>
             <a:r>
-              <a:rPr lang="en-US" sz="1300" dirty="0">
+              <a:rPr lang="en-US" sz="1600" dirty="0">
                 <a:solidFill>
                   <a:srgbClr val="3D5A80"/>
                 </a:solidFill>
@@ -5630,7 +5673,7 @@
               </a:rPr>
               <a:t>The practical test: if you couldn't explain what you submitted line-by-line (script) or paragraph-by-paragraph (writing), you've likely crossed the line</a:t>
             </a:r>
-            <a:endParaRPr lang="en-US" sz="1300" dirty="0"/>
+            <a:endParaRPr lang="en-US" sz="1600" dirty="0"/>
           </a:p>
           <a:p>
             <a:pPr marL="279400" indent="-279400" algn="l">
@@ -5641,7 +5684,7 @@
               <a:buChar char="●"/>
             </a:pPr>
             <a:r>
-              <a:rPr lang="en-US" sz="1300" dirty="0">
+              <a:rPr lang="en-US" sz="1600" dirty="0">
                 <a:solidFill>
                   <a:srgbClr val="3D5A80"/>
                 </a:solidFill>
@@ -5651,7 +5694,7 @@
               </a:rPr>
               <a:t>When in doubt, disclose. A brief AI-use note at the end of a submission is never held against you; undisclosed use that surfaces later is an academic honesty violation</a:t>
             </a:r>
-            <a:endParaRPr lang="en-US" sz="1300" dirty="0"/>
+            <a:endParaRPr lang="en-US" sz="1600" dirty="0"/>
           </a:p>
         </p:txBody>
       </p:sp>
@@ -7096,6 +7139,4284 @@
 </p:sld>
 </file>
 
+<file path=ppt/slides/slide26.xml><?xml version="1.0" encoding="utf-8"?>
+<p:sld xmlns:a="http://schemas.openxmlformats.org/drawingml/2006/main" xmlns:p="http://schemas.openxmlformats.org/presentationml/2006/main" xmlns:r="http://schemas.openxmlformats.org/officeDocument/2006/relationships">
+  <p:cSld>
+    <p:spTree>
+      <p:nvGrpSpPr>
+        <p:cNvPr id="1" name=""/>
+        <p:cNvGrpSpPr/>
+        <p:nvPr/>
+      </p:nvGrpSpPr>
+      <p:grpSpPr/>
+      <p:sp>
+        <p:nvSpPr>
+          <p:cNvPr id="2" name="TextBox 1"/>
+          <p:cNvSpPr txBox="1"/>
+          <p:nvPr/>
+        </p:nvSpPr>
+        <p:spPr>
+          <a:xfrm>
+            <a:off x="640080" y="457200"/>
+            <a:ext cx="10908792" cy="777240"/>
+          </a:xfrm>
+          <a:prstGeom prst="rect">
+            <a:avLst/>
+          </a:prstGeom>
+          <a:noFill/>
+        </p:spPr>
+        <p:txBody>
+          <a:bodyPr wrap="square" anchor="t" lIns="0" rIns="0" tIns="0" bIns="0">
+            <a:spAutoFit/>
+          </a:bodyPr>
+          <a:lstStyle/>
+          <a:p>
+            <a:r>
+              <a:rPr sz="2900" b="1" i="0">
+                <a:solidFill>
+                  <a:srgbClr val="1B2A4A"/>
+                </a:solidFill>
+                <a:latin typeface="Cambria"/>
+              </a:rPr>
+              <a:t>How Corosync Works</a:t>
+            </a:r>
+          </a:p>
+        </p:txBody>
+      </p:sp>
+      <p:sp>
+        <p:nvSpPr>
+          <p:cNvPr id="3" name="TextBox 2"/>
+          <p:cNvSpPr txBox="1"/>
+          <p:nvPr/>
+        </p:nvSpPr>
+        <p:spPr>
+          <a:xfrm>
+            <a:off x="640080" y="1261872"/>
+            <a:ext cx="10908792" cy="457200"/>
+          </a:xfrm>
+          <a:prstGeom prst="rect">
+            <a:avLst/>
+          </a:prstGeom>
+          <a:noFill/>
+        </p:spPr>
+        <p:txBody>
+          <a:bodyPr wrap="square" anchor="t" lIns="0" rIns="0" tIns="0" bIns="0">
+            <a:spAutoFit/>
+          </a:bodyPr>
+          <a:lstStyle/>
+          <a:p>
+            <a:r>
+              <a:rPr sz="1250" b="0" i="0">
+                <a:solidFill>
+                  <a:srgbClr val="3D5A80"/>
+                </a:solidFill>
+                <a:latin typeface="Calibri"/>
+              </a:rPr>
+              <a:t>Every Proxmox cluster runs Corosync underneath: a token-passing protocol that keeps all nodes in agreement about who is alive and whether the cluster still holds quorum.</a:t>
+            </a:r>
+          </a:p>
+        </p:txBody>
+      </p:sp>
+      <p:sp>
+        <p:nvSpPr>
+          <p:cNvPr id="4" name="Rounded Rectangle 3"/>
+          <p:cNvSpPr/>
+          <p:nvPr/>
+        </p:nvSpPr>
+        <p:spPr>
+          <a:xfrm>
+            <a:off x="4997196" y="1810512"/>
+            <a:ext cx="2194560" cy="658368"/>
+          </a:xfrm>
+          <a:prstGeom prst="roundRect">
+            <a:avLst/>
+          </a:prstGeom>
+          <a:solidFill>
+            <a:srgbClr val="1B2A4A"/>
+          </a:solidFill>
+          <a:ln>
+            <a:noFill/>
+          </a:ln>
+          <a:effectLst/>
+        </p:spPr>
+        <p:style>
+          <a:lnRef idx="1">
+            <a:schemeClr val="accent1"/>
+          </a:lnRef>
+          <a:fillRef idx="3">
+            <a:schemeClr val="accent1"/>
+          </a:fillRef>
+          <a:effectRef idx="2">
+            <a:schemeClr val="accent1"/>
+          </a:effectRef>
+          <a:fontRef idx="minor">
+            <a:schemeClr val="lt1"/>
+          </a:fontRef>
+        </p:style>
+        <p:txBody>
+          <a:bodyPr rtlCol="0" anchor="ctr" wrap="square" lIns="45720" rIns="45720" tIns="18288" bIns="18288"/>
+          <a:lstStyle/>
+          <a:p>
+            <a:pPr algn="ctr"/>
+            <a:r>
+              <a:rPr sz="1200" b="1" i="0">
+                <a:solidFill>
+                  <a:srgbClr val="FFFFFF"/>
+                </a:solidFill>
+                <a:latin typeface="Calibri"/>
+              </a:rPr>
+              <a:t>Node 1</a:t>
+            </a:r>
+          </a:p>
+          <a:p>
+            <a:pPr algn="ctr"/>
+            <a:r>
+              <a:rPr sz="1050" b="0" i="0">
+                <a:solidFill>
+                  <a:srgbClr val="FFFFFF"/>
+                </a:solidFill>
+                <a:latin typeface="Calibri"/>
+              </a:rPr>
+              <a:t>(Proxmox VE)</a:t>
+            </a:r>
+          </a:p>
+        </p:txBody>
+      </p:sp>
+      <p:sp>
+        <p:nvSpPr>
+          <p:cNvPr id="5" name="Rounded Rectangle 4"/>
+          <p:cNvSpPr/>
+          <p:nvPr/>
+        </p:nvSpPr>
+        <p:spPr>
+          <a:xfrm>
+            <a:off x="1554480" y="3108960"/>
+            <a:ext cx="2194560" cy="658368"/>
+          </a:xfrm>
+          <a:prstGeom prst="roundRect">
+            <a:avLst/>
+          </a:prstGeom>
+          <a:solidFill>
+            <a:srgbClr val="1B2A4A"/>
+          </a:solidFill>
+          <a:ln>
+            <a:noFill/>
+          </a:ln>
+          <a:effectLst/>
+        </p:spPr>
+        <p:style>
+          <a:lnRef idx="1">
+            <a:schemeClr val="accent1"/>
+          </a:lnRef>
+          <a:fillRef idx="3">
+            <a:schemeClr val="accent1"/>
+          </a:fillRef>
+          <a:effectRef idx="2">
+            <a:schemeClr val="accent1"/>
+          </a:effectRef>
+          <a:fontRef idx="minor">
+            <a:schemeClr val="lt1"/>
+          </a:fontRef>
+        </p:style>
+        <p:txBody>
+          <a:bodyPr rtlCol="0" anchor="ctr" wrap="square" lIns="45720" rIns="45720" tIns="18288" bIns="18288"/>
+          <a:lstStyle/>
+          <a:p>
+            <a:pPr algn="ctr"/>
+            <a:r>
+              <a:rPr sz="1200" b="1" i="0">
+                <a:solidFill>
+                  <a:srgbClr val="FFFFFF"/>
+                </a:solidFill>
+                <a:latin typeface="Calibri"/>
+              </a:rPr>
+              <a:t>Node 2</a:t>
+            </a:r>
+          </a:p>
+          <a:p>
+            <a:pPr algn="ctr"/>
+            <a:r>
+              <a:rPr sz="1050" b="0" i="0">
+                <a:solidFill>
+                  <a:srgbClr val="FFFFFF"/>
+                </a:solidFill>
+                <a:latin typeface="Calibri"/>
+              </a:rPr>
+              <a:t>(Proxmox VE)</a:t>
+            </a:r>
+          </a:p>
+        </p:txBody>
+      </p:sp>
+      <p:sp>
+        <p:nvSpPr>
+          <p:cNvPr id="6" name="Rounded Rectangle 5"/>
+          <p:cNvSpPr/>
+          <p:nvPr/>
+        </p:nvSpPr>
+        <p:spPr>
+          <a:xfrm>
+            <a:off x="8988552" y="3108960"/>
+            <a:ext cx="2194560" cy="658368"/>
+          </a:xfrm>
+          <a:prstGeom prst="roundRect">
+            <a:avLst/>
+          </a:prstGeom>
+          <a:solidFill>
+            <a:srgbClr val="1B2A4A"/>
+          </a:solidFill>
+          <a:ln>
+            <a:noFill/>
+          </a:ln>
+          <a:effectLst/>
+        </p:spPr>
+        <p:style>
+          <a:lnRef idx="1">
+            <a:schemeClr val="accent1"/>
+          </a:lnRef>
+          <a:fillRef idx="3">
+            <a:schemeClr val="accent1"/>
+          </a:fillRef>
+          <a:effectRef idx="2">
+            <a:schemeClr val="accent1"/>
+          </a:effectRef>
+          <a:fontRef idx="minor">
+            <a:schemeClr val="lt1"/>
+          </a:fontRef>
+        </p:style>
+        <p:txBody>
+          <a:bodyPr rtlCol="0" anchor="ctr" wrap="square" lIns="45720" rIns="45720" tIns="18288" bIns="18288"/>
+          <a:lstStyle/>
+          <a:p>
+            <a:pPr algn="ctr"/>
+            <a:r>
+              <a:rPr sz="1200" b="1" i="0">
+                <a:solidFill>
+                  <a:srgbClr val="FFFFFF"/>
+                </a:solidFill>
+                <a:latin typeface="Calibri"/>
+              </a:rPr>
+              <a:t>Node 3</a:t>
+            </a:r>
+          </a:p>
+          <a:p>
+            <a:pPr algn="ctr"/>
+            <a:r>
+              <a:rPr sz="1050" b="0" i="0">
+                <a:solidFill>
+                  <a:srgbClr val="FFFFFF"/>
+                </a:solidFill>
+                <a:latin typeface="Calibri"/>
+              </a:rPr>
+              <a:t>(Proxmox VE)</a:t>
+            </a:r>
+          </a:p>
+        </p:txBody>
+      </p:sp>
+      <p:cxnSp>
+        <p:nvCxnSpPr>
+          <p:cNvPr id="7" name="Connector 6"/>
+          <p:cNvCxnSpPr/>
+          <p:nvPr/>
+        </p:nvCxnSpPr>
+        <p:spPr>
+          <a:xfrm flipH="1">
+            <a:off x="2560320" y="2468880"/>
+            <a:ext cx="3442716" cy="640080"/>
+          </a:xfrm>
+          <a:prstGeom prst="line">
+            <a:avLst/>
+          </a:prstGeom>
+          <a:ln w="28575">
+            <a:solidFill>
+              <a:srgbClr val="00B4D8"/>
+            </a:solidFill>
+            <a:tailEnd type="triangle" w="med" len="med"/>
+            <a:headEnd type="triangle" w="med" len="med"/>
+          </a:ln>
+        </p:spPr>
+        <p:style>
+          <a:lnRef idx="2">
+            <a:schemeClr val="accent1"/>
+          </a:lnRef>
+          <a:fillRef idx="0">
+            <a:schemeClr val="accent1"/>
+          </a:fillRef>
+          <a:effectRef idx="1">
+            <a:schemeClr val="accent1"/>
+          </a:effectRef>
+          <a:fontRef idx="minor">
+            <a:schemeClr val="tx1"/>
+          </a:fontRef>
+        </p:style>
+      </p:cxnSp>
+      <p:cxnSp>
+        <p:nvCxnSpPr>
+          <p:cNvPr id="8" name="Connector 7"/>
+          <p:cNvCxnSpPr/>
+          <p:nvPr/>
+        </p:nvCxnSpPr>
+        <p:spPr>
+          <a:xfrm>
+            <a:off x="6185916" y="2468880"/>
+            <a:ext cx="3991356" cy="640080"/>
+          </a:xfrm>
+          <a:prstGeom prst="line">
+            <a:avLst/>
+          </a:prstGeom>
+          <a:ln w="28575">
+            <a:solidFill>
+              <a:srgbClr val="00B4D8"/>
+            </a:solidFill>
+            <a:tailEnd type="triangle" w="med" len="med"/>
+            <a:headEnd type="triangle" w="med" len="med"/>
+          </a:ln>
+        </p:spPr>
+        <p:style>
+          <a:lnRef idx="2">
+            <a:schemeClr val="accent1"/>
+          </a:lnRef>
+          <a:fillRef idx="0">
+            <a:schemeClr val="accent1"/>
+          </a:fillRef>
+          <a:effectRef idx="1">
+            <a:schemeClr val="accent1"/>
+          </a:effectRef>
+          <a:fontRef idx="minor">
+            <a:schemeClr val="tx1"/>
+          </a:fontRef>
+        </p:style>
+      </p:cxnSp>
+      <p:cxnSp>
+        <p:nvCxnSpPr>
+          <p:cNvPr id="9" name="Connector 8"/>
+          <p:cNvCxnSpPr/>
+          <p:nvPr/>
+        </p:nvCxnSpPr>
+        <p:spPr>
+          <a:xfrm>
+            <a:off x="3749040" y="3355848"/>
+            <a:ext cx="5239512" cy="0"/>
+          </a:xfrm>
+          <a:prstGeom prst="line">
+            <a:avLst/>
+          </a:prstGeom>
+          <a:ln w="28575">
+            <a:solidFill>
+              <a:srgbClr val="00B4D8"/>
+            </a:solidFill>
+            <a:tailEnd type="triangle" w="med" len="med"/>
+            <a:headEnd type="triangle" w="med" len="med"/>
+          </a:ln>
+        </p:spPr>
+        <p:style>
+          <a:lnRef idx="2">
+            <a:schemeClr val="accent1"/>
+          </a:lnRef>
+          <a:fillRef idx="0">
+            <a:schemeClr val="accent1"/>
+          </a:fillRef>
+          <a:effectRef idx="1">
+            <a:schemeClr val="accent1"/>
+          </a:effectRef>
+          <a:fontRef idx="minor">
+            <a:schemeClr val="tx1"/>
+          </a:fontRef>
+        </p:style>
+      </p:cxnSp>
+      <p:cxnSp>
+        <p:nvCxnSpPr>
+          <p:cNvPr id="10" name="Connector 9"/>
+          <p:cNvCxnSpPr/>
+          <p:nvPr/>
+        </p:nvCxnSpPr>
+        <p:spPr>
+          <a:xfrm flipH="1">
+            <a:off x="2359152" y="2468880"/>
+            <a:ext cx="3442716" cy="640080"/>
+          </a:xfrm>
+          <a:prstGeom prst="line">
+            <a:avLst/>
+          </a:prstGeom>
+          <a:ln w="17780">
+            <a:solidFill>
+              <a:srgbClr val="1B2A4A"/>
+            </a:solidFill>
+            <a:prstDash val="dash"/>
+            <a:tailEnd type="triangle" w="med" len="med"/>
+            <a:headEnd type="triangle" w="med" len="med"/>
+          </a:ln>
+        </p:spPr>
+        <p:style>
+          <a:lnRef idx="2">
+            <a:schemeClr val="accent1"/>
+          </a:lnRef>
+          <a:fillRef idx="0">
+            <a:schemeClr val="accent1"/>
+          </a:fillRef>
+          <a:effectRef idx="1">
+            <a:schemeClr val="accent1"/>
+          </a:effectRef>
+          <a:fontRef idx="minor">
+            <a:schemeClr val="tx1"/>
+          </a:fontRef>
+        </p:style>
+      </p:cxnSp>
+      <p:cxnSp>
+        <p:nvCxnSpPr>
+          <p:cNvPr id="11" name="Connector 10"/>
+          <p:cNvCxnSpPr/>
+          <p:nvPr/>
+        </p:nvCxnSpPr>
+        <p:spPr>
+          <a:xfrm>
+            <a:off x="6387084" y="2468880"/>
+            <a:ext cx="3991356" cy="640080"/>
+          </a:xfrm>
+          <a:prstGeom prst="line">
+            <a:avLst/>
+          </a:prstGeom>
+          <a:ln w="17780">
+            <a:solidFill>
+              <a:srgbClr val="1B2A4A"/>
+            </a:solidFill>
+            <a:prstDash val="dash"/>
+            <a:tailEnd type="triangle" w="med" len="med"/>
+            <a:headEnd type="triangle" w="med" len="med"/>
+          </a:ln>
+        </p:spPr>
+        <p:style>
+          <a:lnRef idx="2">
+            <a:schemeClr val="accent1"/>
+          </a:lnRef>
+          <a:fillRef idx="0">
+            <a:schemeClr val="accent1"/>
+          </a:fillRef>
+          <a:effectRef idx="1">
+            <a:schemeClr val="accent1"/>
+          </a:effectRef>
+          <a:fontRef idx="minor">
+            <a:schemeClr val="tx1"/>
+          </a:fontRef>
+        </p:style>
+      </p:cxnSp>
+      <p:cxnSp>
+        <p:nvCxnSpPr>
+          <p:cNvPr id="12" name="Connector 11"/>
+          <p:cNvCxnSpPr/>
+          <p:nvPr/>
+        </p:nvCxnSpPr>
+        <p:spPr>
+          <a:xfrm>
+            <a:off x="3749040" y="3538728"/>
+            <a:ext cx="5239512" cy="0"/>
+          </a:xfrm>
+          <a:prstGeom prst="line">
+            <a:avLst/>
+          </a:prstGeom>
+          <a:ln w="17780">
+            <a:solidFill>
+              <a:srgbClr val="1B2A4A"/>
+            </a:solidFill>
+            <a:prstDash val="dash"/>
+            <a:tailEnd type="triangle" w="med" len="med"/>
+            <a:headEnd type="triangle" w="med" len="med"/>
+          </a:ln>
+        </p:spPr>
+        <p:style>
+          <a:lnRef idx="2">
+            <a:schemeClr val="accent1"/>
+          </a:lnRef>
+          <a:fillRef idx="0">
+            <a:schemeClr val="accent1"/>
+          </a:fillRef>
+          <a:effectRef idx="1">
+            <a:schemeClr val="accent1"/>
+          </a:effectRef>
+          <a:fontRef idx="minor">
+            <a:schemeClr val="tx1"/>
+          </a:fontRef>
+        </p:style>
+      </p:cxnSp>
+      <p:sp>
+        <p:nvSpPr>
+          <p:cNvPr id="13" name="Rectangle 12"/>
+          <p:cNvSpPr/>
+          <p:nvPr/>
+        </p:nvSpPr>
+        <p:spPr>
+          <a:xfrm>
+            <a:off x="640080" y="3950208"/>
+            <a:ext cx="146304" cy="146304"/>
+          </a:xfrm>
+          <a:prstGeom prst="rect">
+            <a:avLst/>
+          </a:prstGeom>
+          <a:solidFill>
+            <a:srgbClr val="00B4D8"/>
+          </a:solidFill>
+          <a:ln>
+            <a:noFill/>
+          </a:ln>
+          <a:effectLst/>
+        </p:spPr>
+        <p:style>
+          <a:lnRef idx="1">
+            <a:schemeClr val="accent1"/>
+          </a:lnRef>
+          <a:fillRef idx="3">
+            <a:schemeClr val="accent1"/>
+          </a:fillRef>
+          <a:effectRef idx="2">
+            <a:schemeClr val="accent1"/>
+          </a:effectRef>
+          <a:fontRef idx="minor">
+            <a:schemeClr val="lt1"/>
+          </a:fontRef>
+        </p:style>
+        <p:txBody>
+          <a:bodyPr rtlCol="0" anchor="ctr"/>
+          <a:lstStyle/>
+          <a:p>
+            <a:pPr algn="ctr"/>
+          </a:p>
+        </p:txBody>
+      </p:sp>
+      <p:sp>
+        <p:nvSpPr>
+          <p:cNvPr id="14" name="TextBox 13"/>
+          <p:cNvSpPr txBox="1"/>
+          <p:nvPr/>
+        </p:nvSpPr>
+        <p:spPr>
+          <a:xfrm>
+            <a:off x="859536" y="3886200"/>
+            <a:ext cx="4754880" cy="274320"/>
+          </a:xfrm>
+          <a:prstGeom prst="rect">
+            <a:avLst/>
+          </a:prstGeom>
+          <a:noFill/>
+        </p:spPr>
+        <p:txBody>
+          <a:bodyPr wrap="square" anchor="ctr" lIns="0" rIns="0" tIns="0" bIns="0">
+            <a:spAutoFit/>
+          </a:bodyPr>
+          <a:lstStyle/>
+          <a:p>
+            <a:pPr algn="l"/>
+            <a:r>
+              <a:rPr sz="1000" b="0" i="0">
+                <a:solidFill>
+                  <a:srgbClr val="3D5A80"/>
+                </a:solidFill>
+                <a:latin typeface="Calibri"/>
+              </a:rPr>
+              <a:t>Ring 0 - primary Corosync link (Lab 1: ens19)</a:t>
+            </a:r>
+          </a:p>
+        </p:txBody>
+      </p:sp>
+      <p:sp>
+        <p:nvSpPr>
+          <p:cNvPr id="15" name="Rectangle 14"/>
+          <p:cNvSpPr/>
+          <p:nvPr/>
+        </p:nvSpPr>
+        <p:spPr>
+          <a:xfrm>
+            <a:off x="6400800" y="3950208"/>
+            <a:ext cx="146304" cy="146304"/>
+          </a:xfrm>
+          <a:prstGeom prst="rect">
+            <a:avLst/>
+          </a:prstGeom>
+          <a:solidFill>
+            <a:srgbClr val="1B2A4A"/>
+          </a:solidFill>
+          <a:ln>
+            <a:noFill/>
+          </a:ln>
+          <a:effectLst/>
+        </p:spPr>
+        <p:style>
+          <a:lnRef idx="1">
+            <a:schemeClr val="accent1"/>
+          </a:lnRef>
+          <a:fillRef idx="3">
+            <a:schemeClr val="accent1"/>
+          </a:fillRef>
+          <a:effectRef idx="2">
+            <a:schemeClr val="accent1"/>
+          </a:effectRef>
+          <a:fontRef idx="minor">
+            <a:schemeClr val="lt1"/>
+          </a:fontRef>
+        </p:style>
+        <p:txBody>
+          <a:bodyPr rtlCol="0" anchor="ctr"/>
+          <a:lstStyle/>
+          <a:p>
+            <a:pPr algn="ctr"/>
+          </a:p>
+        </p:txBody>
+      </p:sp>
+      <p:sp>
+        <p:nvSpPr>
+          <p:cNvPr id="16" name="TextBox 15"/>
+          <p:cNvSpPr txBox="1"/>
+          <p:nvPr/>
+        </p:nvSpPr>
+        <p:spPr>
+          <a:xfrm>
+            <a:off x="6620256" y="3886200"/>
+            <a:ext cx="4754880" cy="274320"/>
+          </a:xfrm>
+          <a:prstGeom prst="rect">
+            <a:avLst/>
+          </a:prstGeom>
+          <a:noFill/>
+        </p:spPr>
+        <p:txBody>
+          <a:bodyPr wrap="square" anchor="ctr" lIns="0" rIns="0" tIns="0" bIns="0">
+            <a:spAutoFit/>
+          </a:bodyPr>
+          <a:lstStyle/>
+          <a:p>
+            <a:pPr algn="l"/>
+            <a:r>
+              <a:rPr sz="1000" b="0" i="0">
+                <a:solidFill>
+                  <a:srgbClr val="3D5A80"/>
+                </a:solidFill>
+                <a:latin typeface="Calibri"/>
+              </a:rPr>
+              <a:t>Ring 1 - redundant link if Ring 0 fails (Lab 1: ens20)</a:t>
+            </a:r>
+          </a:p>
+        </p:txBody>
+      </p:sp>
+      <p:graphicFrame>
+        <p:nvGraphicFramePr>
+          <p:cNvPr id="17" name="Table 16"/>
+          <p:cNvGraphicFramePr>
+            <a:graphicFrameLocks noGrp="1"/>
+          </p:cNvGraphicFramePr>
+          <p:nvPr/>
+        </p:nvGraphicFramePr>
+        <p:xfrm>
+          <a:off x="640080" y="4334256"/>
+          <a:ext cx="10908792" cy="2249424"/>
+        </p:xfrm>
+        <a:graphic>
+          <a:graphicData uri="http://schemas.openxmlformats.org/drawingml/2006/table">
+            <a:tbl>
+              <a:tblPr firstRow="0" bandRow="0"/>
+              <a:tblGrid>
+                <a:gridCol w="3017520"/>
+                <a:gridCol w="7891272"/>
+              </a:tblGrid>
+              <a:tr h="374904">
+                <a:tc>
+                  <a:txBody>
+                    <a:bodyPr wrap="square"/>
+                    <a:lstStyle/>
+                    <a:p>
+                      <a:r>
+                        <a:rPr sz="1250" b="1" i="0">
+                          <a:solidFill>
+                            <a:srgbClr val="FFFFFF"/>
+                          </a:solidFill>
+                          <a:latin typeface="Calibri"/>
+                        </a:rPr>
+                        <a:t>Platform</a:t>
+                      </a:r>
+                    </a:p>
+                  </a:txBody>
+                  <a:tcPr anchor="ctr" marL="82296" marR="82296" marT="27432" marB="27432">
+                    <a:solidFill>
+                      <a:srgbClr val="1B2A4A"/>
+                    </a:solidFill>
+                  </a:tcPr>
+                </a:tc>
+                <a:tc>
+                  <a:txBody>
+                    <a:bodyPr wrap="square"/>
+                    <a:lstStyle/>
+                    <a:p>
+                      <a:r>
+                        <a:rPr sz="1250" b="1" i="0">
+                          <a:solidFill>
+                            <a:srgbClr val="FFFFFF"/>
+                          </a:solidFill>
+                          <a:latin typeface="Calibri"/>
+                        </a:rPr>
+                        <a:t>How nodes agree on membership &amp; quorum</a:t>
+                      </a:r>
+                    </a:p>
+                  </a:txBody>
+                  <a:tcPr anchor="ctr" marL="82296" marR="82296" marT="27432" marB="27432">
+                    <a:solidFill>
+                      <a:srgbClr val="1B2A4A"/>
+                    </a:solidFill>
+                  </a:tcPr>
+                </a:tc>
+              </a:tr>
+              <a:tr h="374904">
+                <a:tc>
+                  <a:txBody>
+                    <a:bodyPr wrap="square"/>
+                    <a:lstStyle/>
+                    <a:p>
+                      <a:r>
+                        <a:rPr sz="1050" b="1" i="0">
+                          <a:solidFill>
+                            <a:srgbClr val="1B2A4A"/>
+                          </a:solidFill>
+                          <a:latin typeface="Calibri"/>
+                        </a:rPr>
+                        <a:t>Proxmox VE</a:t>
+                      </a:r>
+                    </a:p>
+                  </a:txBody>
+                  <a:tcPr anchor="ctr" marL="82296" marR="82296" marT="27432" marB="27432">
+                    <a:solidFill>
+                      <a:srgbClr val="FFFFFF"/>
+                    </a:solidFill>
+                  </a:tcPr>
+                </a:tc>
+                <a:tc>
+                  <a:txBody>
+                    <a:bodyPr wrap="square"/>
+                    <a:lstStyle/>
+                    <a:p>
+                      <a:r>
+                        <a:rPr sz="1050" b="0" i="0">
+                          <a:solidFill>
+                            <a:srgbClr val="3D5A80"/>
+                          </a:solidFill>
+                          <a:latin typeface="Calibri"/>
+                        </a:rPr>
+                        <a:t>Corosync UDP token ring (ring0/ring1) + votequorum for majority voting</a:t>
+                      </a:r>
+                    </a:p>
+                  </a:txBody>
+                  <a:tcPr anchor="ctr" marL="82296" marR="82296" marT="27432" marB="27432">
+                    <a:solidFill>
+                      <a:srgbClr val="FFFFFF"/>
+                    </a:solidFill>
+                  </a:tcPr>
+                </a:tc>
+              </a:tr>
+              <a:tr h="374904">
+                <a:tc>
+                  <a:txBody>
+                    <a:bodyPr wrap="square"/>
+                    <a:lstStyle/>
+                    <a:p>
+                      <a:r>
+                        <a:rPr sz="1050" b="1" i="0">
+                          <a:solidFill>
+                            <a:srgbClr val="1B2A4A"/>
+                          </a:solidFill>
+                          <a:latin typeface="Calibri"/>
+                        </a:rPr>
+                        <a:t>VMware vSphere HA</a:t>
+                      </a:r>
+                    </a:p>
+                  </a:txBody>
+                  <a:tcPr anchor="ctr" marL="82296" marR="82296" marT="27432" marB="27432">
+                    <a:solidFill>
+                      <a:srgbClr val="E8EEF7"/>
+                    </a:solidFill>
+                  </a:tcPr>
+                </a:tc>
+                <a:tc>
+                  <a:txBody>
+                    <a:bodyPr wrap="square"/>
+                    <a:lstStyle/>
+                    <a:p>
+                      <a:r>
+                        <a:rPr sz="1050" b="0" i="0">
+                          <a:solidFill>
+                            <a:srgbClr val="3D5A80"/>
+                          </a:solidFill>
+                          <a:latin typeface="Calibri"/>
+                        </a:rPr>
+                        <a:t>FDM agent heartbeats over the mgmt network; datastore heartbeat as backup</a:t>
+                      </a:r>
+                    </a:p>
+                  </a:txBody>
+                  <a:tcPr anchor="ctr" marL="82296" marR="82296" marT="27432" marB="27432">
+                    <a:solidFill>
+                      <a:srgbClr val="E8EEF7"/>
+                    </a:solidFill>
+                  </a:tcPr>
+                </a:tc>
+              </a:tr>
+              <a:tr h="374904">
+                <a:tc>
+                  <a:txBody>
+                    <a:bodyPr wrap="square"/>
+                    <a:lstStyle/>
+                    <a:p>
+                      <a:r>
+                        <a:rPr sz="1050" b="1" i="0">
+                          <a:solidFill>
+                            <a:srgbClr val="1B2A4A"/>
+                          </a:solidFill>
+                          <a:latin typeface="Calibri"/>
+                        </a:rPr>
+                        <a:t>Hyper-V Failover Clustering</a:t>
+                      </a:r>
+                    </a:p>
+                  </a:txBody>
+                  <a:tcPr anchor="ctr" marL="82296" marR="82296" marT="27432" marB="27432">
+                    <a:solidFill>
+                      <a:srgbClr val="FFFFFF"/>
+                    </a:solidFill>
+                  </a:tcPr>
+                </a:tc>
+                <a:tc>
+                  <a:txBody>
+                    <a:bodyPr wrap="square"/>
+                    <a:lstStyle/>
+                    <a:p>
+                      <a:r>
+                        <a:rPr sz="1050" b="0" i="0">
+                          <a:solidFill>
+                            <a:srgbClr val="3D5A80"/>
+                          </a:solidFill>
+                          <a:latin typeface="Calibri"/>
+                        </a:rPr>
+                        <a:t>Cluster Service heartbeats over cluster network(s); witness breaks ties</a:t>
+                      </a:r>
+                    </a:p>
+                  </a:txBody>
+                  <a:tcPr anchor="ctr" marL="82296" marR="82296" marT="27432" marB="27432">
+                    <a:solidFill>
+                      <a:srgbClr val="FFFFFF"/>
+                    </a:solidFill>
+                  </a:tcPr>
+                </a:tc>
+              </a:tr>
+              <a:tr h="374904">
+                <a:tc>
+                  <a:txBody>
+                    <a:bodyPr wrap="square"/>
+                    <a:lstStyle/>
+                    <a:p>
+                      <a:r>
+                        <a:rPr sz="1050" b="1" i="0">
+                          <a:solidFill>
+                            <a:srgbClr val="1B2A4A"/>
+                          </a:solidFill>
+                          <a:latin typeface="Calibri"/>
+                        </a:rPr>
+                        <a:t>Nutanix AHV</a:t>
+                      </a:r>
+                    </a:p>
+                  </a:txBody>
+                  <a:tcPr anchor="ctr" marL="82296" marR="82296" marT="27432" marB="27432">
+                    <a:solidFill>
+                      <a:srgbClr val="E8EEF7"/>
+                    </a:solidFill>
+                  </a:tcPr>
+                </a:tc>
+                <a:tc>
+                  <a:txBody>
+                    <a:bodyPr wrap="square"/>
+                    <a:lstStyle/>
+                    <a:p>
+                      <a:r>
+                        <a:rPr sz="1050" b="0" i="0">
+                          <a:solidFill>
+                            <a:srgbClr val="3D5A80"/>
+                          </a:solidFill>
+                          <a:latin typeface="Calibri"/>
+                        </a:rPr>
+                        <a:t>Zookeeper/Cassandra-style distributed consensus across Controller VMs (CVMs)</a:t>
+                      </a:r>
+                    </a:p>
+                  </a:txBody>
+                  <a:tcPr anchor="ctr" marL="82296" marR="82296" marT="27432" marB="27432">
+                    <a:solidFill>
+                      <a:srgbClr val="E8EEF7"/>
+                    </a:solidFill>
+                  </a:tcPr>
+                </a:tc>
+              </a:tr>
+              <a:tr h="374904">
+                <a:tc>
+                  <a:txBody>
+                    <a:bodyPr wrap="square"/>
+                    <a:lstStyle/>
+                    <a:p>
+                      <a:r>
+                        <a:rPr sz="1050" b="1" i="0">
+                          <a:solidFill>
+                            <a:srgbClr val="1B2A4A"/>
+                          </a:solidFill>
+                          <a:latin typeface="Calibri"/>
+                        </a:rPr>
+                        <a:t>XCP-ng (Xen Orchestra HA)</a:t>
+                      </a:r>
+                    </a:p>
+                  </a:txBody>
+                  <a:tcPr anchor="ctr" marL="82296" marR="82296" marT="27432" marB="27432">
+                    <a:solidFill>
+                      <a:srgbClr val="FFFFFF"/>
+                    </a:solidFill>
+                  </a:tcPr>
+                </a:tc>
+                <a:tc>
+                  <a:txBody>
+                    <a:bodyPr wrap="square"/>
+                    <a:lstStyle/>
+                    <a:p>
+                      <a:r>
+                        <a:rPr sz="1050" b="0" i="0">
+                          <a:solidFill>
+                            <a:srgbClr val="3D5A80"/>
+                          </a:solidFill>
+                          <a:latin typeface="Calibri"/>
+                        </a:rPr>
+                        <a:t>xhad heartbeat daemon; heartbeats written to shared storage, not a network ring</a:t>
+                      </a:r>
+                    </a:p>
+                  </a:txBody>
+                  <a:tcPr anchor="ctr" marL="82296" marR="82296" marT="27432" marB="27432">
+                    <a:solidFill>
+                      <a:srgbClr val="FFFFFF"/>
+                    </a:solidFill>
+                  </a:tcPr>
+                </a:tc>
+              </a:tr>
+            </a:tbl>
+          </a:graphicData>
+        </a:graphic>
+      </p:graphicFrame>
+    </p:spTree>
+  </p:cSld>
+  <p:clrMapOvr>
+    <a:masterClrMapping/>
+  </p:clrMapOvr>
+</p:sld>
+</file>
+
+<file path=ppt/slides/slide27.xml><?xml version="1.0" encoding="utf-8"?>
+<p:sld xmlns:a="http://schemas.openxmlformats.org/drawingml/2006/main" xmlns:p="http://schemas.openxmlformats.org/presentationml/2006/main" xmlns:r="http://schemas.openxmlformats.org/officeDocument/2006/relationships">
+  <p:cSld>
+    <p:spTree>
+      <p:nvGrpSpPr>
+        <p:cNvPr id="1" name=""/>
+        <p:cNvGrpSpPr/>
+        <p:nvPr/>
+      </p:nvGrpSpPr>
+      <p:grpSpPr/>
+      <p:sp>
+        <p:nvSpPr>
+          <p:cNvPr id="2" name="TextBox 1"/>
+          <p:cNvSpPr txBox="1"/>
+          <p:nvPr/>
+        </p:nvSpPr>
+        <p:spPr>
+          <a:xfrm>
+            <a:off x="640080" y="457200"/>
+            <a:ext cx="10908792" cy="777240"/>
+          </a:xfrm>
+          <a:prstGeom prst="rect">
+            <a:avLst/>
+          </a:prstGeom>
+          <a:noFill/>
+        </p:spPr>
+        <p:txBody>
+          <a:bodyPr wrap="square" anchor="t" lIns="0" rIns="0" tIns="0" bIns="0">
+            <a:spAutoFit/>
+          </a:bodyPr>
+          <a:lstStyle/>
+          <a:p>
+            <a:r>
+              <a:rPr sz="2900" b="1" i="0">
+                <a:solidFill>
+                  <a:srgbClr val="1B2A4A"/>
+                </a:solidFill>
+                <a:latin typeface="Cambria"/>
+              </a:rPr>
+              <a:t>How Ceph Works</a:t>
+            </a:r>
+          </a:p>
+        </p:txBody>
+      </p:sp>
+      <p:sp>
+        <p:nvSpPr>
+          <p:cNvPr id="3" name="TextBox 2"/>
+          <p:cNvSpPr txBox="1"/>
+          <p:nvPr/>
+        </p:nvSpPr>
+        <p:spPr>
+          <a:xfrm>
+            <a:off x="640080" y="1261872"/>
+            <a:ext cx="10908792" cy="365760"/>
+          </a:xfrm>
+          <a:prstGeom prst="rect">
+            <a:avLst/>
+          </a:prstGeom>
+          <a:noFill/>
+        </p:spPr>
+        <p:txBody>
+          <a:bodyPr wrap="square" anchor="t" lIns="0" rIns="0" tIns="0" bIns="0">
+            <a:spAutoFit/>
+          </a:bodyPr>
+          <a:lstStyle/>
+          <a:p>
+            <a:r>
+              <a:rPr sz="1250" b="0" i="0">
+                <a:solidFill>
+                  <a:srgbClr val="3D5A80"/>
+                </a:solidFill>
+                <a:latin typeface="Calibri"/>
+              </a:rPr>
+              <a:t>Ceph turns local disks across all 3 nodes into one replicated, self-healing pool that any node's VMs can read and write.</a:t>
+            </a:r>
+          </a:p>
+        </p:txBody>
+      </p:sp>
+      <p:sp>
+        <p:nvSpPr>
+          <p:cNvPr id="4" name="TextBox 3"/>
+          <p:cNvSpPr txBox="1"/>
+          <p:nvPr/>
+        </p:nvSpPr>
+        <p:spPr>
+          <a:xfrm>
+            <a:off x="640080" y="1755648"/>
+            <a:ext cx="3291840" cy="457200"/>
+          </a:xfrm>
+          <a:prstGeom prst="rect">
+            <a:avLst/>
+          </a:prstGeom>
+          <a:noFill/>
+        </p:spPr>
+        <p:txBody>
+          <a:bodyPr wrap="square" anchor="ctr" lIns="0" rIns="0" tIns="0" bIns="0">
+            <a:spAutoFit/>
+          </a:bodyPr>
+          <a:lstStyle/>
+          <a:p>
+            <a:pPr algn="l"/>
+            <a:r>
+              <a:rPr sz="1050" b="0" i="1">
+                <a:solidFill>
+                  <a:srgbClr val="3D5A80"/>
+                </a:solidFill>
+                <a:latin typeface="Calibri"/>
+              </a:rPr>
+              <a:t>Monitors (MONs) keep the
+cluster map - need their own quorum</a:t>
+            </a:r>
+          </a:p>
+        </p:txBody>
+      </p:sp>
+      <p:sp>
+        <p:nvSpPr>
+          <p:cNvPr id="5" name="Rounded Rectangle 4"/>
+          <p:cNvSpPr/>
+          <p:nvPr/>
+        </p:nvSpPr>
+        <p:spPr>
+          <a:xfrm>
+            <a:off x="4037076" y="1755648"/>
+            <a:ext cx="1051560" cy="457200"/>
+          </a:xfrm>
+          <a:prstGeom prst="roundRect">
+            <a:avLst/>
+          </a:prstGeom>
+          <a:solidFill>
+            <a:srgbClr val="00B4D8"/>
+          </a:solidFill>
+          <a:ln>
+            <a:noFill/>
+          </a:ln>
+          <a:effectLst/>
+        </p:spPr>
+        <p:style>
+          <a:lnRef idx="1">
+            <a:schemeClr val="accent1"/>
+          </a:lnRef>
+          <a:fillRef idx="3">
+            <a:schemeClr val="accent1"/>
+          </a:fillRef>
+          <a:effectRef idx="2">
+            <a:schemeClr val="accent1"/>
+          </a:effectRef>
+          <a:fontRef idx="minor">
+            <a:schemeClr val="lt1"/>
+          </a:fontRef>
+        </p:style>
+        <p:txBody>
+          <a:bodyPr rtlCol="0" anchor="ctr" wrap="square" lIns="45720" rIns="45720" tIns="18288" bIns="18288"/>
+          <a:lstStyle/>
+          <a:p>
+            <a:pPr algn="ctr"/>
+            <a:r>
+              <a:rPr sz="1100" b="1" i="0">
+                <a:solidFill>
+                  <a:srgbClr val="FFFFFF"/>
+                </a:solidFill>
+                <a:latin typeface="Calibri"/>
+              </a:rPr>
+              <a:t>MON 1</a:t>
+            </a:r>
+          </a:p>
+        </p:txBody>
+      </p:sp>
+      <p:sp>
+        <p:nvSpPr>
+          <p:cNvPr id="6" name="Rounded Rectangle 5"/>
+          <p:cNvSpPr/>
+          <p:nvPr/>
+        </p:nvSpPr>
+        <p:spPr>
+          <a:xfrm>
+            <a:off x="5362956" y="1755648"/>
+            <a:ext cx="1051560" cy="457200"/>
+          </a:xfrm>
+          <a:prstGeom prst="roundRect">
+            <a:avLst/>
+          </a:prstGeom>
+          <a:solidFill>
+            <a:srgbClr val="00B4D8"/>
+          </a:solidFill>
+          <a:ln>
+            <a:noFill/>
+          </a:ln>
+          <a:effectLst/>
+        </p:spPr>
+        <p:style>
+          <a:lnRef idx="1">
+            <a:schemeClr val="accent1"/>
+          </a:lnRef>
+          <a:fillRef idx="3">
+            <a:schemeClr val="accent1"/>
+          </a:fillRef>
+          <a:effectRef idx="2">
+            <a:schemeClr val="accent1"/>
+          </a:effectRef>
+          <a:fontRef idx="minor">
+            <a:schemeClr val="lt1"/>
+          </a:fontRef>
+        </p:style>
+        <p:txBody>
+          <a:bodyPr rtlCol="0" anchor="ctr" wrap="square" lIns="45720" rIns="45720" tIns="18288" bIns="18288"/>
+          <a:lstStyle/>
+          <a:p>
+            <a:pPr algn="ctr"/>
+            <a:r>
+              <a:rPr sz="1100" b="1" i="0">
+                <a:solidFill>
+                  <a:srgbClr val="FFFFFF"/>
+                </a:solidFill>
+                <a:latin typeface="Calibri"/>
+              </a:rPr>
+              <a:t>MON 2</a:t>
+            </a:r>
+          </a:p>
+        </p:txBody>
+      </p:sp>
+      <p:sp>
+        <p:nvSpPr>
+          <p:cNvPr id="7" name="Rounded Rectangle 6"/>
+          <p:cNvSpPr/>
+          <p:nvPr/>
+        </p:nvSpPr>
+        <p:spPr>
+          <a:xfrm>
+            <a:off x="6688836" y="1755648"/>
+            <a:ext cx="1051560" cy="457200"/>
+          </a:xfrm>
+          <a:prstGeom prst="roundRect">
+            <a:avLst/>
+          </a:prstGeom>
+          <a:solidFill>
+            <a:srgbClr val="00B4D8"/>
+          </a:solidFill>
+          <a:ln>
+            <a:noFill/>
+          </a:ln>
+          <a:effectLst/>
+        </p:spPr>
+        <p:style>
+          <a:lnRef idx="1">
+            <a:schemeClr val="accent1"/>
+          </a:lnRef>
+          <a:fillRef idx="3">
+            <a:schemeClr val="accent1"/>
+          </a:fillRef>
+          <a:effectRef idx="2">
+            <a:schemeClr val="accent1"/>
+          </a:effectRef>
+          <a:fontRef idx="minor">
+            <a:schemeClr val="lt1"/>
+          </a:fontRef>
+        </p:style>
+        <p:txBody>
+          <a:bodyPr rtlCol="0" anchor="ctr" wrap="square" lIns="45720" rIns="45720" tIns="18288" bIns="18288"/>
+          <a:lstStyle/>
+          <a:p>
+            <a:pPr algn="ctr"/>
+            <a:r>
+              <a:rPr sz="1100" b="1" i="0">
+                <a:solidFill>
+                  <a:srgbClr val="FFFFFF"/>
+                </a:solidFill>
+                <a:latin typeface="Calibri"/>
+              </a:rPr>
+              <a:t>MON 3</a:t>
+            </a:r>
+          </a:p>
+        </p:txBody>
+      </p:sp>
+      <p:cxnSp>
+        <p:nvCxnSpPr>
+          <p:cNvPr id="8" name="Connector 7"/>
+          <p:cNvCxnSpPr/>
+          <p:nvPr/>
+        </p:nvCxnSpPr>
+        <p:spPr>
+          <a:xfrm>
+            <a:off x="5088636" y="1984248"/>
+            <a:ext cx="274320" cy="0"/>
+          </a:xfrm>
+          <a:prstGeom prst="line">
+            <a:avLst/>
+          </a:prstGeom>
+          <a:ln w="15240">
+            <a:solidFill>
+              <a:srgbClr val="1B2A4A"/>
+            </a:solidFill>
+            <a:tailEnd type="triangle" w="med" len="med"/>
+            <a:headEnd type="triangle" w="med" len="med"/>
+          </a:ln>
+        </p:spPr>
+        <p:style>
+          <a:lnRef idx="2">
+            <a:schemeClr val="accent1"/>
+          </a:lnRef>
+          <a:fillRef idx="0">
+            <a:schemeClr val="accent1"/>
+          </a:fillRef>
+          <a:effectRef idx="1">
+            <a:schemeClr val="accent1"/>
+          </a:effectRef>
+          <a:fontRef idx="minor">
+            <a:schemeClr val="tx1"/>
+          </a:fontRef>
+        </p:style>
+      </p:cxnSp>
+      <p:cxnSp>
+        <p:nvCxnSpPr>
+          <p:cNvPr id="9" name="Connector 8"/>
+          <p:cNvCxnSpPr/>
+          <p:nvPr/>
+        </p:nvCxnSpPr>
+        <p:spPr>
+          <a:xfrm>
+            <a:off x="6414516" y="1984248"/>
+            <a:ext cx="274320" cy="0"/>
+          </a:xfrm>
+          <a:prstGeom prst="line">
+            <a:avLst/>
+          </a:prstGeom>
+          <a:ln w="15240">
+            <a:solidFill>
+              <a:srgbClr val="1B2A4A"/>
+            </a:solidFill>
+            <a:tailEnd type="triangle" w="med" len="med"/>
+            <a:headEnd type="triangle" w="med" len="med"/>
+          </a:ln>
+        </p:spPr>
+        <p:style>
+          <a:lnRef idx="2">
+            <a:schemeClr val="accent1"/>
+          </a:lnRef>
+          <a:fillRef idx="0">
+            <a:schemeClr val="accent1"/>
+          </a:fillRef>
+          <a:effectRef idx="1">
+            <a:schemeClr val="accent1"/>
+          </a:effectRef>
+          <a:fontRef idx="minor">
+            <a:schemeClr val="tx1"/>
+          </a:fontRef>
+        </p:style>
+      </p:cxnSp>
+      <p:sp>
+        <p:nvSpPr>
+          <p:cNvPr id="10" name="Rounded Rectangle 9"/>
+          <p:cNvSpPr/>
+          <p:nvPr/>
+        </p:nvSpPr>
+        <p:spPr>
+          <a:xfrm>
+            <a:off x="1362456" y="2715768"/>
+            <a:ext cx="1554480" cy="731520"/>
+          </a:xfrm>
+          <a:prstGeom prst="roundRect">
+            <a:avLst/>
+          </a:prstGeom>
+          <a:solidFill>
+            <a:srgbClr val="00B4D8"/>
+          </a:solidFill>
+          <a:ln>
+            <a:noFill/>
+          </a:ln>
+          <a:effectLst/>
+        </p:spPr>
+        <p:style>
+          <a:lnRef idx="1">
+            <a:schemeClr val="accent1"/>
+          </a:lnRef>
+          <a:fillRef idx="3">
+            <a:schemeClr val="accent1"/>
+          </a:fillRef>
+          <a:effectRef idx="2">
+            <a:schemeClr val="accent1"/>
+          </a:effectRef>
+          <a:fontRef idx="minor">
+            <a:schemeClr val="lt1"/>
+          </a:fontRef>
+        </p:style>
+        <p:txBody>
+          <a:bodyPr rtlCol="0" anchor="ctr" wrap="square" lIns="45720" rIns="45720" tIns="18288" bIns="18288"/>
+          <a:lstStyle/>
+          <a:p>
+            <a:pPr algn="ctr"/>
+            <a:r>
+              <a:rPr sz="1150" b="1" i="0">
+                <a:solidFill>
+                  <a:srgbClr val="FFFFFF"/>
+                </a:solidFill>
+                <a:latin typeface="Calibri"/>
+              </a:rPr>
+              <a:t>Client</a:t>
+            </a:r>
+          </a:p>
+          <a:p>
+            <a:pPr algn="ctr"/>
+            <a:r>
+              <a:rPr sz="1000" b="0" i="0">
+                <a:solidFill>
+                  <a:srgbClr val="FFFFFF"/>
+                </a:solidFill>
+                <a:latin typeface="Calibri"/>
+              </a:rPr>
+              <a:t>writes object</a:t>
+            </a:r>
+          </a:p>
+        </p:txBody>
+      </p:sp>
+      <p:sp>
+        <p:nvSpPr>
+          <p:cNvPr id="11" name="Rounded Rectangle 10"/>
+          <p:cNvSpPr/>
+          <p:nvPr/>
+        </p:nvSpPr>
+        <p:spPr>
+          <a:xfrm>
+            <a:off x="3374136" y="2715768"/>
+            <a:ext cx="2103120" cy="731520"/>
+          </a:xfrm>
+          <a:prstGeom prst="roundRect">
+            <a:avLst/>
+          </a:prstGeom>
+          <a:solidFill>
+            <a:srgbClr val="1B2A4A"/>
+          </a:solidFill>
+          <a:ln>
+            <a:noFill/>
+          </a:ln>
+          <a:effectLst/>
+        </p:spPr>
+        <p:style>
+          <a:lnRef idx="1">
+            <a:schemeClr val="accent1"/>
+          </a:lnRef>
+          <a:fillRef idx="3">
+            <a:schemeClr val="accent1"/>
+          </a:fillRef>
+          <a:effectRef idx="2">
+            <a:schemeClr val="accent1"/>
+          </a:effectRef>
+          <a:fontRef idx="minor">
+            <a:schemeClr val="lt1"/>
+          </a:fontRef>
+        </p:style>
+        <p:txBody>
+          <a:bodyPr rtlCol="0" anchor="ctr" wrap="square" lIns="45720" rIns="45720" tIns="18288" bIns="18288"/>
+          <a:lstStyle/>
+          <a:p>
+            <a:pPr algn="ctr"/>
+            <a:r>
+              <a:rPr sz="1150" b="1" i="0">
+                <a:solidFill>
+                  <a:srgbClr val="FFFFFF"/>
+                </a:solidFill>
+                <a:latin typeface="Calibri"/>
+              </a:rPr>
+              <a:t>Primary OSD</a:t>
+            </a:r>
+          </a:p>
+          <a:p>
+            <a:pPr algn="ctr"/>
+            <a:r>
+              <a:rPr sz="1000" b="0" i="0">
+                <a:solidFill>
+                  <a:srgbClr val="FFFFFF"/>
+                </a:solidFill>
+                <a:latin typeface="Calibri"/>
+              </a:rPr>
+              <a:t>Node 1</a:t>
+            </a:r>
+          </a:p>
+        </p:txBody>
+      </p:sp>
+      <p:sp>
+        <p:nvSpPr>
+          <p:cNvPr id="12" name="Rounded Rectangle 11"/>
+          <p:cNvSpPr/>
+          <p:nvPr/>
+        </p:nvSpPr>
+        <p:spPr>
+          <a:xfrm>
+            <a:off x="5934456" y="2715768"/>
+            <a:ext cx="2103120" cy="731520"/>
+          </a:xfrm>
+          <a:prstGeom prst="roundRect">
+            <a:avLst/>
+          </a:prstGeom>
+          <a:solidFill>
+            <a:srgbClr val="1B2A4A"/>
+          </a:solidFill>
+          <a:ln>
+            <a:noFill/>
+          </a:ln>
+          <a:effectLst/>
+        </p:spPr>
+        <p:style>
+          <a:lnRef idx="1">
+            <a:schemeClr val="accent1"/>
+          </a:lnRef>
+          <a:fillRef idx="3">
+            <a:schemeClr val="accent1"/>
+          </a:fillRef>
+          <a:effectRef idx="2">
+            <a:schemeClr val="accent1"/>
+          </a:effectRef>
+          <a:fontRef idx="minor">
+            <a:schemeClr val="lt1"/>
+          </a:fontRef>
+        </p:style>
+        <p:txBody>
+          <a:bodyPr rtlCol="0" anchor="ctr" wrap="square" lIns="45720" rIns="45720" tIns="18288" bIns="18288"/>
+          <a:lstStyle/>
+          <a:p>
+            <a:pPr algn="ctr"/>
+            <a:r>
+              <a:rPr sz="1150" b="1" i="0">
+                <a:solidFill>
+                  <a:srgbClr val="FFFFFF"/>
+                </a:solidFill>
+                <a:latin typeface="Calibri"/>
+              </a:rPr>
+              <a:t>Replica OSD</a:t>
+            </a:r>
+          </a:p>
+          <a:p>
+            <a:pPr algn="ctr"/>
+            <a:r>
+              <a:rPr sz="1000" b="0" i="0">
+                <a:solidFill>
+                  <a:srgbClr val="FFFFFF"/>
+                </a:solidFill>
+                <a:latin typeface="Calibri"/>
+              </a:rPr>
+              <a:t>Node 2</a:t>
+            </a:r>
+          </a:p>
+        </p:txBody>
+      </p:sp>
+      <p:sp>
+        <p:nvSpPr>
+          <p:cNvPr id="13" name="Rounded Rectangle 12"/>
+          <p:cNvSpPr/>
+          <p:nvPr/>
+        </p:nvSpPr>
+        <p:spPr>
+          <a:xfrm>
+            <a:off x="8494776" y="2715768"/>
+            <a:ext cx="2103120" cy="731520"/>
+          </a:xfrm>
+          <a:prstGeom prst="roundRect">
+            <a:avLst/>
+          </a:prstGeom>
+          <a:solidFill>
+            <a:srgbClr val="1B2A4A"/>
+          </a:solidFill>
+          <a:ln>
+            <a:noFill/>
+          </a:ln>
+          <a:effectLst/>
+        </p:spPr>
+        <p:style>
+          <a:lnRef idx="1">
+            <a:schemeClr val="accent1"/>
+          </a:lnRef>
+          <a:fillRef idx="3">
+            <a:schemeClr val="accent1"/>
+          </a:fillRef>
+          <a:effectRef idx="2">
+            <a:schemeClr val="accent1"/>
+          </a:effectRef>
+          <a:fontRef idx="minor">
+            <a:schemeClr val="lt1"/>
+          </a:fontRef>
+        </p:style>
+        <p:txBody>
+          <a:bodyPr rtlCol="0" anchor="ctr" wrap="square" lIns="45720" rIns="45720" tIns="18288" bIns="18288"/>
+          <a:lstStyle/>
+          <a:p>
+            <a:pPr algn="ctr"/>
+            <a:r>
+              <a:rPr sz="1150" b="1" i="0">
+                <a:solidFill>
+                  <a:srgbClr val="FFFFFF"/>
+                </a:solidFill>
+                <a:latin typeface="Calibri"/>
+              </a:rPr>
+              <a:t>Replica OSD</a:t>
+            </a:r>
+          </a:p>
+          <a:p>
+            <a:pPr algn="ctr"/>
+            <a:r>
+              <a:rPr sz="1000" b="0" i="0">
+                <a:solidFill>
+                  <a:srgbClr val="FFFFFF"/>
+                </a:solidFill>
+                <a:latin typeface="Calibri"/>
+              </a:rPr>
+              <a:t>Node 3</a:t>
+            </a:r>
+          </a:p>
+        </p:txBody>
+      </p:sp>
+      <p:cxnSp>
+        <p:nvCxnSpPr>
+          <p:cNvPr id="14" name="Connector 13"/>
+          <p:cNvCxnSpPr/>
+          <p:nvPr/>
+        </p:nvCxnSpPr>
+        <p:spPr>
+          <a:xfrm>
+            <a:off x="2916936" y="3081528"/>
+            <a:ext cx="457200" cy="0"/>
+          </a:xfrm>
+          <a:prstGeom prst="line">
+            <a:avLst/>
+          </a:prstGeom>
+          <a:ln w="25400">
+            <a:solidFill>
+              <a:srgbClr val="00B4D8"/>
+            </a:solidFill>
+            <a:tailEnd type="triangle" w="med" len="med"/>
+          </a:ln>
+        </p:spPr>
+        <p:style>
+          <a:lnRef idx="2">
+            <a:schemeClr val="accent1"/>
+          </a:lnRef>
+          <a:fillRef idx="0">
+            <a:schemeClr val="accent1"/>
+          </a:fillRef>
+          <a:effectRef idx="1">
+            <a:schemeClr val="accent1"/>
+          </a:effectRef>
+          <a:fontRef idx="minor">
+            <a:schemeClr val="tx1"/>
+          </a:fontRef>
+        </p:style>
+      </p:cxnSp>
+      <p:cxnSp>
+        <p:nvCxnSpPr>
+          <p:cNvPr id="15" name="Connector 14"/>
+          <p:cNvCxnSpPr/>
+          <p:nvPr/>
+        </p:nvCxnSpPr>
+        <p:spPr>
+          <a:xfrm>
+            <a:off x="5477256" y="3081528"/>
+            <a:ext cx="457200" cy="0"/>
+          </a:xfrm>
+          <a:prstGeom prst="line">
+            <a:avLst/>
+          </a:prstGeom>
+          <a:ln w="25400">
+            <a:solidFill>
+              <a:srgbClr val="1B2A4A"/>
+            </a:solidFill>
+            <a:tailEnd type="triangle" w="med" len="med"/>
+          </a:ln>
+        </p:spPr>
+        <p:style>
+          <a:lnRef idx="2">
+            <a:schemeClr val="accent1"/>
+          </a:lnRef>
+          <a:fillRef idx="0">
+            <a:schemeClr val="accent1"/>
+          </a:fillRef>
+          <a:effectRef idx="1">
+            <a:schemeClr val="accent1"/>
+          </a:effectRef>
+          <a:fontRef idx="minor">
+            <a:schemeClr val="tx1"/>
+          </a:fontRef>
+        </p:style>
+      </p:cxnSp>
+      <p:cxnSp>
+        <p:nvCxnSpPr>
+          <p:cNvPr id="16" name="Connector 15"/>
+          <p:cNvCxnSpPr/>
+          <p:nvPr/>
+        </p:nvCxnSpPr>
+        <p:spPr>
+          <a:xfrm>
+            <a:off x="8037576" y="3081528"/>
+            <a:ext cx="457200" cy="0"/>
+          </a:xfrm>
+          <a:prstGeom prst="line">
+            <a:avLst/>
+          </a:prstGeom>
+          <a:ln w="25400">
+            <a:solidFill>
+              <a:srgbClr val="1B2A4A"/>
+            </a:solidFill>
+            <a:tailEnd type="triangle" w="med" len="med"/>
+          </a:ln>
+        </p:spPr>
+        <p:style>
+          <a:lnRef idx="2">
+            <a:schemeClr val="accent1"/>
+          </a:lnRef>
+          <a:fillRef idx="0">
+            <a:schemeClr val="accent1"/>
+          </a:fillRef>
+          <a:effectRef idx="1">
+            <a:schemeClr val="accent1"/>
+          </a:effectRef>
+          <a:fontRef idx="minor">
+            <a:schemeClr val="tx1"/>
+          </a:fontRef>
+        </p:style>
+      </p:cxnSp>
+      <p:sp>
+        <p:nvSpPr>
+          <p:cNvPr id="17" name="TextBox 16"/>
+          <p:cNvSpPr txBox="1"/>
+          <p:nvPr/>
+        </p:nvSpPr>
+        <p:spPr>
+          <a:xfrm>
+            <a:off x="2825496" y="2423160"/>
+            <a:ext cx="2194560" cy="256032"/>
+          </a:xfrm>
+          <a:prstGeom prst="rect">
+            <a:avLst/>
+          </a:prstGeom>
+          <a:noFill/>
+        </p:spPr>
+        <p:txBody>
+          <a:bodyPr wrap="square" anchor="ctr" lIns="0" rIns="0" tIns="0" bIns="0">
+            <a:spAutoFit/>
+          </a:bodyPr>
+          <a:lstStyle/>
+          <a:p>
+            <a:pPr algn="l"/>
+            <a:r>
+              <a:rPr sz="950" b="0" i="1">
+                <a:solidFill>
+                  <a:srgbClr val="3D5A80"/>
+                </a:solidFill>
+                <a:latin typeface="Calibri"/>
+              </a:rPr>
+              <a:t>CRUSH map picks placement</a:t>
+            </a:r>
+          </a:p>
+        </p:txBody>
+      </p:sp>
+      <p:sp>
+        <p:nvSpPr>
+          <p:cNvPr id="18" name="TextBox 17"/>
+          <p:cNvSpPr txBox="1"/>
+          <p:nvPr/>
+        </p:nvSpPr>
+        <p:spPr>
+          <a:xfrm>
+            <a:off x="5385816" y="2423160"/>
+            <a:ext cx="4206240" cy="256032"/>
+          </a:xfrm>
+          <a:prstGeom prst="rect">
+            <a:avLst/>
+          </a:prstGeom>
+          <a:noFill/>
+        </p:spPr>
+        <p:txBody>
+          <a:bodyPr wrap="square" anchor="ctr" lIns="0" rIns="0" tIns="0" bIns="0">
+            <a:spAutoFit/>
+          </a:bodyPr>
+          <a:lstStyle/>
+          <a:p>
+            <a:pPr algn="l"/>
+            <a:r>
+              <a:rPr sz="950" b="0" i="1">
+                <a:solidFill>
+                  <a:srgbClr val="3D5A80"/>
+                </a:solidFill>
+                <a:latin typeface="Calibri"/>
+              </a:rPr>
+              <a:t>synchronous replication (size=3, min_size=2)</a:t>
+            </a:r>
+          </a:p>
+        </p:txBody>
+      </p:sp>
+      <p:sp>
+        <p:nvSpPr>
+          <p:cNvPr id="19" name="Rounded Rectangle 18"/>
+          <p:cNvSpPr/>
+          <p:nvPr/>
+        </p:nvSpPr>
+        <p:spPr>
+          <a:xfrm>
+            <a:off x="640080" y="3739896"/>
+            <a:ext cx="5317236" cy="2843784"/>
+          </a:xfrm>
+          <a:prstGeom prst="roundRect">
+            <a:avLst/>
+          </a:prstGeom>
+          <a:solidFill>
+            <a:srgbClr val="E8EEF7"/>
+          </a:solidFill>
+          <a:ln>
+            <a:noFill/>
+          </a:ln>
+          <a:effectLst/>
+        </p:spPr>
+        <p:style>
+          <a:lnRef idx="1">
+            <a:schemeClr val="accent1"/>
+          </a:lnRef>
+          <a:fillRef idx="3">
+            <a:schemeClr val="accent1"/>
+          </a:fillRef>
+          <a:effectRef idx="2">
+            <a:schemeClr val="accent1"/>
+          </a:effectRef>
+          <a:fontRef idx="minor">
+            <a:schemeClr val="lt1"/>
+          </a:fontRef>
+        </p:style>
+        <p:txBody>
+          <a:bodyPr rtlCol="0" anchor="ctr" lIns="0"/>
+          <a:lstStyle/>
+          <a:p>
+            <a:pPr algn="ctr"/>
+          </a:p>
+        </p:txBody>
+      </p:sp>
+      <p:sp>
+        <p:nvSpPr>
+          <p:cNvPr id="20" name="TextBox 19"/>
+          <p:cNvSpPr txBox="1"/>
+          <p:nvPr/>
+        </p:nvSpPr>
+        <p:spPr>
+          <a:xfrm>
+            <a:off x="841248" y="3849624"/>
+            <a:ext cx="4914900" cy="320040"/>
+          </a:xfrm>
+          <a:prstGeom prst="rect">
+            <a:avLst/>
+          </a:prstGeom>
+          <a:noFill/>
+        </p:spPr>
+        <p:txBody>
+          <a:bodyPr wrap="square" anchor="t" lIns="0" rIns="0" tIns="0" bIns="0">
+            <a:spAutoFit/>
+          </a:bodyPr>
+          <a:lstStyle/>
+          <a:p>
+            <a:pPr algn="l"/>
+            <a:r>
+              <a:rPr sz="1450" b="1" i="0">
+                <a:solidFill>
+                  <a:srgbClr val="1B2A4A"/>
+                </a:solidFill>
+                <a:latin typeface="Cambria"/>
+              </a:rPr>
+              <a:t>Disk Roles: HDD vs SSD</a:t>
+            </a:r>
+          </a:p>
+        </p:txBody>
+      </p:sp>
+      <p:sp>
+        <p:nvSpPr>
+          <p:cNvPr id="21" name="TextBox 20"/>
+          <p:cNvSpPr txBox="1"/>
+          <p:nvPr/>
+        </p:nvSpPr>
+        <p:spPr>
+          <a:xfrm>
+            <a:off x="841248" y="4242816"/>
+            <a:ext cx="4914900" cy="2249424"/>
+          </a:xfrm>
+          <a:prstGeom prst="rect">
+            <a:avLst/>
+          </a:prstGeom>
+          <a:noFill/>
+        </p:spPr>
+        <p:txBody>
+          <a:bodyPr wrap="square" anchor="t" lIns="0" rIns="0" tIns="0" bIns="0">
+            <a:spAutoFit/>
+          </a:bodyPr>
+          <a:lstStyle/>
+          <a:p>
+            <a:pPr>
+              <a:spcAft>
+                <a:spcPts val="600"/>
+              </a:spcAft>
+            </a:pPr>
+            <a:r>
+              <a:rPr sz="1050" b="0" i="0">
+                <a:solidFill>
+                  <a:srgbClr val="3D5A80"/>
+                </a:solidFill>
+                <a:latin typeface="Calibri"/>
+              </a:rPr>
+              <a:t>•  SSD - low latency; ideal for OSD DB/WAL (metadata) devices and all-flash pools</a:t>
+            </a:r>
+          </a:p>
+          <a:p>
+            <a:pPr>
+              <a:spcAft>
+                <a:spcPts val="600"/>
+              </a:spcAft>
+            </a:pPr>
+            <a:r>
+              <a:rPr sz="1050" b="0" i="0">
+                <a:solidFill>
+                  <a:srgbClr val="3D5A80"/>
+                </a:solidFill>
+                <a:latin typeface="Calibri"/>
+              </a:rPr>
+              <a:t>•  HDD - high capacity, low $/TB; fine for bulk/cold data behind an SSD-backed DB/WAL</a:t>
+            </a:r>
+          </a:p>
+          <a:p>
+            <a:pPr>
+              <a:spcAft>
+                <a:spcPts val="600"/>
+              </a:spcAft>
+            </a:pPr>
+            <a:r>
+              <a:rPr sz="1050" b="0" i="0">
+                <a:solidFill>
+                  <a:srgbClr val="3D5A80"/>
+                </a:solidFill>
+                <a:latin typeface="Calibri"/>
+              </a:rPr>
+              <a:t>•  Mixed sizes - CRUSH weights OSDs by capacity, so a 2x bigger disk simply stores ~2x the data</a:t>
+            </a:r>
+          </a:p>
+          <a:p>
+            <a:pPr>
+              <a:spcAft>
+                <a:spcPts val="600"/>
+              </a:spcAft>
+            </a:pPr>
+            <a:r>
+              <a:rPr sz="1050" b="0" i="0">
+                <a:solidFill>
+                  <a:srgbClr val="3D5A80"/>
+                </a:solidFill>
+                <a:latin typeface="Calibri"/>
+              </a:rPr>
+              <a:t>•  Never mix HDD and SSD OSDs in the same pool/CRUSH rule - use separate device classes</a:t>
+            </a:r>
+          </a:p>
+        </p:txBody>
+      </p:sp>
+      <p:sp>
+        <p:nvSpPr>
+          <p:cNvPr id="22" name="Rounded Rectangle 21"/>
+          <p:cNvSpPr/>
+          <p:nvPr/>
+        </p:nvSpPr>
+        <p:spPr>
+          <a:xfrm>
+            <a:off x="6231636" y="3739896"/>
+            <a:ext cx="5317236" cy="2843784"/>
+          </a:xfrm>
+          <a:prstGeom prst="roundRect">
+            <a:avLst/>
+          </a:prstGeom>
+          <a:solidFill>
+            <a:srgbClr val="E8EEF7"/>
+          </a:solidFill>
+          <a:ln>
+            <a:noFill/>
+          </a:ln>
+          <a:effectLst/>
+        </p:spPr>
+        <p:style>
+          <a:lnRef idx="1">
+            <a:schemeClr val="accent1"/>
+          </a:lnRef>
+          <a:fillRef idx="3">
+            <a:schemeClr val="accent1"/>
+          </a:fillRef>
+          <a:effectRef idx="2">
+            <a:schemeClr val="accent1"/>
+          </a:effectRef>
+          <a:fontRef idx="minor">
+            <a:schemeClr val="lt1"/>
+          </a:fontRef>
+        </p:style>
+        <p:txBody>
+          <a:bodyPr rtlCol="0" anchor="ctr" lIns="0"/>
+          <a:lstStyle/>
+          <a:p>
+            <a:pPr algn="ctr"/>
+          </a:p>
+        </p:txBody>
+      </p:sp>
+      <p:sp>
+        <p:nvSpPr>
+          <p:cNvPr id="23" name="TextBox 22"/>
+          <p:cNvSpPr txBox="1"/>
+          <p:nvPr/>
+        </p:nvSpPr>
+        <p:spPr>
+          <a:xfrm>
+            <a:off x="6432804" y="3849624"/>
+            <a:ext cx="4914900" cy="320040"/>
+          </a:xfrm>
+          <a:prstGeom prst="rect">
+            <a:avLst/>
+          </a:prstGeom>
+          <a:noFill/>
+        </p:spPr>
+        <p:txBody>
+          <a:bodyPr wrap="square" anchor="t" lIns="0" rIns="0" tIns="0" bIns="0">
+            <a:spAutoFit/>
+          </a:bodyPr>
+          <a:lstStyle/>
+          <a:p>
+            <a:pPr algn="l"/>
+            <a:r>
+              <a:rPr sz="1450" b="1" i="0">
+                <a:solidFill>
+                  <a:srgbClr val="1B2A4A"/>
+                </a:solidFill>
+                <a:latin typeface="Cambria"/>
+              </a:rPr>
+              <a:t>Other Hypervisors' Storage Layer</a:t>
+            </a:r>
+          </a:p>
+        </p:txBody>
+      </p:sp>
+      <p:sp>
+        <p:nvSpPr>
+          <p:cNvPr id="24" name="TextBox 23"/>
+          <p:cNvSpPr txBox="1"/>
+          <p:nvPr/>
+        </p:nvSpPr>
+        <p:spPr>
+          <a:xfrm>
+            <a:off x="6432804" y="4242816"/>
+            <a:ext cx="4914900" cy="2249424"/>
+          </a:xfrm>
+          <a:prstGeom prst="rect">
+            <a:avLst/>
+          </a:prstGeom>
+          <a:noFill/>
+        </p:spPr>
+        <p:txBody>
+          <a:bodyPr wrap="square" anchor="t" lIns="0" rIns="0" tIns="0" bIns="0">
+            <a:spAutoFit/>
+          </a:bodyPr>
+          <a:lstStyle/>
+          <a:p>
+            <a:pPr>
+              <a:spcAft>
+                <a:spcPts val="600"/>
+              </a:spcAft>
+            </a:pPr>
+            <a:r>
+              <a:rPr sz="1050" b="0" i="0">
+                <a:solidFill>
+                  <a:srgbClr val="3D5A80"/>
+                </a:solidFill>
+                <a:latin typeface="Calibri"/>
+              </a:rPr>
+              <a:t>•  VMware vSAN - object store across disk groups (SSD cache tier + HDD/SSD capacity tier)</a:t>
+            </a:r>
+          </a:p>
+          <a:p>
+            <a:pPr>
+              <a:spcAft>
+                <a:spcPts val="600"/>
+              </a:spcAft>
+            </a:pPr>
+            <a:r>
+              <a:rPr sz="1050" b="0" i="0">
+                <a:solidFill>
+                  <a:srgbClr val="3D5A80"/>
+                </a:solidFill>
+                <a:latin typeface="Calibri"/>
+              </a:rPr>
+              <a:t>•  Microsoft S2D (Hyper-V) - Storage Spaces Direct: software RAID over local disks, cache+capacity tiers</a:t>
+            </a:r>
+          </a:p>
+          <a:p>
+            <a:pPr>
+              <a:spcAft>
+                <a:spcPts val="600"/>
+              </a:spcAft>
+            </a:pPr>
+            <a:r>
+              <a:rPr sz="1050" b="0" i="0">
+                <a:solidFill>
+                  <a:srgbClr val="3D5A80"/>
+                </a:solidFill>
+                <a:latin typeface="Calibri"/>
+              </a:rPr>
+              <a:t>•  Nutanix AHV - Distributed Storage Fabric (Stargate); per-VM oplog on SSD, tiers to HDD</a:t>
+            </a:r>
+          </a:p>
+          <a:p>
+            <a:pPr>
+              <a:spcAft>
+                <a:spcPts val="600"/>
+              </a:spcAft>
+            </a:pPr>
+            <a:r>
+              <a:rPr sz="1050" b="0" i="0">
+                <a:solidFill>
+                  <a:srgbClr val="3D5A80"/>
+                </a:solidFill>
+                <a:latin typeface="Calibri"/>
+              </a:rPr>
+              <a:t>•  oVirt/RHV - hyperconverged GlusterFS, or external Ceph/iSCSI/NFS</a:t>
+            </a:r>
+          </a:p>
+          <a:p>
+            <a:pPr>
+              <a:spcAft>
+                <a:spcPts val="600"/>
+              </a:spcAft>
+            </a:pPr>
+            <a:r>
+              <a:rPr sz="1050" b="0" i="0">
+                <a:solidFill>
+                  <a:srgbClr val="3D5A80"/>
+                </a:solidFill>
+                <a:latin typeface="Calibri"/>
+              </a:rPr>
+              <a:t>•  XCP-ng - no native distributed FS; relies on a shared NFS/iSCSI SAN or add-ons (e.g. LINSTOR)</a:t>
+            </a:r>
+          </a:p>
+        </p:txBody>
+      </p:sp>
+    </p:spTree>
+  </p:cSld>
+  <p:clrMapOvr>
+    <a:masterClrMapping/>
+  </p:clrMapOvr>
+</p:sld>
+</file>
+
+<file path=ppt/slides/slide28.xml><?xml version="1.0" encoding="utf-8"?>
+<p:sld xmlns:a="http://schemas.openxmlformats.org/drawingml/2006/main" xmlns:p="http://schemas.openxmlformats.org/presentationml/2006/main" xmlns:r="http://schemas.openxmlformats.org/officeDocument/2006/relationships">
+  <p:cSld>
+    <p:spTree>
+      <p:nvGrpSpPr>
+        <p:cNvPr id="1" name=""/>
+        <p:cNvGrpSpPr/>
+        <p:nvPr/>
+      </p:nvGrpSpPr>
+      <p:grpSpPr/>
+      <p:sp>
+        <p:nvSpPr>
+          <p:cNvPr id="2" name="TextBox 1"/>
+          <p:cNvSpPr txBox="1"/>
+          <p:nvPr/>
+        </p:nvSpPr>
+        <p:spPr>
+          <a:xfrm>
+            <a:off x="640080" y="457200"/>
+            <a:ext cx="10908792" cy="777240"/>
+          </a:xfrm>
+          <a:prstGeom prst="rect">
+            <a:avLst/>
+          </a:prstGeom>
+          <a:noFill/>
+        </p:spPr>
+        <p:txBody>
+          <a:bodyPr wrap="square" anchor="t" lIns="0" rIns="0" tIns="0" bIns="0">
+            <a:spAutoFit/>
+          </a:bodyPr>
+          <a:lstStyle/>
+          <a:p>
+            <a:r>
+              <a:rPr sz="2900" b="1" i="0">
+                <a:solidFill>
+                  <a:srgbClr val="1B2A4A"/>
+                </a:solidFill>
+                <a:latin typeface="Cambria"/>
+              </a:rPr>
+              <a:t>General Clustering &amp; High Availability</a:t>
+            </a:r>
+          </a:p>
+        </p:txBody>
+      </p:sp>
+      <p:sp>
+        <p:nvSpPr>
+          <p:cNvPr id="3" name="TextBox 2"/>
+          <p:cNvSpPr txBox="1"/>
+          <p:nvPr/>
+        </p:nvSpPr>
+        <p:spPr>
+          <a:xfrm>
+            <a:off x="640080" y="1243584"/>
+            <a:ext cx="10908792" cy="502920"/>
+          </a:xfrm>
+          <a:prstGeom prst="rect">
+            <a:avLst/>
+          </a:prstGeom>
+          <a:noFill/>
+        </p:spPr>
+        <p:txBody>
+          <a:bodyPr wrap="square" anchor="t" lIns="0" rIns="0" tIns="0" bIns="0">
+            <a:spAutoFit/>
+          </a:bodyPr>
+          <a:lstStyle/>
+          <a:p>
+            <a:r>
+              <a:rPr sz="1250" b="0" i="0">
+                <a:solidFill>
+                  <a:srgbClr val="3D5A80"/>
+                </a:solidFill>
+                <a:latin typeface="Calibri"/>
+              </a:rPr>
+              <a:t>Every hypervisor cluster answers the same question after a node failure: are we still safe to act, and can we act without risking two copies of the same VM running at once (split-brain)?</a:t>
+            </a:r>
+          </a:p>
+        </p:txBody>
+      </p:sp>
+      <p:sp>
+        <p:nvSpPr>
+          <p:cNvPr id="4" name="Oval 3"/>
+          <p:cNvSpPr/>
+          <p:nvPr/>
+        </p:nvSpPr>
+        <p:spPr>
+          <a:xfrm>
+            <a:off x="1429207" y="1655064"/>
+            <a:ext cx="384048" cy="384048"/>
+          </a:xfrm>
+          <a:prstGeom prst="ellipse">
+            <a:avLst/>
+          </a:prstGeom>
+          <a:solidFill>
+            <a:srgbClr val="00B4D8"/>
+          </a:solidFill>
+          <a:ln>
+            <a:noFill/>
+          </a:ln>
+          <a:effectLst/>
+        </p:spPr>
+        <p:style>
+          <a:lnRef idx="1">
+            <a:schemeClr val="accent1"/>
+          </a:lnRef>
+          <a:fillRef idx="3">
+            <a:schemeClr val="accent1"/>
+          </a:fillRef>
+          <a:effectRef idx="2">
+            <a:schemeClr val="accent1"/>
+          </a:effectRef>
+          <a:fontRef idx="minor">
+            <a:schemeClr val="lt1"/>
+          </a:fontRef>
+        </p:style>
+        <p:txBody>
+          <a:bodyPr rtlCol="0" anchor="ctr" lIns="0" rIns="0" tIns="0" bIns="0"/>
+          <a:lstStyle/>
+          <a:p>
+            <a:pPr algn="ctr"/>
+            <a:r>
+              <a:rPr sz="1300" b="1" i="0">
+                <a:solidFill>
+                  <a:srgbClr val="FFFFFF"/>
+                </a:solidFill>
+                <a:latin typeface="Calibri"/>
+              </a:rPr>
+              <a:t>1</a:t>
+            </a:r>
+          </a:p>
+        </p:txBody>
+      </p:sp>
+      <p:sp>
+        <p:nvSpPr>
+          <p:cNvPr id="5" name="Rounded Rectangle 4"/>
+          <p:cNvSpPr/>
+          <p:nvPr/>
+        </p:nvSpPr>
+        <p:spPr>
+          <a:xfrm>
+            <a:off x="640080" y="2148840"/>
+            <a:ext cx="1962302" cy="960120"/>
+          </a:xfrm>
+          <a:prstGeom prst="roundRect">
+            <a:avLst/>
+          </a:prstGeom>
+          <a:solidFill>
+            <a:srgbClr val="1B2A4A"/>
+          </a:solidFill>
+          <a:ln>
+            <a:noFill/>
+          </a:ln>
+          <a:effectLst/>
+        </p:spPr>
+        <p:style>
+          <a:lnRef idx="1">
+            <a:schemeClr val="accent1"/>
+          </a:lnRef>
+          <a:fillRef idx="3">
+            <a:schemeClr val="accent1"/>
+          </a:fillRef>
+          <a:effectRef idx="2">
+            <a:schemeClr val="accent1"/>
+          </a:effectRef>
+          <a:fontRef idx="minor">
+            <a:schemeClr val="lt1"/>
+          </a:fontRef>
+        </p:style>
+        <p:txBody>
+          <a:bodyPr rtlCol="0" anchor="ctr" wrap="square" lIns="45720" rIns="45720" tIns="18288" bIns="18288"/>
+          <a:lstStyle/>
+          <a:p>
+            <a:pPr algn="ctr"/>
+            <a:r>
+              <a:rPr sz="1200" b="1" i="0">
+                <a:solidFill>
+                  <a:srgbClr val="FFFFFF"/>
+                </a:solidFill>
+                <a:latin typeface="Calibri"/>
+              </a:rPr>
+              <a:t>Node Fails</a:t>
+            </a:r>
+          </a:p>
+          <a:p>
+            <a:pPr algn="ctr"/>
+            <a:r>
+              <a:rPr sz="1000" b="0" i="0">
+                <a:solidFill>
+                  <a:srgbClr val="FFFFFF"/>
+                </a:solidFill>
+                <a:latin typeface="Calibri"/>
+              </a:rPr>
+              <a:t>power / network loss</a:t>
+            </a:r>
+          </a:p>
+        </p:txBody>
+      </p:sp>
+      <p:sp>
+        <p:nvSpPr>
+          <p:cNvPr id="6" name="Oval 5"/>
+          <p:cNvSpPr/>
+          <p:nvPr/>
+        </p:nvSpPr>
+        <p:spPr>
+          <a:xfrm>
+            <a:off x="3665829" y="1655064"/>
+            <a:ext cx="384048" cy="384048"/>
+          </a:xfrm>
+          <a:prstGeom prst="ellipse">
+            <a:avLst/>
+          </a:prstGeom>
+          <a:solidFill>
+            <a:srgbClr val="00B4D8"/>
+          </a:solidFill>
+          <a:ln>
+            <a:noFill/>
+          </a:ln>
+          <a:effectLst/>
+        </p:spPr>
+        <p:style>
+          <a:lnRef idx="1">
+            <a:schemeClr val="accent1"/>
+          </a:lnRef>
+          <a:fillRef idx="3">
+            <a:schemeClr val="accent1"/>
+          </a:fillRef>
+          <a:effectRef idx="2">
+            <a:schemeClr val="accent1"/>
+          </a:effectRef>
+          <a:fontRef idx="minor">
+            <a:schemeClr val="lt1"/>
+          </a:fontRef>
+        </p:style>
+        <p:txBody>
+          <a:bodyPr rtlCol="0" anchor="ctr" lIns="0" rIns="0" tIns="0" bIns="0"/>
+          <a:lstStyle/>
+          <a:p>
+            <a:pPr algn="ctr"/>
+            <a:r>
+              <a:rPr sz="1300" b="1" i="0">
+                <a:solidFill>
+                  <a:srgbClr val="FFFFFF"/>
+                </a:solidFill>
+                <a:latin typeface="Calibri"/>
+              </a:rPr>
+              <a:t>2</a:t>
+            </a:r>
+          </a:p>
+        </p:txBody>
+      </p:sp>
+      <p:sp>
+        <p:nvSpPr>
+          <p:cNvPr id="7" name="Rounded Rectangle 6"/>
+          <p:cNvSpPr/>
+          <p:nvPr/>
+        </p:nvSpPr>
+        <p:spPr>
+          <a:xfrm>
+            <a:off x="2876702" y="2148840"/>
+            <a:ext cx="1962302" cy="960120"/>
+          </a:xfrm>
+          <a:prstGeom prst="roundRect">
+            <a:avLst/>
+          </a:prstGeom>
+          <a:solidFill>
+            <a:srgbClr val="1B2A4A"/>
+          </a:solidFill>
+          <a:ln>
+            <a:noFill/>
+          </a:ln>
+          <a:effectLst/>
+        </p:spPr>
+        <p:style>
+          <a:lnRef idx="1">
+            <a:schemeClr val="accent1"/>
+          </a:lnRef>
+          <a:fillRef idx="3">
+            <a:schemeClr val="accent1"/>
+          </a:fillRef>
+          <a:effectRef idx="2">
+            <a:schemeClr val="accent1"/>
+          </a:effectRef>
+          <a:fontRef idx="minor">
+            <a:schemeClr val="lt1"/>
+          </a:fontRef>
+        </p:style>
+        <p:txBody>
+          <a:bodyPr rtlCol="0" anchor="ctr" wrap="square" lIns="45720" rIns="45720" tIns="18288" bIns="18288"/>
+          <a:lstStyle/>
+          <a:p>
+            <a:pPr algn="ctr"/>
+            <a:r>
+              <a:rPr sz="1200" b="1" i="0">
+                <a:solidFill>
+                  <a:srgbClr val="FFFFFF"/>
+                </a:solidFill>
+                <a:latin typeface="Calibri"/>
+              </a:rPr>
+              <a:t>Heartbeat Missed</a:t>
+            </a:r>
+          </a:p>
+          <a:p>
+            <a:pPr algn="ctr"/>
+            <a:r>
+              <a:rPr sz="1000" b="0" i="0">
+                <a:solidFill>
+                  <a:srgbClr val="FFFFFF"/>
+                </a:solidFill>
+                <a:latin typeface="Calibri"/>
+              </a:rPr>
+              <a:t>past the timeout window</a:t>
+            </a:r>
+          </a:p>
+        </p:txBody>
+      </p:sp>
+      <p:sp>
+        <p:nvSpPr>
+          <p:cNvPr id="8" name="Oval 7"/>
+          <p:cNvSpPr/>
+          <p:nvPr/>
+        </p:nvSpPr>
+        <p:spPr>
+          <a:xfrm>
+            <a:off x="5902451" y="1655064"/>
+            <a:ext cx="384048" cy="384048"/>
+          </a:xfrm>
+          <a:prstGeom prst="ellipse">
+            <a:avLst/>
+          </a:prstGeom>
+          <a:solidFill>
+            <a:srgbClr val="00B4D8"/>
+          </a:solidFill>
+          <a:ln>
+            <a:noFill/>
+          </a:ln>
+          <a:effectLst/>
+        </p:spPr>
+        <p:style>
+          <a:lnRef idx="1">
+            <a:schemeClr val="accent1"/>
+          </a:lnRef>
+          <a:fillRef idx="3">
+            <a:schemeClr val="accent1"/>
+          </a:fillRef>
+          <a:effectRef idx="2">
+            <a:schemeClr val="accent1"/>
+          </a:effectRef>
+          <a:fontRef idx="minor">
+            <a:schemeClr val="lt1"/>
+          </a:fontRef>
+        </p:style>
+        <p:txBody>
+          <a:bodyPr rtlCol="0" anchor="ctr" lIns="0" rIns="0" tIns="0" bIns="0"/>
+          <a:lstStyle/>
+          <a:p>
+            <a:pPr algn="ctr"/>
+            <a:r>
+              <a:rPr sz="1300" b="1" i="0">
+                <a:solidFill>
+                  <a:srgbClr val="FFFFFF"/>
+                </a:solidFill>
+                <a:latin typeface="Calibri"/>
+              </a:rPr>
+              <a:t>3</a:t>
+            </a:r>
+          </a:p>
+        </p:txBody>
+      </p:sp>
+      <p:sp>
+        <p:nvSpPr>
+          <p:cNvPr id="9" name="Rounded Rectangle 8"/>
+          <p:cNvSpPr/>
+          <p:nvPr/>
+        </p:nvSpPr>
+        <p:spPr>
+          <a:xfrm>
+            <a:off x="5113324" y="2148840"/>
+            <a:ext cx="1962302" cy="960120"/>
+          </a:xfrm>
+          <a:prstGeom prst="roundRect">
+            <a:avLst/>
+          </a:prstGeom>
+          <a:solidFill>
+            <a:srgbClr val="1B2A4A"/>
+          </a:solidFill>
+          <a:ln>
+            <a:noFill/>
+          </a:ln>
+          <a:effectLst/>
+        </p:spPr>
+        <p:style>
+          <a:lnRef idx="1">
+            <a:schemeClr val="accent1"/>
+          </a:lnRef>
+          <a:fillRef idx="3">
+            <a:schemeClr val="accent1"/>
+          </a:fillRef>
+          <a:effectRef idx="2">
+            <a:schemeClr val="accent1"/>
+          </a:effectRef>
+          <a:fontRef idx="minor">
+            <a:schemeClr val="lt1"/>
+          </a:fontRef>
+        </p:style>
+        <p:txBody>
+          <a:bodyPr rtlCol="0" anchor="ctr" wrap="square" lIns="45720" rIns="45720" tIns="18288" bIns="18288"/>
+          <a:lstStyle/>
+          <a:p>
+            <a:pPr algn="ctr"/>
+            <a:r>
+              <a:rPr sz="1200" b="1" i="0">
+                <a:solidFill>
+                  <a:srgbClr val="FFFFFF"/>
+                </a:solidFill>
+                <a:latin typeface="Calibri"/>
+              </a:rPr>
+              <a:t>Quorum Check</a:t>
+            </a:r>
+          </a:p>
+          <a:p>
+            <a:pPr algn="ctr"/>
+            <a:r>
+              <a:rPr sz="1000" b="0" i="0">
+                <a:solidFill>
+                  <a:srgbClr val="FFFFFF"/>
+                </a:solidFill>
+                <a:latin typeface="Calibri"/>
+              </a:rPr>
+              <a:t>still hold a majority?</a:t>
+            </a:r>
+          </a:p>
+        </p:txBody>
+      </p:sp>
+      <p:sp>
+        <p:nvSpPr>
+          <p:cNvPr id="10" name="Oval 9"/>
+          <p:cNvSpPr/>
+          <p:nvPr/>
+        </p:nvSpPr>
+        <p:spPr>
+          <a:xfrm>
+            <a:off x="8139073" y="1655064"/>
+            <a:ext cx="384048" cy="384048"/>
+          </a:xfrm>
+          <a:prstGeom prst="ellipse">
+            <a:avLst/>
+          </a:prstGeom>
+          <a:solidFill>
+            <a:srgbClr val="00B4D8"/>
+          </a:solidFill>
+          <a:ln>
+            <a:noFill/>
+          </a:ln>
+          <a:effectLst/>
+        </p:spPr>
+        <p:style>
+          <a:lnRef idx="1">
+            <a:schemeClr val="accent1"/>
+          </a:lnRef>
+          <a:fillRef idx="3">
+            <a:schemeClr val="accent1"/>
+          </a:fillRef>
+          <a:effectRef idx="2">
+            <a:schemeClr val="accent1"/>
+          </a:effectRef>
+          <a:fontRef idx="minor">
+            <a:schemeClr val="lt1"/>
+          </a:fontRef>
+        </p:style>
+        <p:txBody>
+          <a:bodyPr rtlCol="0" anchor="ctr" lIns="0" rIns="0" tIns="0" bIns="0"/>
+          <a:lstStyle/>
+          <a:p>
+            <a:pPr algn="ctr"/>
+            <a:r>
+              <a:rPr sz="1300" b="1" i="0">
+                <a:solidFill>
+                  <a:srgbClr val="FFFFFF"/>
+                </a:solidFill>
+                <a:latin typeface="Calibri"/>
+              </a:rPr>
+              <a:t>4</a:t>
+            </a:r>
+          </a:p>
+        </p:txBody>
+      </p:sp>
+      <p:sp>
+        <p:nvSpPr>
+          <p:cNvPr id="11" name="Rounded Rectangle 10"/>
+          <p:cNvSpPr/>
+          <p:nvPr/>
+        </p:nvSpPr>
+        <p:spPr>
+          <a:xfrm>
+            <a:off x="7349946" y="2148840"/>
+            <a:ext cx="1962302" cy="960120"/>
+          </a:xfrm>
+          <a:prstGeom prst="roundRect">
+            <a:avLst/>
+          </a:prstGeom>
+          <a:solidFill>
+            <a:srgbClr val="1B2A4A"/>
+          </a:solidFill>
+          <a:ln>
+            <a:noFill/>
+          </a:ln>
+          <a:effectLst/>
+        </p:spPr>
+        <p:style>
+          <a:lnRef idx="1">
+            <a:schemeClr val="accent1"/>
+          </a:lnRef>
+          <a:fillRef idx="3">
+            <a:schemeClr val="accent1"/>
+          </a:fillRef>
+          <a:effectRef idx="2">
+            <a:schemeClr val="accent1"/>
+          </a:effectRef>
+          <a:fontRef idx="minor">
+            <a:schemeClr val="lt1"/>
+          </a:fontRef>
+        </p:style>
+        <p:txBody>
+          <a:bodyPr rtlCol="0" anchor="ctr" wrap="square" lIns="45720" rIns="45720" tIns="18288" bIns="18288"/>
+          <a:lstStyle/>
+          <a:p>
+            <a:pPr algn="ctr"/>
+            <a:r>
+              <a:rPr sz="1200" b="1" i="0">
+                <a:solidFill>
+                  <a:srgbClr val="FFFFFF"/>
+                </a:solidFill>
+                <a:latin typeface="Calibri"/>
+              </a:rPr>
+              <a:t>Fencing</a:t>
+            </a:r>
+          </a:p>
+          <a:p>
+            <a:pPr algn="ctr"/>
+            <a:r>
+              <a:rPr sz="1000" b="0" i="0">
+                <a:solidFill>
+                  <a:srgbClr val="FFFFFF"/>
+                </a:solidFill>
+                <a:latin typeface="Calibri"/>
+              </a:rPr>
+              <a:t>isolate the failed node</a:t>
+            </a:r>
+          </a:p>
+        </p:txBody>
+      </p:sp>
+      <p:sp>
+        <p:nvSpPr>
+          <p:cNvPr id="12" name="Oval 11"/>
+          <p:cNvSpPr/>
+          <p:nvPr/>
+        </p:nvSpPr>
+        <p:spPr>
+          <a:xfrm>
+            <a:off x="10375695" y="1655064"/>
+            <a:ext cx="384048" cy="384048"/>
+          </a:xfrm>
+          <a:prstGeom prst="ellipse">
+            <a:avLst/>
+          </a:prstGeom>
+          <a:solidFill>
+            <a:srgbClr val="00B4D8"/>
+          </a:solidFill>
+          <a:ln>
+            <a:noFill/>
+          </a:ln>
+          <a:effectLst/>
+        </p:spPr>
+        <p:style>
+          <a:lnRef idx="1">
+            <a:schemeClr val="accent1"/>
+          </a:lnRef>
+          <a:fillRef idx="3">
+            <a:schemeClr val="accent1"/>
+          </a:fillRef>
+          <a:effectRef idx="2">
+            <a:schemeClr val="accent1"/>
+          </a:effectRef>
+          <a:fontRef idx="minor">
+            <a:schemeClr val="lt1"/>
+          </a:fontRef>
+        </p:style>
+        <p:txBody>
+          <a:bodyPr rtlCol="0" anchor="ctr" lIns="0" rIns="0" tIns="0" bIns="0"/>
+          <a:lstStyle/>
+          <a:p>
+            <a:pPr algn="ctr"/>
+            <a:r>
+              <a:rPr sz="1300" b="1" i="0">
+                <a:solidFill>
+                  <a:srgbClr val="FFFFFF"/>
+                </a:solidFill>
+                <a:latin typeface="Calibri"/>
+              </a:rPr>
+              <a:t>5</a:t>
+            </a:r>
+          </a:p>
+        </p:txBody>
+      </p:sp>
+      <p:sp>
+        <p:nvSpPr>
+          <p:cNvPr id="13" name="Rounded Rectangle 12"/>
+          <p:cNvSpPr/>
+          <p:nvPr/>
+        </p:nvSpPr>
+        <p:spPr>
+          <a:xfrm>
+            <a:off x="9586568" y="2148840"/>
+            <a:ext cx="1962302" cy="960120"/>
+          </a:xfrm>
+          <a:prstGeom prst="roundRect">
+            <a:avLst/>
+          </a:prstGeom>
+          <a:solidFill>
+            <a:srgbClr val="1B2A4A"/>
+          </a:solidFill>
+          <a:ln>
+            <a:noFill/>
+          </a:ln>
+          <a:effectLst/>
+        </p:spPr>
+        <p:style>
+          <a:lnRef idx="1">
+            <a:schemeClr val="accent1"/>
+          </a:lnRef>
+          <a:fillRef idx="3">
+            <a:schemeClr val="accent1"/>
+          </a:fillRef>
+          <a:effectRef idx="2">
+            <a:schemeClr val="accent1"/>
+          </a:effectRef>
+          <a:fontRef idx="minor">
+            <a:schemeClr val="lt1"/>
+          </a:fontRef>
+        </p:style>
+        <p:txBody>
+          <a:bodyPr rtlCol="0" anchor="ctr" wrap="square" lIns="45720" rIns="45720" tIns="18288" bIns="18288"/>
+          <a:lstStyle/>
+          <a:p>
+            <a:pPr algn="ctr"/>
+            <a:r>
+              <a:rPr sz="1200" b="1" i="0">
+                <a:solidFill>
+                  <a:srgbClr val="FFFFFF"/>
+                </a:solidFill>
+                <a:latin typeface="Calibri"/>
+              </a:rPr>
+              <a:t>HA Restarts VM</a:t>
+            </a:r>
+          </a:p>
+          <a:p>
+            <a:pPr algn="ctr"/>
+            <a:r>
+              <a:rPr sz="1000" b="0" i="0">
+                <a:solidFill>
+                  <a:srgbClr val="FFFFFF"/>
+                </a:solidFill>
+                <a:latin typeface="Calibri"/>
+              </a:rPr>
+              <a:t>on a healthy node</a:t>
+            </a:r>
+          </a:p>
+        </p:txBody>
+      </p:sp>
+      <p:cxnSp>
+        <p:nvCxnSpPr>
+          <p:cNvPr id="14" name="Connector 13"/>
+          <p:cNvCxnSpPr/>
+          <p:nvPr/>
+        </p:nvCxnSpPr>
+        <p:spPr>
+          <a:xfrm>
+            <a:off x="2565806" y="2628900"/>
+            <a:ext cx="347472" cy="0"/>
+          </a:xfrm>
+          <a:prstGeom prst="line">
+            <a:avLst/>
+          </a:prstGeom>
+          <a:ln w="28575">
+            <a:solidFill>
+              <a:srgbClr val="00B4D8"/>
+            </a:solidFill>
+            <a:tailEnd type="triangle" w="med" len="med"/>
+          </a:ln>
+        </p:spPr>
+        <p:style>
+          <a:lnRef idx="2">
+            <a:schemeClr val="accent1"/>
+          </a:lnRef>
+          <a:fillRef idx="0">
+            <a:schemeClr val="accent1"/>
+          </a:fillRef>
+          <a:effectRef idx="1">
+            <a:schemeClr val="accent1"/>
+          </a:effectRef>
+          <a:fontRef idx="minor">
+            <a:schemeClr val="tx1"/>
+          </a:fontRef>
+        </p:style>
+      </p:cxnSp>
+      <p:cxnSp>
+        <p:nvCxnSpPr>
+          <p:cNvPr id="15" name="Connector 14"/>
+          <p:cNvCxnSpPr/>
+          <p:nvPr/>
+        </p:nvCxnSpPr>
+        <p:spPr>
+          <a:xfrm>
+            <a:off x="4802428" y="2628900"/>
+            <a:ext cx="347472" cy="0"/>
+          </a:xfrm>
+          <a:prstGeom prst="line">
+            <a:avLst/>
+          </a:prstGeom>
+          <a:ln w="28575">
+            <a:solidFill>
+              <a:srgbClr val="00B4D8"/>
+            </a:solidFill>
+            <a:tailEnd type="triangle" w="med" len="med"/>
+          </a:ln>
+        </p:spPr>
+        <p:style>
+          <a:lnRef idx="2">
+            <a:schemeClr val="accent1"/>
+          </a:lnRef>
+          <a:fillRef idx="0">
+            <a:schemeClr val="accent1"/>
+          </a:fillRef>
+          <a:effectRef idx="1">
+            <a:schemeClr val="accent1"/>
+          </a:effectRef>
+          <a:fontRef idx="minor">
+            <a:schemeClr val="tx1"/>
+          </a:fontRef>
+        </p:style>
+      </p:cxnSp>
+      <p:cxnSp>
+        <p:nvCxnSpPr>
+          <p:cNvPr id="16" name="Connector 15"/>
+          <p:cNvCxnSpPr/>
+          <p:nvPr/>
+        </p:nvCxnSpPr>
+        <p:spPr>
+          <a:xfrm>
+            <a:off x="7039050" y="2628900"/>
+            <a:ext cx="347472" cy="0"/>
+          </a:xfrm>
+          <a:prstGeom prst="line">
+            <a:avLst/>
+          </a:prstGeom>
+          <a:ln w="28575">
+            <a:solidFill>
+              <a:srgbClr val="00B4D8"/>
+            </a:solidFill>
+            <a:tailEnd type="triangle" w="med" len="med"/>
+          </a:ln>
+        </p:spPr>
+        <p:style>
+          <a:lnRef idx="2">
+            <a:schemeClr val="accent1"/>
+          </a:lnRef>
+          <a:fillRef idx="0">
+            <a:schemeClr val="accent1"/>
+          </a:fillRef>
+          <a:effectRef idx="1">
+            <a:schemeClr val="accent1"/>
+          </a:effectRef>
+          <a:fontRef idx="minor">
+            <a:schemeClr val="tx1"/>
+          </a:fontRef>
+        </p:style>
+      </p:cxnSp>
+      <p:cxnSp>
+        <p:nvCxnSpPr>
+          <p:cNvPr id="17" name="Connector 16"/>
+          <p:cNvCxnSpPr/>
+          <p:nvPr/>
+        </p:nvCxnSpPr>
+        <p:spPr>
+          <a:xfrm>
+            <a:off x="9275672" y="2628900"/>
+            <a:ext cx="347472" cy="0"/>
+          </a:xfrm>
+          <a:prstGeom prst="line">
+            <a:avLst/>
+          </a:prstGeom>
+          <a:ln w="28575">
+            <a:solidFill>
+              <a:srgbClr val="00B4D8"/>
+            </a:solidFill>
+            <a:tailEnd type="triangle" w="med" len="med"/>
+          </a:ln>
+        </p:spPr>
+        <p:style>
+          <a:lnRef idx="2">
+            <a:schemeClr val="accent1"/>
+          </a:lnRef>
+          <a:fillRef idx="0">
+            <a:schemeClr val="accent1"/>
+          </a:fillRef>
+          <a:effectRef idx="1">
+            <a:schemeClr val="accent1"/>
+          </a:effectRef>
+          <a:fontRef idx="minor">
+            <a:schemeClr val="tx1"/>
+          </a:fontRef>
+        </p:style>
+      </p:cxnSp>
+      <p:graphicFrame>
+        <p:nvGraphicFramePr>
+          <p:cNvPr id="18" name="Table 17"/>
+          <p:cNvGraphicFramePr>
+            <a:graphicFrameLocks noGrp="1"/>
+          </p:cNvGraphicFramePr>
+          <p:nvPr/>
+        </p:nvGraphicFramePr>
+        <p:xfrm>
+          <a:off x="640080" y="3429000"/>
+          <a:ext cx="10908792" cy="3154680"/>
+        </p:xfrm>
+        <a:graphic>
+          <a:graphicData uri="http://schemas.openxmlformats.org/drawingml/2006/table">
+            <a:tbl>
+              <a:tblPr firstRow="0" bandRow="0"/>
+              <a:tblGrid>
+                <a:gridCol w="3017520"/>
+                <a:gridCol w="7891272"/>
+              </a:tblGrid>
+              <a:tr h="525780">
+                <a:tc>
+                  <a:txBody>
+                    <a:bodyPr wrap="square"/>
+                    <a:lstStyle/>
+                    <a:p>
+                      <a:r>
+                        <a:rPr sz="1250" b="1" i="0">
+                          <a:solidFill>
+                            <a:srgbClr val="FFFFFF"/>
+                          </a:solidFill>
+                          <a:latin typeface="Calibri"/>
+                        </a:rPr>
+                        <a:t>Platform</a:t>
+                      </a:r>
+                    </a:p>
+                  </a:txBody>
+                  <a:tcPr anchor="ctr" marL="82296" marR="82296" marT="27432" marB="27432">
+                    <a:solidFill>
+                      <a:srgbClr val="1B2A4A"/>
+                    </a:solidFill>
+                  </a:tcPr>
+                </a:tc>
+                <a:tc>
+                  <a:txBody>
+                    <a:bodyPr wrap="square"/>
+                    <a:lstStyle/>
+                    <a:p>
+                      <a:r>
+                        <a:rPr sz="1250" b="1" i="0">
+                          <a:solidFill>
+                            <a:srgbClr val="FFFFFF"/>
+                          </a:solidFill>
+                          <a:latin typeface="Calibri"/>
+                        </a:rPr>
+                        <a:t>HA manager &amp; fencing mechanism</a:t>
+                      </a:r>
+                    </a:p>
+                  </a:txBody>
+                  <a:tcPr anchor="ctr" marL="82296" marR="82296" marT="27432" marB="27432">
+                    <a:solidFill>
+                      <a:srgbClr val="1B2A4A"/>
+                    </a:solidFill>
+                  </a:tcPr>
+                </a:tc>
+              </a:tr>
+              <a:tr h="525780">
+                <a:tc>
+                  <a:txBody>
+                    <a:bodyPr wrap="square"/>
+                    <a:lstStyle/>
+                    <a:p>
+                      <a:r>
+                        <a:rPr sz="1050" b="1" i="0">
+                          <a:solidFill>
+                            <a:srgbClr val="1B2A4A"/>
+                          </a:solidFill>
+                          <a:latin typeface="Calibri"/>
+                        </a:rPr>
+                        <a:t>Proxmox VE</a:t>
+                      </a:r>
+                    </a:p>
+                  </a:txBody>
+                  <a:tcPr anchor="ctr" marL="82296" marR="82296" marT="27432" marB="27432">
+                    <a:solidFill>
+                      <a:srgbClr val="FFFFFF"/>
+                    </a:solidFill>
+                  </a:tcPr>
+                </a:tc>
+                <a:tc>
+                  <a:txBody>
+                    <a:bodyPr wrap="square"/>
+                    <a:lstStyle/>
+                    <a:p>
+                      <a:r>
+                        <a:rPr sz="1050" b="0" i="0">
+                          <a:solidFill>
+                            <a:srgbClr val="3D5A80"/>
+                          </a:solidFill>
+                          <a:latin typeface="Calibri"/>
+                        </a:rPr>
+                        <a:t>HA Manager + watchdog-based self-fencing (node resets itself via hardware/softdog watchdog)</a:t>
+                      </a:r>
+                    </a:p>
+                  </a:txBody>
+                  <a:tcPr anchor="ctr" marL="82296" marR="82296" marT="27432" marB="27432">
+                    <a:solidFill>
+                      <a:srgbClr val="FFFFFF"/>
+                    </a:solidFill>
+                  </a:tcPr>
+                </a:tc>
+              </a:tr>
+              <a:tr h="525780">
+                <a:tc>
+                  <a:txBody>
+                    <a:bodyPr wrap="square"/>
+                    <a:lstStyle/>
+                    <a:p>
+                      <a:r>
+                        <a:rPr sz="1050" b="1" i="0">
+                          <a:solidFill>
+                            <a:srgbClr val="1B2A4A"/>
+                          </a:solidFill>
+                          <a:latin typeface="Calibri"/>
+                        </a:rPr>
+                        <a:t>VMware vSphere</a:t>
+                      </a:r>
+                    </a:p>
+                  </a:txBody>
+                  <a:tcPr anchor="ctr" marL="82296" marR="82296" marT="27432" marB="27432">
+                    <a:solidFill>
+                      <a:srgbClr val="E8EEF7"/>
+                    </a:solidFill>
+                  </a:tcPr>
+                </a:tc>
+                <a:tc>
+                  <a:txBody>
+                    <a:bodyPr wrap="square"/>
+                    <a:lstStyle/>
+                    <a:p>
+                      <a:r>
+                        <a:rPr sz="1050" b="0" i="0">
+                          <a:solidFill>
+                            <a:srgbClr val="3D5A80"/>
+                          </a:solidFill>
+                          <a:latin typeface="Calibri"/>
+                        </a:rPr>
+                        <a:t>vSphere HA (FDM) + DRS; admission control reserves failover capacity in advance</a:t>
+                      </a:r>
+                    </a:p>
+                  </a:txBody>
+                  <a:tcPr anchor="ctr" marL="82296" marR="82296" marT="27432" marB="27432">
+                    <a:solidFill>
+                      <a:srgbClr val="E8EEF7"/>
+                    </a:solidFill>
+                  </a:tcPr>
+                </a:tc>
+              </a:tr>
+              <a:tr h="525780">
+                <a:tc>
+                  <a:txBody>
+                    <a:bodyPr wrap="square"/>
+                    <a:lstStyle/>
+                    <a:p>
+                      <a:r>
+                        <a:rPr sz="1050" b="1" i="0">
+                          <a:solidFill>
+                            <a:srgbClr val="1B2A4A"/>
+                          </a:solidFill>
+                          <a:latin typeface="Calibri"/>
+                        </a:rPr>
+                        <a:t>Hyper-V Failover Clustering</a:t>
+                      </a:r>
+                    </a:p>
+                  </a:txBody>
+                  <a:tcPr anchor="ctr" marL="82296" marR="82296" marT="27432" marB="27432">
+                    <a:solidFill>
+                      <a:srgbClr val="FFFFFF"/>
+                    </a:solidFill>
+                  </a:tcPr>
+                </a:tc>
+                <a:tc>
+                  <a:txBody>
+                    <a:bodyPr wrap="square"/>
+                    <a:lstStyle/>
+                    <a:p>
+                      <a:r>
+                        <a:rPr sz="1050" b="0" i="0">
+                          <a:solidFill>
+                            <a:srgbClr val="3D5A80"/>
+                          </a:solidFill>
+                          <a:latin typeface="Calibri"/>
+                        </a:rPr>
+                        <a:t>Cluster Service + Cluster-Aware Updating; a witness (disk/share/cloud) breaks quorum ties</a:t>
+                      </a:r>
+                    </a:p>
+                  </a:txBody>
+                  <a:tcPr anchor="ctr" marL="82296" marR="82296" marT="27432" marB="27432">
+                    <a:solidFill>
+                      <a:srgbClr val="FFFFFF"/>
+                    </a:solidFill>
+                  </a:tcPr>
+                </a:tc>
+              </a:tr>
+              <a:tr h="525780">
+                <a:tc>
+                  <a:txBody>
+                    <a:bodyPr wrap="square"/>
+                    <a:lstStyle/>
+                    <a:p>
+                      <a:r>
+                        <a:rPr sz="1050" b="1" i="0">
+                          <a:solidFill>
+                            <a:srgbClr val="1B2A4A"/>
+                          </a:solidFill>
+                          <a:latin typeface="Calibri"/>
+                        </a:rPr>
+                        <a:t>Nutanix AHV</a:t>
+                      </a:r>
+                    </a:p>
+                  </a:txBody>
+                  <a:tcPr anchor="ctr" marL="82296" marR="82296" marT="27432" marB="27432">
+                    <a:solidFill>
+                      <a:srgbClr val="E8EEF7"/>
+                    </a:solidFill>
+                  </a:tcPr>
+                </a:tc>
+                <a:tc>
+                  <a:txBody>
+                    <a:bodyPr wrap="square"/>
+                    <a:lstStyle/>
+                    <a:p>
+                      <a:r>
+                        <a:rPr sz="1050" b="0" i="0">
+                          <a:solidFill>
+                            <a:srgbClr val="3D5A80"/>
+                          </a:solidFill>
+                          <a:latin typeface="Calibri"/>
+                        </a:rPr>
+                        <a:t>Acropolis HA; CVM-based, VMs automatically restart on a healthy host</a:t>
+                      </a:r>
+                    </a:p>
+                  </a:txBody>
+                  <a:tcPr anchor="ctr" marL="82296" marR="82296" marT="27432" marB="27432">
+                    <a:solidFill>
+                      <a:srgbClr val="E8EEF7"/>
+                    </a:solidFill>
+                  </a:tcPr>
+                </a:tc>
+              </a:tr>
+              <a:tr h="525780">
+                <a:tc>
+                  <a:txBody>
+                    <a:bodyPr wrap="square"/>
+                    <a:lstStyle/>
+                    <a:p>
+                      <a:r>
+                        <a:rPr sz="1050" b="1" i="0">
+                          <a:solidFill>
+                            <a:srgbClr val="1B2A4A"/>
+                          </a:solidFill>
+                          <a:latin typeface="Calibri"/>
+                        </a:rPr>
+                        <a:t>oVirt / RHV</a:t>
+                      </a:r>
+                    </a:p>
+                  </a:txBody>
+                  <a:tcPr anchor="ctr" marL="82296" marR="82296" marT="27432" marB="27432">
+                    <a:solidFill>
+                      <a:srgbClr val="FFFFFF"/>
+                    </a:solidFill>
+                  </a:tcPr>
+                </a:tc>
+                <a:tc>
+                  <a:txBody>
+                    <a:bodyPr wrap="square"/>
+                    <a:lstStyle/>
+                    <a:p>
+                      <a:r>
+                        <a:rPr sz="1050" b="0" i="0">
+                          <a:solidFill>
+                            <a:srgbClr val="3D5A80"/>
+                          </a:solidFill>
+                          <a:latin typeface="Calibri"/>
+                        </a:rPr>
+                        <a:t>Pacemaker-based Manager HA (self-hosted engine) + IPMI/iLO/iDRAC fencing agents for hosts</a:t>
+                      </a:r>
+                    </a:p>
+                  </a:txBody>
+                  <a:tcPr anchor="ctr" marL="82296" marR="82296" marT="27432" marB="27432">
+                    <a:solidFill>
+                      <a:srgbClr val="FFFFFF"/>
+                    </a:solidFill>
+                  </a:tcPr>
+                </a:tc>
+              </a:tr>
+            </a:tbl>
+          </a:graphicData>
+        </a:graphic>
+      </p:graphicFrame>
+    </p:spTree>
+  </p:cSld>
+  <p:clrMapOvr>
+    <a:masterClrMapping/>
+  </p:clrMapOvr>
+</p:sld>
+</file>
+
+<file path=ppt/slides/slide29.xml><?xml version="1.0" encoding="utf-8"?>
+<p:sld xmlns:a="http://schemas.openxmlformats.org/drawingml/2006/main" xmlns:p="http://schemas.openxmlformats.org/presentationml/2006/main" xmlns:r="http://schemas.openxmlformats.org/officeDocument/2006/relationships">
+  <p:cSld>
+    <p:spTree>
+      <p:nvGrpSpPr>
+        <p:cNvPr id="1" name=""/>
+        <p:cNvGrpSpPr/>
+        <p:nvPr/>
+      </p:nvGrpSpPr>
+      <p:grpSpPr/>
+      <p:sp>
+        <p:nvSpPr>
+          <p:cNvPr id="2" name="TextBox 1"/>
+          <p:cNvSpPr txBox="1"/>
+          <p:nvPr/>
+        </p:nvSpPr>
+        <p:spPr>
+          <a:xfrm>
+            <a:off x="640080" y="457200"/>
+            <a:ext cx="10908792" cy="777240"/>
+          </a:xfrm>
+          <a:prstGeom prst="rect">
+            <a:avLst/>
+          </a:prstGeom>
+          <a:noFill/>
+        </p:spPr>
+        <p:txBody>
+          <a:bodyPr wrap="square" anchor="t" lIns="0" rIns="0" tIns="0" bIns="0">
+            <a:spAutoFit/>
+          </a:bodyPr>
+          <a:lstStyle/>
+          <a:p>
+            <a:r>
+              <a:rPr sz="2900" b="1" i="0">
+                <a:solidFill>
+                  <a:srgbClr val="1B2A4A"/>
+                </a:solidFill>
+                <a:latin typeface="Cambria"/>
+              </a:rPr>
+              <a:t>How Time Drift Breaks All of This</a:t>
+            </a:r>
+          </a:p>
+        </p:txBody>
+      </p:sp>
+      <p:sp>
+        <p:nvSpPr>
+          <p:cNvPr id="3" name="TextBox 2"/>
+          <p:cNvSpPr txBox="1"/>
+          <p:nvPr/>
+        </p:nvSpPr>
+        <p:spPr>
+          <a:xfrm>
+            <a:off x="640080" y="1243584"/>
+            <a:ext cx="10908792" cy="502920"/>
+          </a:xfrm>
+          <a:prstGeom prst="rect">
+            <a:avLst/>
+          </a:prstGeom>
+          <a:noFill/>
+        </p:spPr>
+        <p:txBody>
+          <a:bodyPr wrap="square" anchor="t" lIns="0" rIns="0" tIns="0" bIns="0">
+            <a:spAutoFit/>
+          </a:bodyPr>
+          <a:lstStyle/>
+          <a:p>
+            <a:r>
+              <a:rPr sz="1250" b="0" i="0">
+                <a:solidFill>
+                  <a:srgbClr val="3D5A80"/>
+                </a:solidFill>
+                <a:latin typeface="Calibri"/>
+              </a:rPr>
+              <a:t>Corosync and Ceph are both clock-sensitive (Lab 1, Part 2) - chrony (Lab 2) is what keeps every node's clock close enough that these systems' built-in timeouts stay meaningful.</a:t>
+            </a:r>
+          </a:p>
+        </p:txBody>
+      </p:sp>
+      <p:cxnSp>
+        <p:nvCxnSpPr>
+          <p:cNvPr id="4" name="Connector 3"/>
+          <p:cNvCxnSpPr/>
+          <p:nvPr/>
+        </p:nvCxnSpPr>
+        <p:spPr>
+          <a:xfrm>
+            <a:off x="914400" y="2606040"/>
+            <a:ext cx="10424160" cy="0"/>
+          </a:xfrm>
+          <a:prstGeom prst="line">
+            <a:avLst/>
+          </a:prstGeom>
+          <a:ln w="28575">
+            <a:solidFill>
+              <a:srgbClr val="1B2A4A"/>
+            </a:solidFill>
+            <a:tailEnd type="triangle" w="med" len="med"/>
+          </a:ln>
+        </p:spPr>
+        <p:style>
+          <a:lnRef idx="2">
+            <a:schemeClr val="accent1"/>
+          </a:lnRef>
+          <a:fillRef idx="0">
+            <a:schemeClr val="accent1"/>
+          </a:fillRef>
+          <a:effectRef idx="1">
+            <a:schemeClr val="accent1"/>
+          </a:effectRef>
+          <a:fontRef idx="minor">
+            <a:schemeClr val="tx1"/>
+          </a:fontRef>
+        </p:style>
+      </p:cxnSp>
+      <p:sp>
+        <p:nvSpPr>
+          <p:cNvPr id="5" name="TextBox 4"/>
+          <p:cNvSpPr txBox="1"/>
+          <p:nvPr/>
+        </p:nvSpPr>
+        <p:spPr>
+          <a:xfrm>
+            <a:off x="914400" y="2715768"/>
+            <a:ext cx="2743200" cy="274320"/>
+          </a:xfrm>
+          <a:prstGeom prst="rect">
+            <a:avLst/>
+          </a:prstGeom>
+          <a:noFill/>
+        </p:spPr>
+        <p:txBody>
+          <a:bodyPr wrap="square" anchor="t" lIns="0" rIns="0" tIns="0" bIns="0">
+            <a:spAutoFit/>
+          </a:bodyPr>
+          <a:lstStyle/>
+          <a:p>
+            <a:pPr algn="l"/>
+            <a:r>
+              <a:rPr sz="1000" b="0" i="1">
+                <a:solidFill>
+                  <a:srgbClr val="3D5A80"/>
+                </a:solidFill>
+                <a:latin typeface="Calibri"/>
+              </a:rPr>
+              <a:t>clock drift increases --&gt;</a:t>
+            </a:r>
+          </a:p>
+        </p:txBody>
+      </p:sp>
+      <p:sp>
+        <p:nvSpPr>
+          <p:cNvPr id="6" name="TextBox 5"/>
+          <p:cNvSpPr txBox="1"/>
+          <p:nvPr/>
+        </p:nvSpPr>
+        <p:spPr>
+          <a:xfrm>
+            <a:off x="8961120" y="2715768"/>
+            <a:ext cx="2377440" cy="274320"/>
+          </a:xfrm>
+          <a:prstGeom prst="rect">
+            <a:avLst/>
+          </a:prstGeom>
+          <a:noFill/>
+        </p:spPr>
+        <p:txBody>
+          <a:bodyPr wrap="square" anchor="t" lIns="0" rIns="0" tIns="0" bIns="0">
+            <a:spAutoFit/>
+          </a:bodyPr>
+          <a:lstStyle/>
+          <a:p>
+            <a:pPr algn="r"/>
+            <a:r>
+              <a:rPr sz="900" b="0" i="1">
+                <a:solidFill>
+                  <a:srgbClr val="3D5A80"/>
+                </a:solidFill>
+                <a:latin typeface="Calibri"/>
+              </a:rPr>
+              <a:t>(not to scale)</a:t>
+            </a:r>
+          </a:p>
+        </p:txBody>
+      </p:sp>
+      <p:cxnSp>
+        <p:nvCxnSpPr>
+          <p:cNvPr id="7" name="Connector 6"/>
+          <p:cNvCxnSpPr/>
+          <p:nvPr/>
+        </p:nvCxnSpPr>
+        <p:spPr>
+          <a:xfrm>
+            <a:off x="2377440" y="2478024"/>
+            <a:ext cx="0" cy="256032"/>
+          </a:xfrm>
+          <a:prstGeom prst="line">
+            <a:avLst/>
+          </a:prstGeom>
+          <a:ln w="31750">
+            <a:solidFill>
+              <a:srgbClr val="00B4D8"/>
+            </a:solidFill>
+            <a:tailEnd type="triangle" w="med" len="med"/>
+          </a:ln>
+        </p:spPr>
+        <p:style>
+          <a:lnRef idx="2">
+            <a:schemeClr val="accent1"/>
+          </a:lnRef>
+          <a:fillRef idx="0">
+            <a:schemeClr val="accent1"/>
+          </a:fillRef>
+          <a:effectRef idx="1">
+            <a:schemeClr val="accent1"/>
+          </a:effectRef>
+          <a:fontRef idx="minor">
+            <a:schemeClr val="tx1"/>
+          </a:fontRef>
+        </p:style>
+      </p:cxnSp>
+      <p:sp>
+        <p:nvSpPr>
+          <p:cNvPr id="8" name="TextBox 7"/>
+          <p:cNvSpPr txBox="1"/>
+          <p:nvPr/>
+        </p:nvSpPr>
+        <p:spPr>
+          <a:xfrm>
+            <a:off x="1371600" y="1645920"/>
+            <a:ext cx="2011680" cy="274320"/>
+          </a:xfrm>
+          <a:prstGeom prst="rect">
+            <a:avLst/>
+          </a:prstGeom>
+          <a:noFill/>
+        </p:spPr>
+        <p:txBody>
+          <a:bodyPr wrap="square" anchor="ctr" lIns="0" rIns="0" tIns="0" bIns="0">
+            <a:spAutoFit/>
+          </a:bodyPr>
+          <a:lstStyle/>
+          <a:p>
+            <a:pPr algn="ctr"/>
+            <a:r>
+              <a:rPr sz="1200" b="1" i="0">
+                <a:solidFill>
+                  <a:srgbClr val="1B2A4A"/>
+                </a:solidFill>
+                <a:latin typeface="Calibri"/>
+              </a:rPr>
+              <a:t>~50 ms</a:t>
+            </a:r>
+          </a:p>
+        </p:txBody>
+      </p:sp>
+      <p:sp>
+        <p:nvSpPr>
+          <p:cNvPr id="9" name="TextBox 8"/>
+          <p:cNvSpPr txBox="1"/>
+          <p:nvPr/>
+        </p:nvSpPr>
+        <p:spPr>
+          <a:xfrm>
+            <a:off x="1371600" y="1947672"/>
+            <a:ext cx="2011680" cy="548640"/>
+          </a:xfrm>
+          <a:prstGeom prst="rect">
+            <a:avLst/>
+          </a:prstGeom>
+          <a:noFill/>
+        </p:spPr>
+        <p:txBody>
+          <a:bodyPr wrap="square" anchor="ctr" lIns="0" rIns="0" tIns="0" bIns="0">
+            <a:spAutoFit/>
+          </a:bodyPr>
+          <a:lstStyle/>
+          <a:p>
+            <a:pPr algn="ctr"/>
+            <a:r>
+              <a:rPr sz="950" b="0" i="0">
+                <a:solidFill>
+                  <a:srgbClr val="3D5A80"/>
+                </a:solidFill>
+                <a:latin typeface="Calibri"/>
+              </a:rPr>
+              <a:t>Ceph MON clock skew warning
+(HEALTH_WARN)</a:t>
+            </a:r>
+          </a:p>
+        </p:txBody>
+      </p:sp>
+      <p:cxnSp>
+        <p:nvCxnSpPr>
+          <p:cNvPr id="10" name="Connector 9"/>
+          <p:cNvCxnSpPr/>
+          <p:nvPr/>
+        </p:nvCxnSpPr>
+        <p:spPr>
+          <a:xfrm>
+            <a:off x="5120640" y="2478024"/>
+            <a:ext cx="0" cy="256032"/>
+          </a:xfrm>
+          <a:prstGeom prst="line">
+            <a:avLst/>
+          </a:prstGeom>
+          <a:ln w="31750">
+            <a:solidFill>
+              <a:srgbClr val="00B4D8"/>
+            </a:solidFill>
+            <a:tailEnd type="triangle" w="med" len="med"/>
+          </a:ln>
+        </p:spPr>
+        <p:style>
+          <a:lnRef idx="2">
+            <a:schemeClr val="accent1"/>
+          </a:lnRef>
+          <a:fillRef idx="0">
+            <a:schemeClr val="accent1"/>
+          </a:fillRef>
+          <a:effectRef idx="1">
+            <a:schemeClr val="accent1"/>
+          </a:effectRef>
+          <a:fontRef idx="minor">
+            <a:schemeClr val="tx1"/>
+          </a:fontRef>
+        </p:style>
+      </p:cxnSp>
+      <p:sp>
+        <p:nvSpPr>
+          <p:cNvPr id="11" name="TextBox 10"/>
+          <p:cNvSpPr txBox="1"/>
+          <p:nvPr/>
+        </p:nvSpPr>
+        <p:spPr>
+          <a:xfrm>
+            <a:off x="4114800" y="2898648"/>
+            <a:ext cx="2011680" cy="274320"/>
+          </a:xfrm>
+          <a:prstGeom prst="rect">
+            <a:avLst/>
+          </a:prstGeom>
+          <a:noFill/>
+        </p:spPr>
+        <p:txBody>
+          <a:bodyPr wrap="square" anchor="ctr" lIns="0" rIns="0" tIns="0" bIns="0">
+            <a:spAutoFit/>
+          </a:bodyPr>
+          <a:lstStyle/>
+          <a:p>
+            <a:pPr algn="ctr"/>
+            <a:r>
+              <a:rPr sz="1200" b="1" i="0">
+                <a:solidFill>
+                  <a:srgbClr val="1B2A4A"/>
+                </a:solidFill>
+                <a:latin typeface="Calibri"/>
+              </a:rPr>
+              <a:t>~1 sec</a:t>
+            </a:r>
+          </a:p>
+        </p:txBody>
+      </p:sp>
+      <p:sp>
+        <p:nvSpPr>
+          <p:cNvPr id="12" name="TextBox 11"/>
+          <p:cNvSpPr txBox="1"/>
+          <p:nvPr/>
+        </p:nvSpPr>
+        <p:spPr>
+          <a:xfrm>
+            <a:off x="4114800" y="3200400"/>
+            <a:ext cx="2011680" cy="548640"/>
+          </a:xfrm>
+          <a:prstGeom prst="rect">
+            <a:avLst/>
+          </a:prstGeom>
+          <a:noFill/>
+        </p:spPr>
+        <p:txBody>
+          <a:bodyPr wrap="square" anchor="ctr" lIns="0" rIns="0" tIns="0" bIns="0">
+            <a:spAutoFit/>
+          </a:bodyPr>
+          <a:lstStyle/>
+          <a:p>
+            <a:pPr algn="ctr"/>
+            <a:r>
+              <a:rPr sz="950" b="0" i="0">
+                <a:solidFill>
+                  <a:srgbClr val="3D5A80"/>
+                </a:solidFill>
+                <a:latin typeface="Calibri"/>
+              </a:rPr>
+              <a:t>Corosync token timeout risk
+(spurious node eviction)</a:t>
+            </a:r>
+          </a:p>
+        </p:txBody>
+      </p:sp>
+      <p:cxnSp>
+        <p:nvCxnSpPr>
+          <p:cNvPr id="13" name="Connector 12"/>
+          <p:cNvCxnSpPr/>
+          <p:nvPr/>
+        </p:nvCxnSpPr>
+        <p:spPr>
+          <a:xfrm>
+            <a:off x="8138160" y="2478024"/>
+            <a:ext cx="0" cy="256032"/>
+          </a:xfrm>
+          <a:prstGeom prst="line">
+            <a:avLst/>
+          </a:prstGeom>
+          <a:ln w="31750">
+            <a:solidFill>
+              <a:srgbClr val="00B4D8"/>
+            </a:solidFill>
+            <a:tailEnd type="triangle" w="med" len="med"/>
+          </a:ln>
+        </p:spPr>
+        <p:style>
+          <a:lnRef idx="2">
+            <a:schemeClr val="accent1"/>
+          </a:lnRef>
+          <a:fillRef idx="0">
+            <a:schemeClr val="accent1"/>
+          </a:fillRef>
+          <a:effectRef idx="1">
+            <a:schemeClr val="accent1"/>
+          </a:effectRef>
+          <a:fontRef idx="minor">
+            <a:schemeClr val="tx1"/>
+          </a:fontRef>
+        </p:style>
+      </p:cxnSp>
+      <p:sp>
+        <p:nvSpPr>
+          <p:cNvPr id="14" name="TextBox 13"/>
+          <p:cNvSpPr txBox="1"/>
+          <p:nvPr/>
+        </p:nvSpPr>
+        <p:spPr>
+          <a:xfrm>
+            <a:off x="7132320" y="1645920"/>
+            <a:ext cx="2011680" cy="274320"/>
+          </a:xfrm>
+          <a:prstGeom prst="rect">
+            <a:avLst/>
+          </a:prstGeom>
+          <a:noFill/>
+        </p:spPr>
+        <p:txBody>
+          <a:bodyPr wrap="square" anchor="ctr" lIns="0" rIns="0" tIns="0" bIns="0">
+            <a:spAutoFit/>
+          </a:bodyPr>
+          <a:lstStyle/>
+          <a:p>
+            <a:pPr algn="ctr"/>
+            <a:r>
+              <a:rPr sz="1200" b="1" i="0">
+                <a:solidFill>
+                  <a:srgbClr val="1B2A4A"/>
+                </a:solidFill>
+                <a:latin typeface="Calibri"/>
+              </a:rPr>
+              <a:t>~5 min</a:t>
+            </a:r>
+          </a:p>
+        </p:txBody>
+      </p:sp>
+      <p:sp>
+        <p:nvSpPr>
+          <p:cNvPr id="15" name="TextBox 14"/>
+          <p:cNvSpPr txBox="1"/>
+          <p:nvPr/>
+        </p:nvSpPr>
+        <p:spPr>
+          <a:xfrm>
+            <a:off x="7132320" y="1947672"/>
+            <a:ext cx="2011680" cy="548640"/>
+          </a:xfrm>
+          <a:prstGeom prst="rect">
+            <a:avLst/>
+          </a:prstGeom>
+          <a:noFill/>
+        </p:spPr>
+        <p:txBody>
+          <a:bodyPr wrap="square" anchor="ctr" lIns="0" rIns="0" tIns="0" bIns="0">
+            <a:spAutoFit/>
+          </a:bodyPr>
+          <a:lstStyle/>
+          <a:p>
+            <a:pPr algn="ctr"/>
+            <a:r>
+              <a:rPr sz="950" b="0" i="0">
+                <a:solidFill>
+                  <a:srgbClr val="3D5A80"/>
+                </a:solidFill>
+                <a:latin typeface="Calibri"/>
+              </a:rPr>
+              <a:t>Kerberos ticket validation
+starts failing</a:t>
+            </a:r>
+          </a:p>
+        </p:txBody>
+      </p:sp>
+      <p:cxnSp>
+        <p:nvCxnSpPr>
+          <p:cNvPr id="16" name="Connector 15"/>
+          <p:cNvCxnSpPr/>
+          <p:nvPr/>
+        </p:nvCxnSpPr>
+        <p:spPr>
+          <a:xfrm>
+            <a:off x="10607040" y="2478024"/>
+            <a:ext cx="0" cy="256032"/>
+          </a:xfrm>
+          <a:prstGeom prst="line">
+            <a:avLst/>
+          </a:prstGeom>
+          <a:ln w="31750">
+            <a:solidFill>
+              <a:srgbClr val="00B4D8"/>
+            </a:solidFill>
+            <a:tailEnd type="triangle" w="med" len="med"/>
+          </a:ln>
+        </p:spPr>
+        <p:style>
+          <a:lnRef idx="2">
+            <a:schemeClr val="accent1"/>
+          </a:lnRef>
+          <a:fillRef idx="0">
+            <a:schemeClr val="accent1"/>
+          </a:fillRef>
+          <a:effectRef idx="1">
+            <a:schemeClr val="accent1"/>
+          </a:effectRef>
+          <a:fontRef idx="minor">
+            <a:schemeClr val="tx1"/>
+          </a:fontRef>
+        </p:style>
+      </p:cxnSp>
+      <p:sp>
+        <p:nvSpPr>
+          <p:cNvPr id="17" name="TextBox 16"/>
+          <p:cNvSpPr txBox="1"/>
+          <p:nvPr/>
+        </p:nvSpPr>
+        <p:spPr>
+          <a:xfrm>
+            <a:off x="9601200" y="2898648"/>
+            <a:ext cx="2011680" cy="274320"/>
+          </a:xfrm>
+          <a:prstGeom prst="rect">
+            <a:avLst/>
+          </a:prstGeom>
+          <a:noFill/>
+        </p:spPr>
+        <p:txBody>
+          <a:bodyPr wrap="square" anchor="ctr" lIns="0" rIns="0" tIns="0" bIns="0">
+            <a:spAutoFit/>
+          </a:bodyPr>
+          <a:lstStyle/>
+          <a:p>
+            <a:pPr algn="ctr"/>
+            <a:r>
+              <a:rPr sz="1200" b="1" i="0">
+                <a:solidFill>
+                  <a:srgbClr val="1B2A4A"/>
+                </a:solidFill>
+                <a:latin typeface="Calibri"/>
+              </a:rPr>
+              <a:t>minutes+</a:t>
+            </a:r>
+          </a:p>
+        </p:txBody>
+      </p:sp>
+      <p:sp>
+        <p:nvSpPr>
+          <p:cNvPr id="18" name="TextBox 17"/>
+          <p:cNvSpPr txBox="1"/>
+          <p:nvPr/>
+        </p:nvSpPr>
+        <p:spPr>
+          <a:xfrm>
+            <a:off x="9601200" y="3200400"/>
+            <a:ext cx="2011680" cy="548640"/>
+          </a:xfrm>
+          <a:prstGeom prst="rect">
+            <a:avLst/>
+          </a:prstGeom>
+          <a:noFill/>
+        </p:spPr>
+        <p:txBody>
+          <a:bodyPr wrap="square" anchor="ctr" lIns="0" rIns="0" tIns="0" bIns="0">
+            <a:spAutoFit/>
+          </a:bodyPr>
+          <a:lstStyle/>
+          <a:p>
+            <a:pPr algn="ctr"/>
+            <a:r>
+              <a:rPr sz="950" b="0" i="0">
+                <a:solidFill>
+                  <a:srgbClr val="3D5A80"/>
+                </a:solidFill>
+                <a:latin typeface="Calibri"/>
+              </a:rPr>
+              <a:t>TLS cert checks &amp; cross-host
+log correlation break</a:t>
+            </a:r>
+          </a:p>
+        </p:txBody>
+      </p:sp>
+      <p:graphicFrame>
+        <p:nvGraphicFramePr>
+          <p:cNvPr id="19" name="Table 18"/>
+          <p:cNvGraphicFramePr>
+            <a:graphicFrameLocks noGrp="1"/>
+          </p:cNvGraphicFramePr>
+          <p:nvPr/>
+        </p:nvGraphicFramePr>
+        <p:xfrm>
+          <a:off x="640080" y="3977639"/>
+          <a:ext cx="10908792" cy="2606040"/>
+        </p:xfrm>
+        <a:graphic>
+          <a:graphicData uri="http://schemas.openxmlformats.org/drawingml/2006/table">
+            <a:tbl>
+              <a:tblPr firstRow="0" bandRow="0"/>
+              <a:tblGrid>
+                <a:gridCol w="2743200"/>
+                <a:gridCol w="2194560"/>
+                <a:gridCol w="5971032"/>
+              </a:tblGrid>
+              <a:tr h="434340">
+                <a:tc>
+                  <a:txBody>
+                    <a:bodyPr wrap="square"/>
+                    <a:lstStyle/>
+                    <a:p>
+                      <a:r>
+                        <a:rPr sz="1200" b="1" i="0">
+                          <a:solidFill>
+                            <a:srgbClr val="FFFFFF"/>
+                          </a:solidFill>
+                          <a:latin typeface="Calibri"/>
+                        </a:rPr>
+                        <a:t>Subsystem</a:t>
+                      </a:r>
+                    </a:p>
+                  </a:txBody>
+                  <a:tcPr anchor="ctr" marL="82296" marR="82296" marT="27432" marB="27432">
+                    <a:solidFill>
+                      <a:srgbClr val="1B2A4A"/>
+                    </a:solidFill>
+                  </a:tcPr>
+                </a:tc>
+                <a:tc>
+                  <a:txBody>
+                    <a:bodyPr wrap="square"/>
+                    <a:lstStyle/>
+                    <a:p>
+                      <a:r>
+                        <a:rPr sz="1200" b="1" i="0">
+                          <a:solidFill>
+                            <a:srgbClr val="FFFFFF"/>
+                          </a:solidFill>
+                          <a:latin typeface="Calibri"/>
+                        </a:rPr>
+                        <a:t>Typical tolerance</a:t>
+                      </a:r>
+                    </a:p>
+                  </a:txBody>
+                  <a:tcPr anchor="ctr" marL="82296" marR="82296" marT="27432" marB="27432">
+                    <a:solidFill>
+                      <a:srgbClr val="1B2A4A"/>
+                    </a:solidFill>
+                  </a:tcPr>
+                </a:tc>
+                <a:tc>
+                  <a:txBody>
+                    <a:bodyPr wrap="square"/>
+                    <a:lstStyle/>
+                    <a:p>
+                      <a:r>
+                        <a:rPr sz="1200" b="1" i="0">
+                          <a:solidFill>
+                            <a:srgbClr val="FFFFFF"/>
+                          </a:solidFill>
+                          <a:latin typeface="Calibri"/>
+                        </a:rPr>
+                        <a:t>What happens when it's exceeded</a:t>
+                      </a:r>
+                    </a:p>
+                  </a:txBody>
+                  <a:tcPr anchor="ctr" marL="82296" marR="82296" marT="27432" marB="27432">
+                    <a:solidFill>
+                      <a:srgbClr val="1B2A4A"/>
+                    </a:solidFill>
+                  </a:tcPr>
+                </a:tc>
+              </a:tr>
+              <a:tr h="434340">
+                <a:tc>
+                  <a:txBody>
+                    <a:bodyPr wrap="square"/>
+                    <a:lstStyle/>
+                    <a:p>
+                      <a:r>
+                        <a:rPr sz="1050" b="1" i="0">
+                          <a:solidFill>
+                            <a:srgbClr val="1B2A4A"/>
+                          </a:solidFill>
+                          <a:latin typeface="Calibri"/>
+                        </a:rPr>
+                        <a:t>Corosync token timeout</a:t>
+                      </a:r>
+                    </a:p>
+                  </a:txBody>
+                  <a:tcPr anchor="ctr" marL="82296" marR="82296" marT="27432" marB="27432">
+                    <a:solidFill>
+                      <a:srgbClr val="FFFFFF"/>
+                    </a:solidFill>
+                  </a:tcPr>
+                </a:tc>
+                <a:tc>
+                  <a:txBody>
+                    <a:bodyPr wrap="square"/>
+                    <a:lstStyle/>
+                    <a:p>
+                      <a:r>
+                        <a:rPr sz="1050" b="0" i="0">
+                          <a:solidFill>
+                            <a:srgbClr val="3D5A80"/>
+                          </a:solidFill>
+                          <a:latin typeface="Calibri"/>
+                        </a:rPr>
+                        <a:t>~1 sec default (tunable)</a:t>
+                      </a:r>
+                    </a:p>
+                  </a:txBody>
+                  <a:tcPr anchor="ctr" marL="82296" marR="82296" marT="27432" marB="27432">
+                    <a:solidFill>
+                      <a:srgbClr val="FFFFFF"/>
+                    </a:solidFill>
+                  </a:tcPr>
+                </a:tc>
+                <a:tc>
+                  <a:txBody>
+                    <a:bodyPr wrap="square"/>
+                    <a:lstStyle/>
+                    <a:p>
+                      <a:r>
+                        <a:rPr sz="1050" b="0" i="0">
+                          <a:solidFill>
+                            <a:srgbClr val="3D5A80"/>
+                          </a:solidFill>
+                          <a:latin typeface="Calibri"/>
+                        </a:rPr>
+                        <a:t>Healthy node presumed dead - spurious fencing, cluster flapping</a:t>
+                      </a:r>
+                    </a:p>
+                  </a:txBody>
+                  <a:tcPr anchor="ctr" marL="82296" marR="82296" marT="27432" marB="27432">
+                    <a:solidFill>
+                      <a:srgbClr val="FFFFFF"/>
+                    </a:solidFill>
+                  </a:tcPr>
+                </a:tc>
+              </a:tr>
+              <a:tr h="434340">
+                <a:tc>
+                  <a:txBody>
+                    <a:bodyPr wrap="square"/>
+                    <a:lstStyle/>
+                    <a:p>
+                      <a:r>
+                        <a:rPr sz="1050" b="1" i="0">
+                          <a:solidFill>
+                            <a:srgbClr val="1B2A4A"/>
+                          </a:solidFill>
+                          <a:latin typeface="Calibri"/>
+                        </a:rPr>
+                        <a:t>Ceph monitor clock skew</a:t>
+                      </a:r>
+                    </a:p>
+                  </a:txBody>
+                  <a:tcPr anchor="ctr" marL="82296" marR="82296" marT="27432" marB="27432">
+                    <a:solidFill>
+                      <a:srgbClr val="E8EEF7"/>
+                    </a:solidFill>
+                  </a:tcPr>
+                </a:tc>
+                <a:tc>
+                  <a:txBody>
+                    <a:bodyPr wrap="square"/>
+                    <a:lstStyle/>
+                    <a:p>
+                      <a:r>
+                        <a:rPr sz="1050" b="0" i="0">
+                          <a:solidFill>
+                            <a:srgbClr val="3D5A80"/>
+                          </a:solidFill>
+                          <a:latin typeface="Calibri"/>
+                        </a:rPr>
+                        <a:t>50 ms warning threshold</a:t>
+                      </a:r>
+                    </a:p>
+                  </a:txBody>
+                  <a:tcPr anchor="ctr" marL="82296" marR="82296" marT="27432" marB="27432">
+                    <a:solidFill>
+                      <a:srgbClr val="E8EEF7"/>
+                    </a:solidFill>
+                  </a:tcPr>
+                </a:tc>
+                <a:tc>
+                  <a:txBody>
+                    <a:bodyPr wrap="square"/>
+                    <a:lstStyle/>
+                    <a:p>
+                      <a:r>
+                        <a:rPr sz="1050" b="0" i="0">
+                          <a:solidFill>
+                            <a:srgbClr val="3D5A80"/>
+                          </a:solidFill>
+                          <a:latin typeface="Calibri"/>
+                        </a:rPr>
+                        <a:t>HEALTH_WARN clock skew; large skew can stall MON quorum (Paxos)</a:t>
+                      </a:r>
+                    </a:p>
+                  </a:txBody>
+                  <a:tcPr anchor="ctr" marL="82296" marR="82296" marT="27432" marB="27432">
+                    <a:solidFill>
+                      <a:srgbClr val="E8EEF7"/>
+                    </a:solidFill>
+                  </a:tcPr>
+                </a:tc>
+              </a:tr>
+              <a:tr h="434340">
+                <a:tc>
+                  <a:txBody>
+                    <a:bodyPr wrap="square"/>
+                    <a:lstStyle/>
+                    <a:p>
+                      <a:r>
+                        <a:rPr sz="1050" b="1" i="0">
+                          <a:solidFill>
+                            <a:srgbClr val="1B2A4A"/>
+                          </a:solidFill>
+                          <a:latin typeface="Calibri"/>
+                        </a:rPr>
+                        <a:t>Kerberos ticket validation</a:t>
+                      </a:r>
+                    </a:p>
+                  </a:txBody>
+                  <a:tcPr anchor="ctr" marL="82296" marR="82296" marT="27432" marB="27432">
+                    <a:solidFill>
+                      <a:srgbClr val="FFFFFF"/>
+                    </a:solidFill>
+                  </a:tcPr>
+                </a:tc>
+                <a:tc>
+                  <a:txBody>
+                    <a:bodyPr wrap="square"/>
+                    <a:lstStyle/>
+                    <a:p>
+                      <a:r>
+                        <a:rPr sz="1050" b="0" i="0">
+                          <a:solidFill>
+                            <a:srgbClr val="3D5A80"/>
+                          </a:solidFill>
+                          <a:latin typeface="Calibri"/>
+                        </a:rPr>
+                        <a:t>5 min default max skew</a:t>
+                      </a:r>
+                    </a:p>
+                  </a:txBody>
+                  <a:tcPr anchor="ctr" marL="82296" marR="82296" marT="27432" marB="27432">
+                    <a:solidFill>
+                      <a:srgbClr val="FFFFFF"/>
+                    </a:solidFill>
+                  </a:tcPr>
+                </a:tc>
+                <a:tc>
+                  <a:txBody>
+                    <a:bodyPr wrap="square"/>
+                    <a:lstStyle/>
+                    <a:p>
+                      <a:r>
+                        <a:rPr sz="1050" b="0" i="0">
+                          <a:solidFill>
+                            <a:srgbClr val="3D5A80"/>
+                          </a:solidFill>
+                          <a:latin typeface="Calibri"/>
+                        </a:rPr>
+                        <a:t>Authentication failures across the domain</a:t>
+                      </a:r>
+                    </a:p>
+                  </a:txBody>
+                  <a:tcPr anchor="ctr" marL="82296" marR="82296" marT="27432" marB="27432">
+                    <a:solidFill>
+                      <a:srgbClr val="FFFFFF"/>
+                    </a:solidFill>
+                  </a:tcPr>
+                </a:tc>
+              </a:tr>
+              <a:tr h="434340">
+                <a:tc>
+                  <a:txBody>
+                    <a:bodyPr wrap="square"/>
+                    <a:lstStyle/>
+                    <a:p>
+                      <a:r>
+                        <a:rPr sz="1050" b="1" i="0">
+                          <a:solidFill>
+                            <a:srgbClr val="1B2A4A"/>
+                          </a:solidFill>
+                          <a:latin typeface="Calibri"/>
+                        </a:rPr>
+                        <a:t>TLS/PKI certificate checks</a:t>
+                      </a:r>
+                    </a:p>
+                  </a:txBody>
+                  <a:tcPr anchor="ctr" marL="82296" marR="82296" marT="27432" marB="27432">
+                    <a:solidFill>
+                      <a:srgbClr val="E8EEF7"/>
+                    </a:solidFill>
+                  </a:tcPr>
+                </a:tc>
+                <a:tc>
+                  <a:txBody>
+                    <a:bodyPr wrap="square"/>
+                    <a:lstStyle/>
+                    <a:p>
+                      <a:r>
+                        <a:rPr sz="1050" b="0" i="0">
+                          <a:solidFill>
+                            <a:srgbClr val="3D5A80"/>
+                          </a:solidFill>
+                          <a:latin typeface="Calibri"/>
+                        </a:rPr>
+                        <a:t>absolute time, no tolerance</a:t>
+                      </a:r>
+                    </a:p>
+                  </a:txBody>
+                  <a:tcPr anchor="ctr" marL="82296" marR="82296" marT="27432" marB="27432">
+                    <a:solidFill>
+                      <a:srgbClr val="E8EEF7"/>
+                    </a:solidFill>
+                  </a:tcPr>
+                </a:tc>
+                <a:tc>
+                  <a:txBody>
+                    <a:bodyPr wrap="square"/>
+                    <a:lstStyle/>
+                    <a:p>
+                      <a:r>
+                        <a:rPr sz="1050" b="0" i="0">
+                          <a:solidFill>
+                            <a:srgbClr val="3D5A80"/>
+                          </a:solidFill>
+                          <a:latin typeface="Calibri"/>
+                        </a:rPr>
+                        <a:t>Certs appear not-yet-valid or already expired</a:t>
+                      </a:r>
+                    </a:p>
+                  </a:txBody>
+                  <a:tcPr anchor="ctr" marL="82296" marR="82296" marT="27432" marB="27432">
+                    <a:solidFill>
+                      <a:srgbClr val="E8EEF7"/>
+                    </a:solidFill>
+                  </a:tcPr>
+                </a:tc>
+              </a:tr>
+              <a:tr h="434340">
+                <a:tc>
+                  <a:txBody>
+                    <a:bodyPr wrap="square"/>
+                    <a:lstStyle/>
+                    <a:p>
+                      <a:r>
+                        <a:rPr sz="1050" b="1" i="0">
+                          <a:solidFill>
+                            <a:srgbClr val="1B2A4A"/>
+                          </a:solidFill>
+                          <a:latin typeface="Calibri"/>
+                        </a:rPr>
+                        <a:t>Cross-host log/audit correlation</a:t>
+                      </a:r>
+                    </a:p>
+                  </a:txBody>
+                  <a:tcPr anchor="ctr" marL="82296" marR="82296" marT="27432" marB="27432">
+                    <a:solidFill>
+                      <a:srgbClr val="FFFFFF"/>
+                    </a:solidFill>
+                  </a:tcPr>
+                </a:tc>
+                <a:tc>
+                  <a:txBody>
+                    <a:bodyPr wrap="square"/>
+                    <a:lstStyle/>
+                    <a:p>
+                      <a:r>
+                        <a:rPr sz="1050" b="0" i="0">
+                          <a:solidFill>
+                            <a:srgbClr val="3D5A80"/>
+                          </a:solidFill>
+                          <a:latin typeface="Calibri"/>
+                        </a:rPr>
+                        <a:t>none (ordering assumption)</a:t>
+                      </a:r>
+                    </a:p>
+                  </a:txBody>
+                  <a:tcPr anchor="ctr" marL="82296" marR="82296" marT="27432" marB="27432">
+                    <a:solidFill>
+                      <a:srgbClr val="FFFFFF"/>
+                    </a:solidFill>
+                  </a:tcPr>
+                </a:tc>
+                <a:tc>
+                  <a:txBody>
+                    <a:bodyPr wrap="square"/>
+                    <a:lstStyle/>
+                    <a:p>
+                      <a:r>
+                        <a:rPr sz="1050" b="0" i="0">
+                          <a:solidFill>
+                            <a:srgbClr val="3D5A80"/>
+                          </a:solidFill>
+                          <a:latin typeface="Calibri"/>
+                        </a:rPr>
+                        <a:t>Events reorder across hosts; incident forensics unreliable</a:t>
+                      </a:r>
+                    </a:p>
+                  </a:txBody>
+                  <a:tcPr anchor="ctr" marL="82296" marR="82296" marT="27432" marB="27432">
+                    <a:solidFill>
+                      <a:srgbClr val="FFFFFF"/>
+                    </a:solidFill>
+                  </a:tcPr>
+                </a:tc>
+              </a:tr>
+            </a:tbl>
+          </a:graphicData>
+        </a:graphic>
+      </p:graphicFrame>
+    </p:spTree>
+  </p:cSld>
+  <p:clrMapOvr>
+    <a:masterClrMapping/>
+  </p:clrMapOvr>
+</p:sld>
+</file>
+
 <file path=ppt/slides/slide3.xml><?xml version="1.0" encoding="utf-8"?>
 <p:sld xmlns:a="http://schemas.openxmlformats.org/drawingml/2006/main" xmlns:r="http://schemas.openxmlformats.org/officeDocument/2006/relationships" xmlns:p="http://schemas.openxmlformats.org/presentationml/2006/main">
   <p:cSld name="Slide 3">
@@ -7260,7 +11581,7 @@
                 <a:ea typeface="Calibri" pitchFamily="34" charset="-122"/>
                 <a:cs typeface="Calibri" pitchFamily="34" charset="-120"/>
               </a:rPr>
-              <a:t>Tuesdays &amp; Thursdays, 4:00–5:50 PM, CTB 345</a:t>
+              <a:t>Tuesdays &amp; Thursdays, 4:00–5:50 PM, CTB 350</a:t>
             </a:r>
             <a:endParaRPr lang="en-US" sz="1500" dirty="0"/>
           </a:p>
@@ -7287,6 +11608,684 @@
           </a:p>
         </p:txBody>
       </p:sp>
+    </p:spTree>
+  </p:cSld>
+  <p:clrMapOvr>
+    <a:masterClrMapping/>
+  </p:clrMapOvr>
+</p:sld>
+</file>
+
+<file path=ppt/slides/slide30.xml><?xml version="1.0" encoding="utf-8"?>
+<p:sld xmlns:a="http://schemas.openxmlformats.org/drawingml/2006/main" xmlns:p="http://schemas.openxmlformats.org/presentationml/2006/main" xmlns:r="http://schemas.openxmlformats.org/officeDocument/2006/relationships">
+  <p:cSld>
+    <p:spTree>
+      <p:nvGrpSpPr>
+        <p:cNvPr id="1" name=""/>
+        <p:cNvGrpSpPr/>
+        <p:nvPr/>
+      </p:nvGrpSpPr>
+      <p:grpSpPr/>
+      <p:sp>
+        <p:nvSpPr>
+          <p:cNvPr id="2" name="TextBox 1"/>
+          <p:cNvSpPr txBox="1"/>
+          <p:nvPr/>
+        </p:nvSpPr>
+        <p:spPr>
+          <a:xfrm>
+            <a:off x="640080" y="457200"/>
+            <a:ext cx="10908792" cy="777240"/>
+          </a:xfrm>
+          <a:prstGeom prst="rect">
+            <a:avLst/>
+          </a:prstGeom>
+          <a:noFill/>
+        </p:spPr>
+        <p:txBody>
+          <a:bodyPr wrap="square" anchor="t" lIns="0" rIns="0" tIns="0" bIns="0">
+            <a:spAutoFit/>
+          </a:bodyPr>
+          <a:lstStyle/>
+          <a:p>
+            <a:r>
+              <a:rPr sz="2900" b="1" i="0">
+                <a:solidFill>
+                  <a:srgbClr val="1B2A4A"/>
+                </a:solidFill>
+                <a:latin typeface="Cambria"/>
+              </a:rPr>
+              <a:t>Shared Storage: Pros &amp; Cons</a:t>
+            </a:r>
+          </a:p>
+        </p:txBody>
+      </p:sp>
+      <p:sp>
+        <p:nvSpPr>
+          <p:cNvPr id="3" name="TextBox 2"/>
+          <p:cNvSpPr txBox="1"/>
+          <p:nvPr/>
+        </p:nvSpPr>
+        <p:spPr>
+          <a:xfrm>
+            <a:off x="640080" y="1261872"/>
+            <a:ext cx="10908792" cy="384048"/>
+          </a:xfrm>
+          <a:prstGeom prst="rect">
+            <a:avLst/>
+          </a:prstGeom>
+          <a:noFill/>
+        </p:spPr>
+        <p:txBody>
+          <a:bodyPr wrap="square" anchor="t" lIns="0" rIns="0" tIns="0" bIns="0">
+            <a:spAutoFit/>
+          </a:bodyPr>
+          <a:lstStyle/>
+          <a:p>
+            <a:r>
+              <a:rPr sz="1250" b="0" i="0">
+                <a:solidFill>
+                  <a:srgbClr val="3D5A80"/>
+                </a:solidFill>
+                <a:latin typeface="Calibri"/>
+              </a:rPr>
+              <a:t>No two clusters use the same storage backend - the right choice trades complexity for resilience differently depending on what you're building.</a:t>
+            </a:r>
+          </a:p>
+        </p:txBody>
+      </p:sp>
+      <p:graphicFrame>
+        <p:nvGraphicFramePr>
+          <p:cNvPr id="4" name="Table 3"/>
+          <p:cNvGraphicFramePr>
+            <a:graphicFrameLocks noGrp="1"/>
+          </p:cNvGraphicFramePr>
+          <p:nvPr/>
+        </p:nvGraphicFramePr>
+        <p:xfrm>
+          <a:off x="640080" y="1965960"/>
+          <a:ext cx="10908792" cy="4617720"/>
+        </p:xfrm>
+        <a:graphic>
+          <a:graphicData uri="http://schemas.openxmlformats.org/drawingml/2006/table">
+            <a:tbl>
+              <a:tblPr firstRow="0" bandRow="0"/>
+              <a:tblGrid>
+                <a:gridCol w="1783080"/>
+                <a:gridCol w="1417320"/>
+                <a:gridCol w="1965960"/>
+                <a:gridCol w="1600200"/>
+                <a:gridCol w="4142232"/>
+              </a:tblGrid>
+              <a:tr h="923544">
+                <a:tc>
+                  <a:txBody>
+                    <a:bodyPr wrap="square"/>
+                    <a:lstStyle/>
+                    <a:p>
+                      <a:r>
+                        <a:rPr sz="1300" b="1" i="0">
+                          <a:solidFill>
+                            <a:srgbClr val="FFFFFF"/>
+                          </a:solidFill>
+                          <a:latin typeface="Calibri"/>
+                        </a:rPr>
+                        <a:t>Storage Type</a:t>
+                      </a:r>
+                    </a:p>
+                  </a:txBody>
+                  <a:tcPr anchor="ctr" marL="82296" marR="82296" marT="27432" marB="27432">
+                    <a:solidFill>
+                      <a:srgbClr val="1B2A4A"/>
+                    </a:solidFill>
+                  </a:tcPr>
+                </a:tc>
+                <a:tc>
+                  <a:txBody>
+                    <a:bodyPr wrap="square"/>
+                    <a:lstStyle/>
+                    <a:p>
+                      <a:pPr algn="ctr"/>
+                      <a:r>
+                        <a:rPr sz="1300" b="1" i="0">
+                          <a:solidFill>
+                            <a:srgbClr val="FFFFFF"/>
+                          </a:solidFill>
+                          <a:latin typeface="Calibri"/>
+                        </a:rPr>
+                        <a:t>Live Migration</a:t>
+                      </a:r>
+                    </a:p>
+                  </a:txBody>
+                  <a:tcPr anchor="ctr" marL="82296" marR="82296" marT="27432" marB="27432">
+                    <a:solidFill>
+                      <a:srgbClr val="1B2A4A"/>
+                    </a:solidFill>
+                  </a:tcPr>
+                </a:tc>
+                <a:tc>
+                  <a:txBody>
+                    <a:bodyPr wrap="square"/>
+                    <a:lstStyle/>
+                    <a:p>
+                      <a:r>
+                        <a:rPr sz="1300" b="1" i="0">
+                          <a:solidFill>
+                            <a:srgbClr val="FFFFFF"/>
+                          </a:solidFill>
+                          <a:latin typeface="Calibri"/>
+                        </a:rPr>
+                        <a:t>Fault Tolerance</a:t>
+                      </a:r>
+                    </a:p>
+                  </a:txBody>
+                  <a:tcPr anchor="ctr" marL="82296" marR="82296" marT="27432" marB="27432">
+                    <a:solidFill>
+                      <a:srgbClr val="1B2A4A"/>
+                    </a:solidFill>
+                  </a:tcPr>
+                </a:tc>
+                <a:tc>
+                  <a:txBody>
+                    <a:bodyPr wrap="square"/>
+                    <a:lstStyle/>
+                    <a:p>
+                      <a:r>
+                        <a:rPr sz="1300" b="1" i="0">
+                          <a:solidFill>
+                            <a:srgbClr val="FFFFFF"/>
+                          </a:solidFill>
+                          <a:latin typeface="Calibri"/>
+                        </a:rPr>
+                        <a:t>Performance</a:t>
+                      </a:r>
+                    </a:p>
+                  </a:txBody>
+                  <a:tcPr anchor="ctr" marL="82296" marR="82296" marT="27432" marB="27432">
+                    <a:solidFill>
+                      <a:srgbClr val="1B2A4A"/>
+                    </a:solidFill>
+                  </a:tcPr>
+                </a:tc>
+                <a:tc>
+                  <a:txBody>
+                    <a:bodyPr wrap="square"/>
+                    <a:lstStyle/>
+                    <a:p>
+                      <a:r>
+                        <a:rPr sz="1300" b="1" i="0">
+                          <a:solidFill>
+                            <a:srgbClr val="FFFFFF"/>
+                          </a:solidFill>
+                          <a:latin typeface="Calibri"/>
+                        </a:rPr>
+                        <a:t>Best Fit &amp; Trade-off</a:t>
+                      </a:r>
+                    </a:p>
+                  </a:txBody>
+                  <a:tcPr anchor="ctr" marL="82296" marR="82296" marT="27432" marB="27432">
+                    <a:solidFill>
+                      <a:srgbClr val="1B2A4A"/>
+                    </a:solidFill>
+                  </a:tcPr>
+                </a:tc>
+              </a:tr>
+              <a:tr h="923544">
+                <a:tc>
+                  <a:txBody>
+                    <a:bodyPr wrap="square"/>
+                    <a:lstStyle/>
+                    <a:p>
+                      <a:r>
+                        <a:rPr sz="1100" b="1" i="0">
+                          <a:solidFill>
+                            <a:srgbClr val="1B2A4A"/>
+                          </a:solidFill>
+                          <a:latin typeface="Calibri"/>
+                        </a:rPr>
+                        <a:t>Ceph (RBD / CephFS)</a:t>
+                      </a:r>
+                    </a:p>
+                  </a:txBody>
+                  <a:tcPr anchor="ctr" marL="82296" marR="82296" marT="27432" marB="27432">
+                    <a:solidFill>
+                      <a:srgbClr val="FFFFFF"/>
+                    </a:solidFill>
+                  </a:tcPr>
+                </a:tc>
+                <a:tc>
+                  <a:txBody>
+                    <a:bodyPr wrap="square"/>
+                    <a:lstStyle/>
+                    <a:p>
+                      <a:pPr algn="ctr"/>
+                      <a:r>
+                        <a:rPr sz="1100" b="1" i="0">
+                          <a:solidFill>
+                            <a:srgbClr val="2E7D32"/>
+                          </a:solidFill>
+                          <a:latin typeface="Calibri"/>
+                        </a:rPr>
+                        <a:t>Yes</a:t>
+                      </a:r>
+                    </a:p>
+                  </a:txBody>
+                  <a:tcPr anchor="ctr" marL="82296" marR="82296" marT="27432" marB="27432">
+                    <a:solidFill>
+                      <a:srgbClr val="FFFFFF"/>
+                    </a:solidFill>
+                  </a:tcPr>
+                </a:tc>
+                <a:tc>
+                  <a:txBody>
+                    <a:bodyPr wrap="square"/>
+                    <a:lstStyle/>
+                    <a:p>
+                      <a:r>
+                        <a:rPr sz="1100" b="0" i="0">
+                          <a:solidFill>
+                            <a:srgbClr val="3D5A80"/>
+                          </a:solidFill>
+                          <a:latin typeface="Calibri"/>
+                        </a:rPr>
+                        <a:t>Self-healing, no single point of failure (replicated, size=3)</a:t>
+                      </a:r>
+                    </a:p>
+                  </a:txBody>
+                  <a:tcPr anchor="ctr" marL="82296" marR="82296" marT="27432" marB="27432">
+                    <a:solidFill>
+                      <a:srgbClr val="FFFFFF"/>
+                    </a:solidFill>
+                  </a:tcPr>
+                </a:tc>
+                <a:tc>
+                  <a:txBody>
+                    <a:bodyPr wrap="square"/>
+                    <a:lstStyle/>
+                    <a:p>
+                      <a:r>
+                        <a:rPr sz="1100" b="0" i="0">
+                          <a:solidFill>
+                            <a:srgbClr val="3D5A80"/>
+                          </a:solidFill>
+                          <a:latin typeface="Calibri"/>
+                        </a:rPr>
+                        <a:t>Good; network + replication overhead</a:t>
+                      </a:r>
+                    </a:p>
+                  </a:txBody>
+                  <a:tcPr anchor="ctr" marL="82296" marR="82296" marT="27432" marB="27432">
+                    <a:solidFill>
+                      <a:srgbClr val="FFFFFF"/>
+                    </a:solidFill>
+                  </a:tcPr>
+                </a:tc>
+                <a:tc>
+                  <a:txBody>
+                    <a:bodyPr wrap="square"/>
+                    <a:lstStyle/>
+                    <a:p>
+                      <a:r>
+                        <a:rPr sz="1100" b="0" i="0">
+                          <a:solidFill>
+                            <a:srgbClr val="3D5A80"/>
+                          </a:solidFill>
+                          <a:latin typeface="Calibri"/>
+                        </a:rPr>
+                        <a:t>Hyperconverged clusters like this course's lab - needs 3+ nodes and is network-sensitive</a:t>
+                      </a:r>
+                    </a:p>
+                  </a:txBody>
+                  <a:tcPr anchor="ctr" marL="82296" marR="82296" marT="27432" marB="27432">
+                    <a:solidFill>
+                      <a:srgbClr val="FFFFFF"/>
+                    </a:solidFill>
+                  </a:tcPr>
+                </a:tc>
+              </a:tr>
+              <a:tr h="923544">
+                <a:tc>
+                  <a:txBody>
+                    <a:bodyPr wrap="square"/>
+                    <a:lstStyle/>
+                    <a:p>
+                      <a:r>
+                        <a:rPr sz="1100" b="1" i="0">
+                          <a:solidFill>
+                            <a:srgbClr val="1B2A4A"/>
+                          </a:solidFill>
+                          <a:latin typeface="Calibri"/>
+                        </a:rPr>
+                        <a:t>NFS (external share)</a:t>
+                      </a:r>
+                    </a:p>
+                  </a:txBody>
+                  <a:tcPr anchor="ctr" marL="82296" marR="82296" marT="27432" marB="27432">
+                    <a:solidFill>
+                      <a:srgbClr val="E8EEF7"/>
+                    </a:solidFill>
+                  </a:tcPr>
+                </a:tc>
+                <a:tc>
+                  <a:txBody>
+                    <a:bodyPr wrap="square"/>
+                    <a:lstStyle/>
+                    <a:p>
+                      <a:pPr algn="ctr"/>
+                      <a:r>
+                        <a:rPr sz="1100" b="1" i="0">
+                          <a:solidFill>
+                            <a:srgbClr val="2E7D32"/>
+                          </a:solidFill>
+                          <a:latin typeface="Calibri"/>
+                        </a:rPr>
+                        <a:t>Yes</a:t>
+                      </a:r>
+                    </a:p>
+                  </a:txBody>
+                  <a:tcPr anchor="ctr" marL="82296" marR="82296" marT="27432" marB="27432">
+                    <a:solidFill>
+                      <a:srgbClr val="E8EEF7"/>
+                    </a:solidFill>
+                  </a:tcPr>
+                </a:tc>
+                <a:tc>
+                  <a:txBody>
+                    <a:bodyPr wrap="square"/>
+                    <a:lstStyle/>
+                    <a:p>
+                      <a:r>
+                        <a:rPr sz="1100" b="0" i="0">
+                          <a:solidFill>
+                            <a:srgbClr val="3D5A80"/>
+                          </a:solidFill>
+                          <a:latin typeface="Calibri"/>
+                        </a:rPr>
+                        <a:t>Single server unless clustered - SPOF by default</a:t>
+                      </a:r>
+                    </a:p>
+                  </a:txBody>
+                  <a:tcPr anchor="ctr" marL="82296" marR="82296" marT="27432" marB="27432">
+                    <a:solidFill>
+                      <a:srgbClr val="E8EEF7"/>
+                    </a:solidFill>
+                  </a:tcPr>
+                </a:tc>
+                <a:tc>
+                  <a:txBody>
+                    <a:bodyPr wrap="square"/>
+                    <a:lstStyle/>
+                    <a:p>
+                      <a:r>
+                        <a:rPr sz="1100" b="0" i="0">
+                          <a:solidFill>
+                            <a:srgbClr val="3D5A80"/>
+                          </a:solidFill>
+                          <a:latin typeface="Calibri"/>
+                        </a:rPr>
+                        <a:t>Fine for ISOs/templates/backups, not latency-critical VM disks</a:t>
+                      </a:r>
+                    </a:p>
+                  </a:txBody>
+                  <a:tcPr anchor="ctr" marL="82296" marR="82296" marT="27432" marB="27432">
+                    <a:solidFill>
+                      <a:srgbClr val="E8EEF7"/>
+                    </a:solidFill>
+                  </a:tcPr>
+                </a:tc>
+                <a:tc>
+                  <a:txBody>
+                    <a:bodyPr wrap="square"/>
+                    <a:lstStyle/>
+                    <a:p>
+                      <a:r>
+                        <a:rPr sz="1100" b="0" i="0">
+                          <a:solidFill>
+                            <a:srgbClr val="3D5A80"/>
+                          </a:solidFill>
+                          <a:latin typeface="Calibri"/>
+                        </a:rPr>
+                        <a:t>Simple to stand up; best for ISO/template/backup storage, not primary VM storage</a:t>
+                      </a:r>
+                    </a:p>
+                  </a:txBody>
+                  <a:tcPr anchor="ctr" marL="82296" marR="82296" marT="27432" marB="27432">
+                    <a:solidFill>
+                      <a:srgbClr val="E8EEF7"/>
+                    </a:solidFill>
+                  </a:tcPr>
+                </a:tc>
+              </a:tr>
+              <a:tr h="923544">
+                <a:tc>
+                  <a:txBody>
+                    <a:bodyPr wrap="square"/>
+                    <a:lstStyle/>
+                    <a:p>
+                      <a:r>
+                        <a:rPr sz="1100" b="1" i="0">
+                          <a:solidFill>
+                            <a:srgbClr val="1B2A4A"/>
+                          </a:solidFill>
+                          <a:latin typeface="Calibri"/>
+                        </a:rPr>
+                        <a:t>iSCSI / SAN (block)</a:t>
+                      </a:r>
+                    </a:p>
+                  </a:txBody>
+                  <a:tcPr anchor="ctr" marL="82296" marR="82296" marT="27432" marB="27432">
+                    <a:solidFill>
+                      <a:srgbClr val="FFFFFF"/>
+                    </a:solidFill>
+                  </a:tcPr>
+                </a:tc>
+                <a:tc>
+                  <a:txBody>
+                    <a:bodyPr wrap="square"/>
+                    <a:lstStyle/>
+                    <a:p>
+                      <a:pPr algn="ctr"/>
+                      <a:r>
+                        <a:rPr sz="1100" b="1" i="0">
+                          <a:solidFill>
+                            <a:srgbClr val="2E7D32"/>
+                          </a:solidFill>
+                          <a:latin typeface="Calibri"/>
+                        </a:rPr>
+                        <a:t>Yes</a:t>
+                      </a:r>
+                    </a:p>
+                  </a:txBody>
+                  <a:tcPr anchor="ctr" marL="82296" marR="82296" marT="27432" marB="27432">
+                    <a:solidFill>
+                      <a:srgbClr val="FFFFFF"/>
+                    </a:solidFill>
+                  </a:tcPr>
+                </a:tc>
+                <a:tc>
+                  <a:txBody>
+                    <a:bodyPr wrap="square"/>
+                    <a:lstStyle/>
+                    <a:p>
+                      <a:r>
+                        <a:rPr sz="1100" b="0" i="0">
+                          <a:solidFill>
+                            <a:srgbClr val="3D5A80"/>
+                          </a:solidFill>
+                          <a:latin typeface="Calibri"/>
+                        </a:rPr>
+                        <a:t>Entirely dependent on the SAN hardware's own redundancy</a:t>
+                      </a:r>
+                    </a:p>
+                  </a:txBody>
+                  <a:tcPr anchor="ctr" marL="82296" marR="82296" marT="27432" marB="27432">
+                    <a:solidFill>
+                      <a:srgbClr val="FFFFFF"/>
+                    </a:solidFill>
+                  </a:tcPr>
+                </a:tc>
+                <a:tc>
+                  <a:txBody>
+                    <a:bodyPr wrap="square"/>
+                    <a:lstStyle/>
+                    <a:p>
+                      <a:r>
+                        <a:rPr sz="1100" b="0" i="0">
+                          <a:solidFill>
+                            <a:srgbClr val="3D5A80"/>
+                          </a:solidFill>
+                          <a:latin typeface="Calibri"/>
+                        </a:rPr>
+                        <a:t>Strong block performance with multipathing</a:t>
+                      </a:r>
+                    </a:p>
+                  </a:txBody>
+                  <a:tcPr anchor="ctr" marL="82296" marR="82296" marT="27432" marB="27432">
+                    <a:solidFill>
+                      <a:srgbClr val="FFFFFF"/>
+                    </a:solidFill>
+                  </a:tcPr>
+                </a:tc>
+                <a:tc>
+                  <a:txBody>
+                    <a:bodyPr wrap="square"/>
+                    <a:lstStyle/>
+                    <a:p>
+                      <a:r>
+                        <a:rPr sz="1100" b="0" i="0">
+                          <a:solidFill>
+                            <a:srgbClr val="3D5A80"/>
+                          </a:solidFill>
+                          <a:latin typeface="Calibri"/>
+                        </a:rPr>
+                        <a:t>Good fit where a SAN investment already exists; needs a shared/clustered filesystem on top for migration</a:t>
+                      </a:r>
+                    </a:p>
+                  </a:txBody>
+                  <a:tcPr anchor="ctr" marL="82296" marR="82296" marT="27432" marB="27432">
+                    <a:solidFill>
+                      <a:srgbClr val="FFFFFF"/>
+                    </a:solidFill>
+                  </a:tcPr>
+                </a:tc>
+              </a:tr>
+              <a:tr h="923544">
+                <a:tc>
+                  <a:txBody>
+                    <a:bodyPr wrap="square"/>
+                    <a:lstStyle/>
+                    <a:p>
+                      <a:r>
+                        <a:rPr sz="1100" b="1" i="0">
+                          <a:solidFill>
+                            <a:srgbClr val="1B2A4A"/>
+                          </a:solidFill>
+                          <a:latin typeface="Calibri"/>
+                        </a:rPr>
+                        <a:t>Local (ZFS / LVM per node)</a:t>
+                      </a:r>
+                    </a:p>
+                  </a:txBody>
+                  <a:tcPr anchor="ctr" marL="82296" marR="82296" marT="27432" marB="27432">
+                    <a:solidFill>
+                      <a:srgbClr val="E8EEF7"/>
+                    </a:solidFill>
+                  </a:tcPr>
+                </a:tc>
+                <a:tc>
+                  <a:txBody>
+                    <a:bodyPr wrap="square"/>
+                    <a:lstStyle/>
+                    <a:p>
+                      <a:pPr algn="ctr"/>
+                      <a:r>
+                        <a:rPr sz="1100" b="1" i="0">
+                          <a:solidFill>
+                            <a:srgbClr val="B02A2A"/>
+                          </a:solidFill>
+                          <a:latin typeface="Calibri"/>
+                        </a:rPr>
+                        <a:t>No</a:t>
+                      </a:r>
+                    </a:p>
+                  </a:txBody>
+                  <a:tcPr anchor="ctr" marL="82296" marR="82296" marT="27432" marB="27432">
+                    <a:solidFill>
+                      <a:srgbClr val="E8EEF7"/>
+                    </a:solidFill>
+                  </a:tcPr>
+                </a:tc>
+                <a:tc>
+                  <a:txBody>
+                    <a:bodyPr wrap="square"/>
+                    <a:lstStyle/>
+                    <a:p>
+                      <a:r>
+                        <a:rPr sz="1100" b="0" i="0">
+                          <a:solidFill>
+                            <a:srgbClr val="3D5A80"/>
+                          </a:solidFill>
+                          <a:latin typeface="Calibri"/>
+                        </a:rPr>
+                        <a:t>None - the VM is tied to whichever node holds its disk</a:t>
+                      </a:r>
+                    </a:p>
+                  </a:txBody>
+                  <a:tcPr anchor="ctr" marL="82296" marR="82296" marT="27432" marB="27432">
+                    <a:solidFill>
+                      <a:srgbClr val="E8EEF7"/>
+                    </a:solidFill>
+                  </a:tcPr>
+                </a:tc>
+                <a:tc>
+                  <a:txBody>
+                    <a:bodyPr wrap="square"/>
+                    <a:lstStyle/>
+                    <a:p>
+                      <a:r>
+                        <a:rPr sz="1100" b="0" i="0">
+                          <a:solidFill>
+                            <a:srgbClr val="3D5A80"/>
+                          </a:solidFill>
+                          <a:latin typeface="Calibri"/>
+                        </a:rPr>
+                        <a:t>Fastest option; zero network overhead</a:t>
+                      </a:r>
+                    </a:p>
+                  </a:txBody>
+                  <a:tcPr anchor="ctr" marL="82296" marR="82296" marT="27432" marB="27432">
+                    <a:solidFill>
+                      <a:srgbClr val="E8EEF7"/>
+                    </a:solidFill>
+                  </a:tcPr>
+                </a:tc>
+                <a:tc>
+                  <a:txBody>
+                    <a:bodyPr wrap="square"/>
+                    <a:lstStyle/>
+                    <a:p>
+                      <a:r>
+                        <a:rPr sz="1100" b="0" i="0">
+                          <a:solidFill>
+                            <a:srgbClr val="3D5A80"/>
+                          </a:solidFill>
+                          <a:latin typeface="Calibri"/>
+                        </a:rPr>
+                        <a:t>Single-node labs/dev; no HA or live migration without a separate storage-migration step</a:t>
+                      </a:r>
+                    </a:p>
+                  </a:txBody>
+                  <a:tcPr anchor="ctr" marL="82296" marR="82296" marT="27432" marB="27432">
+                    <a:solidFill>
+                      <a:srgbClr val="E8EEF7"/>
+                    </a:solidFill>
+                  </a:tcPr>
+                </a:tc>
+              </a:tr>
+            </a:tbl>
+          </a:graphicData>
+        </a:graphic>
+      </p:graphicFrame>
     </p:spTree>
   </p:cSld>
   <p:clrMapOvr>
@@ -8593,27 +13592,6 @@
                 <a:cs typeface="Calibri" pitchFamily="34" charset="-120"/>
               </a:rPr>
               <a:t>Doing both the Cyber and IT version in a given week earns no extra credit: only one counts</a:t>
-            </a:r>
-            <a:endParaRPr lang="en-US" sz="1500" dirty="0"/>
-          </a:p>
-          <a:p>
-            <a:pPr marL="279400" indent="-279400" algn="l">
-              <a:spcAft>
-                <a:spcPts val="1400"/>
-              </a:spcAft>
-              <a:buSzPct val="100000"/>
-              <a:buChar char="●"/>
-            </a:pPr>
-            <a:r>
-              <a:rPr lang="en-US" sz="1500" dirty="0">
-                <a:solidFill>
-                  <a:srgbClr val="3D5A80"/>
-                </a:solidFill>
-                <a:latin typeface="Calibri" pitchFamily="34" charset="0"/>
-                <a:ea typeface="Calibri" pitchFamily="34" charset="-122"/>
-                <a:cs typeface="Calibri" pitchFamily="34" charset="-120"/>
-              </a:rPr>
-              <a:t>Lowest scores are automatically dropped for weeks with two track options, so there's no need to email the instructor</a:t>
             </a:r>
             <a:endParaRPr lang="en-US" sz="1500" dirty="0"/>
           </a:p>

--- a/lectures/CYBER444_Week01_Introduction_and_Environment_Setup.pptx
+++ b/lectures/CYBER444_Week01_Introduction_and_Environment_Setup.pptx
@@ -5,7 +5,7 @@
     <p:sldMasterId id="2147483648" r:id="rId1"/>
   </p:sldMasterIdLst>
   <p:notesMasterIdLst>
-    <p:notesMasterId r:id="rId34"/>
+    <p:notesMasterId r:id="rId36"/>
   </p:notesMasterIdLst>
   <p:sldIdLst>
     <p:sldId id="256" r:id="rId2"/>
@@ -30,16 +30,18 @@
     <p:sldId id="273" r:id="rId21"/>
     <p:sldId id="274" r:id="rId22"/>
     <p:sldId id="275" r:id="rId23"/>
-    <p:sldId id="276" r:id="rId24"/>
-    <p:sldId id="277" r:id="rId25"/>
-    <p:sldId id="278" r:id="rId26"/>
-    <p:sldId id="281" r:id="rId27"/>
-    <p:sldId id="282" r:id="rId28"/>
-    <p:sldId id="283" r:id="rId29"/>
-    <p:sldId id="284" r:id="rId30"/>
-    <p:sldId id="285" r:id="rId31"/>
-    <p:sldId id="279" r:id="rId32"/>
-    <p:sldId id="280" r:id="rId33"/>
+    <p:sldId id="280" r:id="rId24"/>
+    <p:sldId id="276" r:id="rId25"/>
+    <p:sldId id="291" r:id="rId26"/>
+    <p:sldId id="289" r:id="rId27"/>
+    <p:sldId id="277" r:id="rId28"/>
+    <p:sldId id="278" r:id="rId29"/>
+    <p:sldId id="281" r:id="rId30"/>
+    <p:sldId id="282" r:id="rId31"/>
+    <p:sldId id="283" r:id="rId32"/>
+    <p:sldId id="284" r:id="rId33"/>
+    <p:sldId id="285" r:id="rId34"/>
+    <p:sldId id="279" r:id="rId35"/>
   </p:sldIdLst>
   <p:sldSz cx="12192000" cy="6858000"/>
   <p:notesSz cx="6858000" cy="12192000"/>
@@ -1617,7 +1619,13 @@
   <p:cSld>
     <p:spTree>
       <p:nvGrpSpPr>
-        <p:cNvPr id="1" name=""/>
+        <p:cNvPr id="1" name="">
+          <a:extLst>
+            <a:ext uri="{FF2B5EF4-FFF2-40B4-BE49-F238E27FC236}">
+              <a16:creationId xmlns:a16="http://schemas.microsoft.com/office/drawing/2014/main" id="{09ABB8F9-DEAB-2829-13DA-6A94AA701B4B}"/>
+            </a:ext>
+          </a:extLst>
+        </p:cNvPr>
         <p:cNvGrpSpPr/>
         <p:nvPr/>
       </p:nvGrpSpPr>
@@ -1631,7 +1639,13 @@
       </p:grpSpPr>
       <p:sp>
         <p:nvSpPr>
-          <p:cNvPr id="2" name="Slide Image Placeholder 1"/>
+          <p:cNvPr id="2" name="Slide Image Placeholder 1">
+            <a:extLst>
+              <a:ext uri="{FF2B5EF4-FFF2-40B4-BE49-F238E27FC236}">
+                <a16:creationId xmlns:a16="http://schemas.microsoft.com/office/drawing/2014/main" id="{B4423E26-DFAD-3C46-EA07-EBC04122CB82}"/>
+              </a:ext>
+            </a:extLst>
+          </p:cNvPr>
           <p:cNvSpPr>
             <a:spLocks noGrp="1" noRot="1" noChangeAspect="1"/>
           </p:cNvSpPr>
@@ -1643,7 +1657,13 @@
       </p:sp>
       <p:sp>
         <p:nvSpPr>
-          <p:cNvPr id="3" name="Notes Placeholder 2"/>
+          <p:cNvPr id="3" name="Notes Placeholder 2">
+            <a:extLst>
+              <a:ext uri="{FF2B5EF4-FFF2-40B4-BE49-F238E27FC236}">
+                <a16:creationId xmlns:a16="http://schemas.microsoft.com/office/drawing/2014/main" id="{2EBBCA60-99C2-B368-3D54-A8A5EB2E8A9A}"/>
+              </a:ext>
+            </a:extLst>
+          </p:cNvPr>
           <p:cNvSpPr>
             <a:spLocks noGrp="1"/>
           </p:cNvSpPr>
@@ -1662,7 +1682,13 @@
       </p:sp>
       <p:sp>
         <p:nvSpPr>
-          <p:cNvPr id="4" name="Slide Number Placeholder 3"/>
+          <p:cNvPr id="4" name="Slide Number Placeholder 3">
+            <a:extLst>
+              <a:ext uri="{FF2B5EF4-FFF2-40B4-BE49-F238E27FC236}">
+                <a16:creationId xmlns:a16="http://schemas.microsoft.com/office/drawing/2014/main" id="{97D2EC74-1DD9-CBBD-E1CC-4CB9E9CBF00C}"/>
+              </a:ext>
+            </a:extLst>
+          </p:cNvPr>
           <p:cNvSpPr>
             <a:spLocks noGrp="1"/>
           </p:cNvSpPr>
@@ -1686,7 +1712,7 @@
     </p:spTree>
     <p:extLst>
       <p:ext uri="{BB962C8B-B14F-4D97-AF65-F5344CB8AC3E}">
-        <p14:creationId xmlns:p14="http://schemas.microsoft.com/office/powerpoint/2010/main" val="1024086991"/>
+        <p14:creationId xmlns:p14="http://schemas.microsoft.com/office/powerpoint/2010/main" val="3622323841"/>
       </p:ext>
     </p:extLst>
   </p:cSld>
@@ -1701,7 +1727,13 @@
   <p:cSld>
     <p:spTree>
       <p:nvGrpSpPr>
-        <p:cNvPr id="1" name=""/>
+        <p:cNvPr id="1" name="">
+          <a:extLst>
+            <a:ext uri="{FF2B5EF4-FFF2-40B4-BE49-F238E27FC236}">
+              <a16:creationId xmlns:a16="http://schemas.microsoft.com/office/drawing/2014/main" id="{F17838B2-5A62-0EE1-217C-F7631B58E99E}"/>
+            </a:ext>
+          </a:extLst>
+        </p:cNvPr>
         <p:cNvGrpSpPr/>
         <p:nvPr/>
       </p:nvGrpSpPr>
@@ -1715,7 +1747,13 @@
       </p:grpSpPr>
       <p:sp>
         <p:nvSpPr>
-          <p:cNvPr id="2" name="Slide Image Placeholder 1"/>
+          <p:cNvPr id="2" name="Slide Image Placeholder 1">
+            <a:extLst>
+              <a:ext uri="{FF2B5EF4-FFF2-40B4-BE49-F238E27FC236}">
+                <a16:creationId xmlns:a16="http://schemas.microsoft.com/office/drawing/2014/main" id="{E0987976-3900-5D38-AF1E-D9E14556CF81}"/>
+              </a:ext>
+            </a:extLst>
+          </p:cNvPr>
           <p:cNvSpPr>
             <a:spLocks noGrp="1" noRot="1" noChangeAspect="1"/>
           </p:cNvSpPr>
@@ -1727,7 +1765,13 @@
       </p:sp>
       <p:sp>
         <p:nvSpPr>
-          <p:cNvPr id="3" name="Notes Placeholder 2"/>
+          <p:cNvPr id="3" name="Notes Placeholder 2">
+            <a:extLst>
+              <a:ext uri="{FF2B5EF4-FFF2-40B4-BE49-F238E27FC236}">
+                <a16:creationId xmlns:a16="http://schemas.microsoft.com/office/drawing/2014/main" id="{44DAA3A4-F95F-F52F-6855-69527D388958}"/>
+              </a:ext>
+            </a:extLst>
+          </p:cNvPr>
           <p:cNvSpPr>
             <a:spLocks noGrp="1"/>
           </p:cNvSpPr>
@@ -1746,7 +1790,13 @@
       </p:sp>
       <p:sp>
         <p:nvSpPr>
-          <p:cNvPr id="4" name="Slide Number Placeholder 3"/>
+          <p:cNvPr id="4" name="Slide Number Placeholder 3">
+            <a:extLst>
+              <a:ext uri="{FF2B5EF4-FFF2-40B4-BE49-F238E27FC236}">
+                <a16:creationId xmlns:a16="http://schemas.microsoft.com/office/drawing/2014/main" id="{4DF11C59-1569-502D-B629-20E289F6EBF8}"/>
+              </a:ext>
+            </a:extLst>
+          </p:cNvPr>
           <p:cNvSpPr>
             <a:spLocks noGrp="1"/>
           </p:cNvSpPr>
@@ -1761,7 +1811,7 @@
           <a:p>
             <a:fld id="{F7021451-1387-4CA6-816F-3879F97B5CBC}" type="slidenum">
               <a:rPr lang="en-US"/>
-              <a:t>31</a:t>
+              <a:t>26</a:t>
             </a:fld>
             <a:endParaRPr lang="en-US"/>
           </a:p>
@@ -1770,7 +1820,7 @@
     </p:spTree>
     <p:extLst>
       <p:ext uri="{BB962C8B-B14F-4D97-AF65-F5344CB8AC3E}">
-        <p14:creationId xmlns:p14="http://schemas.microsoft.com/office/powerpoint/2010/main" val="1024086991"/>
+        <p14:creationId xmlns:p14="http://schemas.microsoft.com/office/powerpoint/2010/main" val="1396173066"/>
       </p:ext>
     </p:extLst>
   </p:cSld>
@@ -1845,7 +1895,175 @@
           <a:p>
             <a:fld id="{F7021451-1387-4CA6-816F-3879F97B5CBC}" type="slidenum">
               <a:rPr lang="en-US"/>
-              <a:t>32</a:t>
+              <a:t>27</a:t>
+            </a:fld>
+            <a:endParaRPr lang="en-US"/>
+          </a:p>
+        </p:txBody>
+      </p:sp>
+    </p:spTree>
+    <p:extLst>
+      <p:ext uri="{BB962C8B-B14F-4D97-AF65-F5344CB8AC3E}">
+        <p14:creationId xmlns:p14="http://schemas.microsoft.com/office/powerpoint/2010/main" val="1024086991"/>
+      </p:ext>
+    </p:extLst>
+  </p:cSld>
+  <p:clrMapOvr>
+    <a:masterClrMapping/>
+  </p:clrMapOvr>
+</p:notes>
+</file>
+
+<file path=ppt/notesSlides/notesSlide27.xml><?xml version="1.0" encoding="utf-8"?>
+<p:notes xmlns:a="http://schemas.openxmlformats.org/drawingml/2006/main" xmlns:r="http://schemas.openxmlformats.org/officeDocument/2006/relationships" xmlns:p="http://schemas.openxmlformats.org/presentationml/2006/main">
+  <p:cSld>
+    <p:spTree>
+      <p:nvGrpSpPr>
+        <p:cNvPr id="1" name=""/>
+        <p:cNvGrpSpPr/>
+        <p:nvPr/>
+      </p:nvGrpSpPr>
+      <p:grpSpPr>
+        <a:xfrm>
+          <a:off x="0" y="0"/>
+          <a:ext cx="0" cy="0"/>
+          <a:chOff x="0" y="0"/>
+          <a:chExt cx="0" cy="0"/>
+        </a:xfrm>
+      </p:grpSpPr>
+      <p:sp>
+        <p:nvSpPr>
+          <p:cNvPr id="2" name="Slide Image Placeholder 1"/>
+          <p:cNvSpPr>
+            <a:spLocks noGrp="1" noRot="1" noChangeAspect="1"/>
+          </p:cNvSpPr>
+          <p:nvPr>
+            <p:ph type="sldImg"/>
+          </p:nvPr>
+        </p:nvSpPr>
+        <p:spPr/>
+      </p:sp>
+      <p:sp>
+        <p:nvSpPr>
+          <p:cNvPr id="3" name="Notes Placeholder 2"/>
+          <p:cNvSpPr>
+            <a:spLocks noGrp="1"/>
+          </p:cNvSpPr>
+          <p:nvPr>
+            <p:ph type="body" idx="1"/>
+          </p:nvPr>
+        </p:nvSpPr>
+        <p:spPr/>
+        <p:txBody>
+          <a:bodyPr/>
+          <a:lstStyle/>
+          <a:p>
+            <a:endParaRPr lang="en-US" dirty="0"/>
+          </a:p>
+        </p:txBody>
+      </p:sp>
+      <p:sp>
+        <p:nvSpPr>
+          <p:cNvPr id="4" name="Slide Number Placeholder 3"/>
+          <p:cNvSpPr>
+            <a:spLocks noGrp="1"/>
+          </p:cNvSpPr>
+          <p:nvPr>
+            <p:ph type="sldNum" sz="quarter" idx="10"/>
+          </p:nvPr>
+        </p:nvSpPr>
+        <p:spPr/>
+        <p:txBody>
+          <a:bodyPr/>
+          <a:lstStyle/>
+          <a:p>
+            <a:fld id="{F7021451-1387-4CA6-816F-3879F97B5CBC}" type="slidenum">
+              <a:rPr lang="en-US"/>
+              <a:t>28</a:t>
+            </a:fld>
+            <a:endParaRPr lang="en-US"/>
+          </a:p>
+        </p:txBody>
+      </p:sp>
+    </p:spTree>
+    <p:extLst>
+      <p:ext uri="{BB962C8B-B14F-4D97-AF65-F5344CB8AC3E}">
+        <p14:creationId xmlns:p14="http://schemas.microsoft.com/office/powerpoint/2010/main" val="1024086991"/>
+      </p:ext>
+    </p:extLst>
+  </p:cSld>
+  <p:clrMapOvr>
+    <a:masterClrMapping/>
+  </p:clrMapOvr>
+</p:notes>
+</file>
+
+<file path=ppt/notesSlides/notesSlide28.xml><?xml version="1.0" encoding="utf-8"?>
+<p:notes xmlns:a="http://schemas.openxmlformats.org/drawingml/2006/main" xmlns:r="http://schemas.openxmlformats.org/officeDocument/2006/relationships" xmlns:p="http://schemas.openxmlformats.org/presentationml/2006/main">
+  <p:cSld>
+    <p:spTree>
+      <p:nvGrpSpPr>
+        <p:cNvPr id="1" name=""/>
+        <p:cNvGrpSpPr/>
+        <p:nvPr/>
+      </p:nvGrpSpPr>
+      <p:grpSpPr>
+        <a:xfrm>
+          <a:off x="0" y="0"/>
+          <a:ext cx="0" cy="0"/>
+          <a:chOff x="0" y="0"/>
+          <a:chExt cx="0" cy="0"/>
+        </a:xfrm>
+      </p:grpSpPr>
+      <p:sp>
+        <p:nvSpPr>
+          <p:cNvPr id="2" name="Slide Image Placeholder 1"/>
+          <p:cNvSpPr>
+            <a:spLocks noGrp="1" noRot="1" noChangeAspect="1"/>
+          </p:cNvSpPr>
+          <p:nvPr>
+            <p:ph type="sldImg"/>
+          </p:nvPr>
+        </p:nvSpPr>
+        <p:spPr/>
+      </p:sp>
+      <p:sp>
+        <p:nvSpPr>
+          <p:cNvPr id="3" name="Notes Placeholder 2"/>
+          <p:cNvSpPr>
+            <a:spLocks noGrp="1"/>
+          </p:cNvSpPr>
+          <p:nvPr>
+            <p:ph type="body" idx="1"/>
+          </p:nvPr>
+        </p:nvSpPr>
+        <p:spPr/>
+        <p:txBody>
+          <a:bodyPr/>
+          <a:lstStyle/>
+          <a:p>
+            <a:endParaRPr lang="en-US" dirty="0"/>
+          </a:p>
+        </p:txBody>
+      </p:sp>
+      <p:sp>
+        <p:nvSpPr>
+          <p:cNvPr id="4" name="Slide Number Placeholder 3"/>
+          <p:cNvSpPr>
+            <a:spLocks noGrp="1"/>
+          </p:cNvSpPr>
+          <p:nvPr>
+            <p:ph type="sldNum" sz="quarter" idx="10"/>
+          </p:nvPr>
+        </p:nvSpPr>
+        <p:spPr/>
+        <p:txBody>
+          <a:bodyPr/>
+          <a:lstStyle/>
+          <a:p>
+            <a:fld id="{F7021451-1387-4CA6-816F-3879F97B5CBC}" type="slidenum">
+              <a:rPr lang="en-US"/>
+              <a:t>34</a:t>
             </a:fld>
             <a:endParaRPr lang="en-US"/>
           </a:p>
@@ -4591,7 +4809,7 @@
                 <a:ea typeface="Calibri" pitchFamily="34" charset="-122"/>
                 <a:cs typeface="Calibri" pitchFamily="34" charset="-120"/>
               </a:rPr>
-              <a:t>Labs are the core of the course, submitted through a GitHub-based workflow that mirrors professional sysadmin documentation practice</a:t>
+              <a:t>Labs are the core of the course, submitted through a Discord bot.</a:t>
             </a:r>
             <a:endParaRPr lang="en-US" sz="1600" dirty="0"/>
           </a:p>
@@ -4612,7 +4830,7 @@
                 <a:ea typeface="Calibri" pitchFamily="34" charset="-122"/>
                 <a:cs typeface="Calibri" pitchFamily="34" charset="-120"/>
               </a:rPr>
-              <a:t>Workflow: branch → write labs/lab-NN.md as a runbook (commands, expected vs. actual output, screenshots, analysis) → commit supporting artifacts → open a PR titled “Grade: lab-NN" → </a:t>
+              <a:t>Lab Workflow: Trigger grading bot → </a:t>
             </a:r>
             <a:r>
               <a:rPr lang="en-US" sz="1600" dirty="0" err="1">
@@ -4634,7 +4852,27 @@
                 <a:ea typeface="Calibri" pitchFamily="34" charset="-122"/>
                 <a:cs typeface="Calibri" pitchFamily="34" charset="-120"/>
               </a:rPr>
-              <a:t> checks your work→ address feedback → merge</a:t>
+              <a:t> checks your work→ address feedback</a:t>
+            </a:r>
+          </a:p>
+          <a:p>
+            <a:pPr marL="279400" indent="-279400" algn="l">
+              <a:spcAft>
+                <a:spcPts val="1400"/>
+              </a:spcAft>
+              <a:buSzPct val="100000"/>
+              <a:buChar char="●"/>
+            </a:pPr>
+            <a:r>
+              <a:rPr lang="en-US" sz="1600" dirty="0">
+                <a:solidFill>
+                  <a:srgbClr val="3D5A80"/>
+                </a:solidFill>
+                <a:latin typeface="Calibri" pitchFamily="34" charset="0"/>
+                <a:ea typeface="Calibri" pitchFamily="34" charset="-122"/>
+                <a:cs typeface="Calibri" pitchFamily="34" charset="-120"/>
+              </a:rPr>
+              <a:t>Homework Workflow: Upload all related files to Learning Suite</a:t>
             </a:r>
             <a:endParaRPr lang="en-US" sz="1600" dirty="0"/>
           </a:p>
@@ -4791,7 +5029,7 @@
                 <a:ea typeface="Calibri" pitchFamily="34" charset="-122"/>
                 <a:cs typeface="Calibri" pitchFamily="34" charset="-120"/>
               </a:rPr>
-              <a:t>All assignments are due at 11:59 PM on the posted date. Make sure the pull request itself is open before the deadline, not just committed locally</a:t>
+              <a:t>All assignments are due at 11:59 PM on the posted date. Make sure the grading request is submitted before the deadline.</a:t>
             </a:r>
             <a:endParaRPr lang="en-US" sz="1600" dirty="0"/>
           </a:p>
@@ -4856,27 +5094,6 @@
               </a:rPr>
               <a:t>Technical issues (network outages, VM failures, hardware problems) are a routine hazard in a systems administration course and are not grounds for an extension, so keep backups and submit early</a:t>
             </a:r>
-          </a:p>
-          <a:p>
-            <a:pPr marL="279400" indent="-279400" algn="l">
-              <a:spcAft>
-                <a:spcPts val="1400"/>
-              </a:spcAft>
-              <a:buSzPct val="100000"/>
-              <a:buChar char="●"/>
-            </a:pPr>
-            <a:r>
-              <a:rPr lang="en-US" sz="1600" dirty="0">
-                <a:solidFill>
-                  <a:srgbClr val="3D5A80"/>
-                </a:solidFill>
-                <a:latin typeface="Calibri" pitchFamily="34" charset="0"/>
-                <a:ea typeface="Calibri" pitchFamily="34" charset="-122"/>
-                <a:cs typeface="Calibri" pitchFamily="34" charset="-120"/>
-              </a:rPr>
-              <a:t>We need your GitHub username to create the repo for you</a:t>
-            </a:r>
-            <a:endParaRPr lang="en-US" sz="1600" dirty="0"/>
           </a:p>
         </p:txBody>
       </p:sp>
@@ -6491,6 +6708,183 @@
 
 <file path=ppt/slides/slide23.xml><?xml version="1.0" encoding="utf-8"?>
 <p:sld xmlns:a="http://schemas.openxmlformats.org/drawingml/2006/main" xmlns:r="http://schemas.openxmlformats.org/officeDocument/2006/relationships" xmlns:p="http://schemas.openxmlformats.org/presentationml/2006/main">
+  <p:cSld name="Slide 25">
+    <p:bg>
+      <p:bgPr>
+        <a:solidFill>
+          <a:srgbClr val="1B2A4A"/>
+        </a:solidFill>
+        <a:effectLst/>
+      </p:bgPr>
+    </p:bg>
+    <p:spTree>
+      <p:nvGrpSpPr>
+        <p:cNvPr id="1" name=""/>
+        <p:cNvGrpSpPr/>
+        <p:nvPr/>
+      </p:nvGrpSpPr>
+      <p:grpSpPr>
+        <a:xfrm>
+          <a:off x="0" y="0"/>
+          <a:ext cx="0" cy="0"/>
+          <a:chOff x="0" y="0"/>
+          <a:chExt cx="0" cy="0"/>
+        </a:xfrm>
+      </p:grpSpPr>
+      <p:sp>
+        <p:nvSpPr>
+          <p:cNvPr id="2" name="Shape 0"/>
+          <p:cNvSpPr/>
+          <p:nvPr/>
+        </p:nvSpPr>
+        <p:spPr>
+          <a:xfrm>
+            <a:off x="5413248" y="1920240"/>
+            <a:ext cx="1371600" cy="1371600"/>
+          </a:xfrm>
+          <a:prstGeom prst="ellipse">
+            <a:avLst/>
+          </a:prstGeom>
+          <a:solidFill>
+            <a:srgbClr val="00B4D8"/>
+          </a:solidFill>
+          <a:ln/>
+        </p:spPr>
+        <p:txBody>
+          <a:bodyPr/>
+          <a:lstStyle/>
+          <a:p>
+            <a:endParaRPr lang="en-US"/>
+          </a:p>
+        </p:txBody>
+      </p:sp>
+      <p:sp>
+        <p:nvSpPr>
+          <p:cNvPr id="3" name="Text 1"/>
+          <p:cNvSpPr/>
+          <p:nvPr/>
+        </p:nvSpPr>
+        <p:spPr>
+          <a:xfrm>
+            <a:off x="5413248" y="1920240"/>
+            <a:ext cx="1371600" cy="1371600"/>
+          </a:xfrm>
+          <a:prstGeom prst="rect">
+            <a:avLst/>
+          </a:prstGeom>
+          <a:noFill/>
+          <a:ln/>
+        </p:spPr>
+        <p:txBody>
+          <a:bodyPr wrap="square" lIns="0" tIns="0" rIns="0" bIns="0" rtlCol="0" anchor="ctr"/>
+          <a:lstStyle/>
+          <a:p>
+            <a:pPr marL="0" indent="0" algn="ctr">
+              <a:buNone/>
+            </a:pPr>
+            <a:r>
+              <a:rPr lang="en-US" sz="4000" b="1" dirty="0">
+                <a:solidFill>
+                  <a:srgbClr val="1B2A4A"/>
+                </a:solidFill>
+                <a:latin typeface="Cambria" pitchFamily="34" charset="0"/>
+                <a:ea typeface="Cambria" pitchFamily="34" charset="-122"/>
+                <a:cs typeface="Cambria" pitchFamily="34" charset="-120"/>
+              </a:rPr>
+              <a:t>?</a:t>
+            </a:r>
+            <a:endParaRPr lang="en-US" sz="4000" dirty="0"/>
+          </a:p>
+        </p:txBody>
+      </p:sp>
+      <p:sp>
+        <p:nvSpPr>
+          <p:cNvPr id="4" name="Text 2"/>
+          <p:cNvSpPr/>
+          <p:nvPr/>
+        </p:nvSpPr>
+        <p:spPr>
+          <a:xfrm>
+            <a:off x="0" y="3520440"/>
+            <a:ext cx="12191695" cy="822960"/>
+          </a:xfrm>
+          <a:prstGeom prst="rect">
+            <a:avLst/>
+          </a:prstGeom>
+          <a:noFill/>
+          <a:ln/>
+        </p:spPr>
+        <p:txBody>
+          <a:bodyPr wrap="square" lIns="0" tIns="0" rIns="0" bIns="0" rtlCol="0" anchor="ctr"/>
+          <a:lstStyle/>
+          <a:p>
+            <a:pPr marL="0" indent="0" algn="ctr">
+              <a:buNone/>
+            </a:pPr>
+            <a:r>
+              <a:rPr lang="en-US" sz="3600" b="1" dirty="0">
+                <a:solidFill>
+                  <a:srgbClr val="FFFFFF"/>
+                </a:solidFill>
+                <a:latin typeface="Cambria" pitchFamily="34" charset="0"/>
+                <a:ea typeface="Cambria" pitchFamily="34" charset="-122"/>
+                <a:cs typeface="Cambria" pitchFamily="34" charset="-120"/>
+              </a:rPr>
+              <a:t>Questions?</a:t>
+            </a:r>
+            <a:endParaRPr lang="en-US" sz="3600" dirty="0"/>
+          </a:p>
+        </p:txBody>
+      </p:sp>
+      <p:sp>
+        <p:nvSpPr>
+          <p:cNvPr id="5" name="Text 3"/>
+          <p:cNvSpPr/>
+          <p:nvPr/>
+        </p:nvSpPr>
+        <p:spPr>
+          <a:xfrm>
+            <a:off x="0" y="4343400"/>
+            <a:ext cx="12191695" cy="457200"/>
+          </a:xfrm>
+          <a:prstGeom prst="rect">
+            <a:avLst/>
+          </a:prstGeom>
+          <a:noFill/>
+          <a:ln/>
+        </p:spPr>
+        <p:txBody>
+          <a:bodyPr wrap="square" lIns="0" tIns="0" rIns="0" bIns="0" rtlCol="0" anchor="ctr"/>
+          <a:lstStyle/>
+          <a:p>
+            <a:pPr marL="0" indent="0" algn="ctr">
+              <a:buNone/>
+            </a:pPr>
+            <a:r>
+              <a:rPr lang="en-US" sz="1600" dirty="0">
+                <a:solidFill>
+                  <a:srgbClr val="E8EEF7"/>
+                </a:solidFill>
+                <a:latin typeface="Calibri" pitchFamily="34" charset="0"/>
+                <a:ea typeface="Calibri" pitchFamily="34" charset="-122"/>
+                <a:cs typeface="Calibri" pitchFamily="34" charset="-120"/>
+              </a:rPr>
+              <a:t>Sebastian Hayes  ·  sebastian.hayes@byu.edu  ·  Discord</a:t>
+            </a:r>
+            <a:endParaRPr lang="en-US" sz="1600" dirty="0"/>
+          </a:p>
+        </p:txBody>
+      </p:sp>
+    </p:spTree>
+  </p:cSld>
+  <p:clrMapOvr>
+    <a:masterClrMapping/>
+  </p:clrMapOvr>
+</p:sld>
+</file>
+
+<file path=ppt/slides/slide24.xml><?xml version="1.0" encoding="utf-8"?>
+<p:sld xmlns:a="http://schemas.openxmlformats.org/drawingml/2006/main" xmlns:r="http://schemas.openxmlformats.org/officeDocument/2006/relationships" xmlns:p="http://schemas.openxmlformats.org/presentationml/2006/main">
   <p:cSld name="Slide 21">
     <p:bg>
       <p:bgPr>
@@ -6613,7 +7007,7 @@
                 <a:ea typeface="Cambria" pitchFamily="34" charset="-122"/>
                 <a:cs typeface="Cambria" pitchFamily="34" charset="-120"/>
               </a:rPr>
-              <a:t>Environment Setup: Proxmox</a:t>
+              <a:t>Environment Setup: Discord &amp; GitHub</a:t>
             </a:r>
             <a:endParaRPr lang="en-US" sz="3600" dirty="0"/>
           </a:p>
@@ -6627,7 +7021,374 @@
 </p:sld>
 </file>
 
-<file path=ppt/slides/slide24.xml><?xml version="1.0" encoding="utf-8"?>
+<file path=ppt/slides/slide25.xml><?xml version="1.0" encoding="utf-8"?>
+<p:sld xmlns:a="http://schemas.openxmlformats.org/drawingml/2006/main" xmlns:r="http://schemas.openxmlformats.org/officeDocument/2006/relationships" xmlns:p="http://schemas.openxmlformats.org/presentationml/2006/main">
+  <p:cSld>
+    <p:spTree>
+      <p:nvGrpSpPr>
+        <p:cNvPr id="1" name="">
+          <a:extLst>
+            <a:ext uri="{FF2B5EF4-FFF2-40B4-BE49-F238E27FC236}">
+              <a16:creationId xmlns:a16="http://schemas.microsoft.com/office/drawing/2014/main" id="{DA20CA7C-81F5-8C7C-97DE-C08DE9AD0096}"/>
+            </a:ext>
+          </a:extLst>
+        </p:cNvPr>
+        <p:cNvGrpSpPr/>
+        <p:nvPr/>
+      </p:nvGrpSpPr>
+      <p:grpSpPr>
+        <a:xfrm>
+          <a:off x="0" y="0"/>
+          <a:ext cx="0" cy="0"/>
+          <a:chOff x="0" y="0"/>
+          <a:chExt cx="0" cy="0"/>
+        </a:xfrm>
+      </p:grpSpPr>
+      <p:sp>
+        <p:nvSpPr>
+          <p:cNvPr id="2" name="Text 0">
+            <a:extLst>
+              <a:ext uri="{FF2B5EF4-FFF2-40B4-BE49-F238E27FC236}">
+                <a16:creationId xmlns:a16="http://schemas.microsoft.com/office/drawing/2014/main" id="{EF98DDA8-1101-1484-FA02-4B66DB9EAD0C}"/>
+              </a:ext>
+            </a:extLst>
+          </p:cNvPr>
+          <p:cNvSpPr/>
+          <p:nvPr/>
+        </p:nvSpPr>
+        <p:spPr>
+          <a:xfrm>
+            <a:off x="640080" y="457200"/>
+            <a:ext cx="10911535" cy="822960"/>
+          </a:xfrm>
+          <a:prstGeom prst="rect">
+            <a:avLst/>
+          </a:prstGeom>
+          <a:noFill/>
+          <a:ln/>
+        </p:spPr>
+        <p:txBody>
+          <a:bodyPr wrap="square" lIns="0" tIns="0" rIns="0" bIns="0" rtlCol="0" anchor="ctr"/>
+          <a:lstStyle/>
+          <a:p>
+            <a:pPr marL="0" indent="0" algn="l">
+              <a:buNone/>
+            </a:pPr>
+            <a:r>
+              <a:rPr lang="en-US" sz="3000" b="1" dirty="0">
+                <a:solidFill>
+                  <a:srgbClr val="1B2A4A"/>
+                </a:solidFill>
+                <a:latin typeface="Cambria" pitchFamily="34" charset="0"/>
+                <a:ea typeface="Cambria" pitchFamily="34" charset="-122"/>
+                <a:cs typeface="Cambria" pitchFamily="34" charset="-120"/>
+              </a:rPr>
+              <a:t>Setup: Discord &amp; GitHub</a:t>
+            </a:r>
+          </a:p>
+          <a:p>
+            <a:pPr marL="0" indent="0" algn="l">
+              <a:buNone/>
+            </a:pPr>
+            <a:endParaRPr lang="en-US" sz="3000" dirty="0"/>
+          </a:p>
+        </p:txBody>
+      </p:sp>
+      <p:sp>
+        <p:nvSpPr>
+          <p:cNvPr id="3" name="Text 1">
+            <a:extLst>
+              <a:ext uri="{FF2B5EF4-FFF2-40B4-BE49-F238E27FC236}">
+                <a16:creationId xmlns:a16="http://schemas.microsoft.com/office/drawing/2014/main" id="{B4C32CF1-BC2D-A80B-6C2C-A0BE55E2617F}"/>
+              </a:ext>
+            </a:extLst>
+          </p:cNvPr>
+          <p:cNvSpPr/>
+          <p:nvPr/>
+        </p:nvSpPr>
+        <p:spPr>
+          <a:xfrm>
+            <a:off x="640080" y="1417320"/>
+            <a:ext cx="10911535" cy="5029200"/>
+          </a:xfrm>
+          <a:prstGeom prst="rect">
+            <a:avLst/>
+          </a:prstGeom>
+          <a:noFill/>
+          <a:ln/>
+        </p:spPr>
+        <p:txBody>
+          <a:bodyPr wrap="square" lIns="0" tIns="0" rIns="0" bIns="0" rtlCol="0" anchor="t"/>
+          <a:lstStyle/>
+          <a:p>
+            <a:pPr marL="279400" indent="-279400" algn="l">
+              <a:spcAft>
+                <a:spcPts val="1400"/>
+              </a:spcAft>
+              <a:buSzPct val="100000"/>
+              <a:buChar char="●"/>
+            </a:pPr>
+            <a:r>
+              <a:rPr lang="en-US" sz="1600" dirty="0"/>
+              <a:t>Create a new GitHub repository</a:t>
+            </a:r>
+          </a:p>
+          <a:p>
+            <a:pPr marL="279400" indent="-279400" algn="l">
+              <a:spcAft>
+                <a:spcPts val="1400"/>
+              </a:spcAft>
+              <a:buSzPct val="100000"/>
+              <a:buChar char="●"/>
+            </a:pPr>
+            <a:r>
+              <a:rPr lang="en-US" sz="1600" dirty="0"/>
+              <a:t>Then go to Settings &gt; Collaborators &gt; Add people</a:t>
+            </a:r>
+          </a:p>
+          <a:p>
+            <a:pPr marL="736600" lvl="1" indent="-279400">
+              <a:spcAft>
+                <a:spcPts val="1400"/>
+              </a:spcAft>
+              <a:buSzPct val="100000"/>
+              <a:buChar char="●"/>
+            </a:pPr>
+            <a:r>
+              <a:rPr lang="en-US" sz="1600" dirty="0"/>
+              <a:t>Add </a:t>
+            </a:r>
+            <a:r>
+              <a:rPr lang="en-US" sz="1600" dirty="0" err="1"/>
+              <a:t>macenb</a:t>
+            </a:r>
+            <a:r>
+              <a:rPr lang="en-US" sz="1600" dirty="0"/>
+              <a:t> and shayes20</a:t>
+            </a:r>
+          </a:p>
+          <a:p>
+            <a:pPr marL="736600" lvl="1" indent="-279400">
+              <a:spcAft>
+                <a:spcPts val="1400"/>
+              </a:spcAft>
+              <a:buSzPct val="100000"/>
+              <a:buChar char="●"/>
+            </a:pPr>
+            <a:r>
+              <a:rPr lang="en-US" sz="1600" dirty="0"/>
+              <a:t>Make sure they have read access to the repos</a:t>
+            </a:r>
+          </a:p>
+          <a:p>
+            <a:pPr marL="279400" indent="-279400">
+              <a:spcAft>
+                <a:spcPts val="1400"/>
+              </a:spcAft>
+              <a:buSzPct val="100000"/>
+              <a:buChar char="●"/>
+            </a:pPr>
+            <a:r>
+              <a:rPr lang="en-US" sz="1600" dirty="0"/>
+              <a:t>Take the Discord &amp; GitHub Quiz on Learning Suite</a:t>
+            </a:r>
+          </a:p>
+          <a:p>
+            <a:pPr marL="736600" lvl="1" indent="-279400">
+              <a:spcAft>
+                <a:spcPts val="1400"/>
+              </a:spcAft>
+              <a:buSzPct val="100000"/>
+              <a:buChar char="●"/>
+            </a:pPr>
+            <a:r>
+              <a:rPr lang="en-US" sz="1600" dirty="0"/>
+              <a:t>Enter the repo link and your Discord username</a:t>
+            </a:r>
+          </a:p>
+        </p:txBody>
+      </p:sp>
+    </p:spTree>
+    <p:extLst>
+      <p:ext uri="{BB962C8B-B14F-4D97-AF65-F5344CB8AC3E}">
+        <p14:creationId xmlns:p14="http://schemas.microsoft.com/office/powerpoint/2010/main" val="3710530049"/>
+      </p:ext>
+    </p:extLst>
+  </p:cSld>
+  <p:clrMapOvr>
+    <a:masterClrMapping/>
+  </p:clrMapOvr>
+</p:sld>
+</file>
+
+<file path=ppt/slides/slide26.xml><?xml version="1.0" encoding="utf-8"?>
+<p:sld xmlns:a="http://schemas.openxmlformats.org/drawingml/2006/main" xmlns:r="http://schemas.openxmlformats.org/officeDocument/2006/relationships" xmlns:p="http://schemas.openxmlformats.org/presentationml/2006/main">
+  <p:cSld>
+    <p:bg>
+      <p:bgPr>
+        <a:solidFill>
+          <a:srgbClr val="1B2A4A"/>
+        </a:solidFill>
+        <a:effectLst/>
+      </p:bgPr>
+    </p:bg>
+    <p:spTree>
+      <p:nvGrpSpPr>
+        <p:cNvPr id="1" name="">
+          <a:extLst>
+            <a:ext uri="{FF2B5EF4-FFF2-40B4-BE49-F238E27FC236}">
+              <a16:creationId xmlns:a16="http://schemas.microsoft.com/office/drawing/2014/main" id="{8951CB9F-BA07-5AA4-3C06-1FC0B47E45FF}"/>
+            </a:ext>
+          </a:extLst>
+        </p:cNvPr>
+        <p:cNvGrpSpPr/>
+        <p:nvPr/>
+      </p:nvGrpSpPr>
+      <p:grpSpPr>
+        <a:xfrm>
+          <a:off x="0" y="0"/>
+          <a:ext cx="0" cy="0"/>
+          <a:chOff x="0" y="0"/>
+          <a:chExt cx="0" cy="0"/>
+        </a:xfrm>
+      </p:grpSpPr>
+      <p:sp>
+        <p:nvSpPr>
+          <p:cNvPr id="2" name="Shape 0">
+            <a:extLst>
+              <a:ext uri="{FF2B5EF4-FFF2-40B4-BE49-F238E27FC236}">
+                <a16:creationId xmlns:a16="http://schemas.microsoft.com/office/drawing/2014/main" id="{2BFA1F22-9BCD-B16A-4E01-29219EF002A1}"/>
+              </a:ext>
+            </a:extLst>
+          </p:cNvPr>
+          <p:cNvSpPr/>
+          <p:nvPr/>
+        </p:nvSpPr>
+        <p:spPr>
+          <a:xfrm>
+            <a:off x="822960" y="2331720"/>
+            <a:ext cx="1005840" cy="1005840"/>
+          </a:xfrm>
+          <a:prstGeom prst="ellipse">
+            <a:avLst/>
+          </a:prstGeom>
+          <a:solidFill>
+            <a:srgbClr val="00B4D8"/>
+          </a:solidFill>
+          <a:ln/>
+        </p:spPr>
+        <p:txBody>
+          <a:bodyPr/>
+          <a:lstStyle/>
+          <a:p>
+            <a:endParaRPr lang="en-US"/>
+          </a:p>
+        </p:txBody>
+      </p:sp>
+      <p:sp>
+        <p:nvSpPr>
+          <p:cNvPr id="3" name="Text 1">
+            <a:extLst>
+              <a:ext uri="{FF2B5EF4-FFF2-40B4-BE49-F238E27FC236}">
+                <a16:creationId xmlns:a16="http://schemas.microsoft.com/office/drawing/2014/main" id="{66194905-D7FD-6E54-C2B7-8F97A56D33D3}"/>
+              </a:ext>
+            </a:extLst>
+          </p:cNvPr>
+          <p:cNvSpPr/>
+          <p:nvPr/>
+        </p:nvSpPr>
+        <p:spPr>
+          <a:xfrm>
+            <a:off x="822960" y="2331720"/>
+            <a:ext cx="1005840" cy="1005840"/>
+          </a:xfrm>
+          <a:prstGeom prst="rect">
+            <a:avLst/>
+          </a:prstGeom>
+          <a:noFill/>
+          <a:ln/>
+        </p:spPr>
+        <p:txBody>
+          <a:bodyPr wrap="square" lIns="0" tIns="0" rIns="0" bIns="0" rtlCol="0" anchor="ctr"/>
+          <a:lstStyle/>
+          <a:p>
+            <a:pPr marL="0" indent="0" algn="ctr">
+              <a:buNone/>
+            </a:pPr>
+            <a:r>
+              <a:rPr lang="en-US" sz="3000" b="1" dirty="0">
+                <a:solidFill>
+                  <a:srgbClr val="1B2A4A"/>
+                </a:solidFill>
+                <a:latin typeface="Cambria" pitchFamily="34" charset="0"/>
+                <a:ea typeface="Cambria" pitchFamily="34" charset="-122"/>
+                <a:cs typeface="Cambria" pitchFamily="34" charset="-120"/>
+              </a:rPr>
+              <a:t>04</a:t>
+            </a:r>
+            <a:endParaRPr lang="en-US" sz="3000" dirty="0"/>
+          </a:p>
+        </p:txBody>
+      </p:sp>
+      <p:sp>
+        <p:nvSpPr>
+          <p:cNvPr id="4" name="Text 2">
+            <a:extLst>
+              <a:ext uri="{FF2B5EF4-FFF2-40B4-BE49-F238E27FC236}">
+                <a16:creationId xmlns:a16="http://schemas.microsoft.com/office/drawing/2014/main" id="{BE54AAA8-D49B-EB44-F192-72F0B79EA3AB}"/>
+              </a:ext>
+            </a:extLst>
+          </p:cNvPr>
+          <p:cNvSpPr/>
+          <p:nvPr/>
+        </p:nvSpPr>
+        <p:spPr>
+          <a:xfrm>
+            <a:off x="2103120" y="2377440"/>
+            <a:ext cx="9235440" cy="914400"/>
+          </a:xfrm>
+          <a:prstGeom prst="rect">
+            <a:avLst/>
+          </a:prstGeom>
+          <a:noFill/>
+          <a:ln/>
+        </p:spPr>
+        <p:txBody>
+          <a:bodyPr wrap="square" lIns="0" tIns="0" rIns="0" bIns="0" rtlCol="0" anchor="ctr"/>
+          <a:lstStyle/>
+          <a:p>
+            <a:pPr marL="0" indent="0" algn="l">
+              <a:buNone/>
+            </a:pPr>
+            <a:r>
+              <a:rPr lang="en-US" sz="3600" b="1" dirty="0">
+                <a:solidFill>
+                  <a:srgbClr val="FFFFFF"/>
+                </a:solidFill>
+                <a:latin typeface="Cambria" pitchFamily="34" charset="0"/>
+                <a:ea typeface="Cambria" pitchFamily="34" charset="-122"/>
+                <a:cs typeface="Cambria" pitchFamily="34" charset="-120"/>
+              </a:rPr>
+              <a:t>Environment Setup: Proxmox</a:t>
+            </a:r>
+            <a:endParaRPr lang="en-US" sz="3600" dirty="0"/>
+          </a:p>
+        </p:txBody>
+      </p:sp>
+    </p:spTree>
+    <p:extLst>
+      <p:ext uri="{BB962C8B-B14F-4D97-AF65-F5344CB8AC3E}">
+        <p14:creationId xmlns:p14="http://schemas.microsoft.com/office/powerpoint/2010/main" val="1485122750"/>
+      </p:ext>
+    </p:extLst>
+  </p:cSld>
+  <p:clrMapOvr>
+    <a:masterClrMapping/>
+  </p:clrMapOvr>
+</p:sld>
+</file>
+
+<file path=ppt/slides/slide27.xml><?xml version="1.0" encoding="utf-8"?>
 <p:sld xmlns:a="http://schemas.openxmlformats.org/drawingml/2006/main" xmlns:r="http://schemas.openxmlformats.org/officeDocument/2006/relationships" xmlns:p="http://schemas.openxmlformats.org/presentationml/2006/main">
   <p:cSld name="Slide 22">
     <p:bg>
@@ -6805,7 +7566,7 @@
 </p:sld>
 </file>
 
-<file path=ppt/slides/slide25.xml><?xml version="1.0" encoding="utf-8"?>
+<file path=ppt/slides/slide28.xml><?xml version="1.0" encoding="utf-8"?>
 <p:sld xmlns:a="http://schemas.openxmlformats.org/drawingml/2006/main" xmlns:r="http://schemas.openxmlformats.org/officeDocument/2006/relationships" xmlns:p="http://schemas.openxmlformats.org/presentationml/2006/main">
   <p:cSld name="Slide 23">
     <p:bg>
@@ -6983,7 +7744,7 @@
 </p:sld>
 </file>
 
-<file path=ppt/slides/slide26.xml><?xml version="1.0" encoding="utf-8"?>
+<file path=ppt/slides/slide29.xml><?xml version="1.0" encoding="utf-8"?>
 <p:sld xmlns:a="http://schemas.openxmlformats.org/drawingml/2006/main" xmlns:r="http://schemas.openxmlformats.org/officeDocument/2006/relationships" xmlns:p="http://schemas.openxmlformats.org/presentationml/2006/main">
   <p:cSld>
     <p:spTree>
@@ -7992,7 +8753,194 @@
 </p:sld>
 </file>
 
-<file path=ppt/slides/slide27.xml><?xml version="1.0" encoding="utf-8"?>
+<file path=ppt/slides/slide3.xml><?xml version="1.0" encoding="utf-8"?>
+<p:sld xmlns:a="http://schemas.openxmlformats.org/drawingml/2006/main" xmlns:r="http://schemas.openxmlformats.org/officeDocument/2006/relationships" xmlns:p="http://schemas.openxmlformats.org/presentationml/2006/main">
+  <p:cSld>
+    <p:bg>
+      <p:bgPr>
+        <a:solidFill>
+          <a:schemeClr val="bg1"/>
+        </a:solidFill>
+        <a:effectLst/>
+      </p:bgPr>
+    </p:bg>
+    <p:spTree>
+      <p:nvGrpSpPr>
+        <p:cNvPr id="1" name=""/>
+        <p:cNvGrpSpPr/>
+        <p:nvPr/>
+      </p:nvGrpSpPr>
+      <p:grpSpPr>
+        <a:xfrm>
+          <a:off x="0" y="0"/>
+          <a:ext cx="0" cy="0"/>
+          <a:chOff x="0" y="0"/>
+          <a:chExt cx="0" cy="0"/>
+        </a:xfrm>
+      </p:grpSpPr>
+      <p:sp>
+        <p:nvSpPr>
+          <p:cNvPr id="11" name="Down Arrow 7">
+            <a:extLst>
+              <a:ext uri="{FF2B5EF4-FFF2-40B4-BE49-F238E27FC236}">
+                <a16:creationId xmlns:a16="http://schemas.microsoft.com/office/drawing/2014/main" id="{D4771268-CB57-404A-9271-370EB28F6090}"/>
+              </a:ext>
+              <a:ext uri="{C183D7F6-B498-43B3-948B-1728B52AA6E4}">
+                <adec:decorative xmlns:adec="http://schemas.microsoft.com/office/drawing/2017/decorative" val="1"/>
+              </a:ext>
+            </a:extLst>
+          </p:cNvPr>
+          <p:cNvSpPr>
+            <a:spLocks noGrp="1" noRot="1" noChangeAspect="1" noMove="1" noResize="1" noEditPoints="1" noAdjustHandles="1" noChangeArrowheads="1" noChangeShapeType="1" noTextEdit="1"/>
+          </p:cNvSpPr>
+          <p:nvPr>
+            <p:extLst>
+              <p:ext uri="{386F3935-93C4-4BCD-93E2-E3B085C9AB24}">
+                <p16:designElem xmlns:p16="http://schemas.microsoft.com/office/powerpoint/2015/main" val="1"/>
+              </p:ext>
+            </p:extLst>
+          </p:nvPr>
+        </p:nvSpPr>
+        <p:spPr>
+          <a:xfrm rot="16200000">
+            <a:off x="800100" y="1491343"/>
+            <a:ext cx="3333749" cy="3499103"/>
+          </a:xfrm>
+          <a:prstGeom prst="downArrow">
+            <a:avLst>
+              <a:gd name="adj1" fmla="val 100000"/>
+              <a:gd name="adj2" fmla="val 15788"/>
+            </a:avLst>
+          </a:prstGeom>
+          <a:solidFill>
+            <a:srgbClr val="404040"/>
+          </a:solidFill>
+          <a:ln w="53975">
+            <a:noFill/>
+          </a:ln>
+        </p:spPr>
+        <p:style>
+          <a:lnRef idx="2">
+            <a:schemeClr val="accent1">
+              <a:shade val="50000"/>
+            </a:schemeClr>
+          </a:lnRef>
+          <a:fillRef idx="1">
+            <a:schemeClr val="accent1"/>
+          </a:fillRef>
+          <a:effectRef idx="0">
+            <a:schemeClr val="accent1"/>
+          </a:effectRef>
+          <a:fontRef idx="minor">
+            <a:schemeClr val="lt1"/>
+          </a:fontRef>
+        </p:style>
+        <p:txBody>
+          <a:bodyPr rtlCol="0" anchor="ctr"/>
+          <a:lstStyle/>
+          <a:p>
+            <a:pPr algn="ctr"/>
+            <a:endParaRPr lang="en-US"/>
+          </a:p>
+        </p:txBody>
+      </p:sp>
+      <p:sp>
+        <p:nvSpPr>
+          <p:cNvPr id="6" name="TextBox 5">
+            <a:extLst>
+              <a:ext uri="{FF2B5EF4-FFF2-40B4-BE49-F238E27FC236}">
+                <a16:creationId xmlns:a16="http://schemas.microsoft.com/office/drawing/2014/main" id="{B80983AA-0D29-FCDC-BAAD-4D0E472768CC}"/>
+              </a:ext>
+            </a:extLst>
+          </p:cNvPr>
+          <p:cNvSpPr txBox="1"/>
+          <p:nvPr/>
+        </p:nvSpPr>
+        <p:spPr>
+          <a:xfrm>
+            <a:off x="1028700" y="1967266"/>
+            <a:ext cx="2628900" cy="2547257"/>
+          </a:xfrm>
+          <a:prstGeom prst="rect">
+            <a:avLst/>
+          </a:prstGeom>
+          <a:noFill/>
+        </p:spPr>
+        <p:txBody>
+          <a:bodyPr vert="horz" lIns="91440" tIns="45720" rIns="91440" bIns="45720" rtlCol="0" anchor="ctr">
+            <a:normAutofit/>
+          </a:bodyPr>
+          <a:lstStyle/>
+          <a:p>
+            <a:pPr algn="ctr">
+              <a:lnSpc>
+                <a:spcPct val="90000"/>
+              </a:lnSpc>
+              <a:spcBef>
+                <a:spcPct val="0"/>
+              </a:spcBef>
+              <a:spcAft>
+                <a:spcPts val="600"/>
+              </a:spcAft>
+            </a:pPr>
+            <a:r>
+              <a:rPr lang="en-US" sz="3600" kern="1200">
+                <a:solidFill>
+                  <a:srgbClr val="FFFFFF"/>
+                </a:solidFill>
+                <a:latin typeface="+mj-lt"/>
+                <a:ea typeface="+mj-ea"/>
+                <a:cs typeface="+mj-cs"/>
+              </a:rPr>
+              <a:t>Prayer sign up</a:t>
+            </a:r>
+          </a:p>
+        </p:txBody>
+      </p:sp>
+      <p:pic>
+        <p:nvPicPr>
+          <p:cNvPr id="3" name="Picture 2">
+            <a:extLst>
+              <a:ext uri="{FF2B5EF4-FFF2-40B4-BE49-F238E27FC236}">
+                <a16:creationId xmlns:a16="http://schemas.microsoft.com/office/drawing/2014/main" id="{A0C91A17-3EFD-73F4-AF1D-8A720EB62D1D}"/>
+              </a:ext>
+            </a:extLst>
+          </p:cNvPr>
+          <p:cNvPicPr>
+            <a:picLocks noChangeAspect="1"/>
+          </p:cNvPicPr>
+          <p:nvPr/>
+        </p:nvPicPr>
+        <p:blipFill>
+          <a:blip r:embed="rId2"/>
+          <a:stretch>
+            <a:fillRect/>
+          </a:stretch>
+        </p:blipFill>
+        <p:spPr>
+          <a:xfrm>
+            <a:off x="5383296" y="643466"/>
+            <a:ext cx="5568739" cy="5568739"/>
+          </a:xfrm>
+          <a:prstGeom prst="rect">
+            <a:avLst/>
+          </a:prstGeom>
+        </p:spPr>
+      </p:pic>
+    </p:spTree>
+    <p:extLst>
+      <p:ext uri="{BB962C8B-B14F-4D97-AF65-F5344CB8AC3E}">
+        <p14:creationId xmlns:p14="http://schemas.microsoft.com/office/powerpoint/2010/main" val="313243520"/>
+      </p:ext>
+    </p:extLst>
+  </p:cSld>
+  <p:clrMapOvr>
+    <a:masterClrMapping/>
+  </p:clrMapOvr>
+</p:sld>
+</file>
+
+<file path=ppt/slides/slide30.xml><?xml version="1.0" encoding="utf-8"?>
 <p:sld xmlns:a="http://schemas.openxmlformats.org/drawingml/2006/main" xmlns:r="http://schemas.openxmlformats.org/officeDocument/2006/relationships" xmlns:p="http://schemas.openxmlformats.org/presentationml/2006/main">
   <p:cSld>
     <p:spTree>
@@ -9140,7 +10088,7 @@
 </p:sld>
 </file>
 
-<file path=ppt/slides/slide28.xml><?xml version="1.0" encoding="utf-8"?>
+<file path=ppt/slides/slide31.xml><?xml version="1.0" encoding="utf-8"?>
 <p:sld xmlns:a="http://schemas.openxmlformats.org/drawingml/2006/main" xmlns:r="http://schemas.openxmlformats.org/officeDocument/2006/relationships" xmlns:p="http://schemas.openxmlformats.org/presentationml/2006/main">
   <p:cSld>
     <p:spTree>
@@ -10309,7 +11257,7 @@
 </p:sld>
 </file>
 
-<file path=ppt/slides/slide29.xml><?xml version="1.0" encoding="utf-8"?>
+<file path=ppt/slides/slide32.xml><?xml version="1.0" encoding="utf-8"?>
 <p:sld xmlns:a="http://schemas.openxmlformats.org/drawingml/2006/main" xmlns:r="http://schemas.openxmlformats.org/officeDocument/2006/relationships" xmlns:p="http://schemas.openxmlformats.org/presentationml/2006/main">
   <p:cSld>
     <p:spTree>
@@ -11417,194 +12365,7 @@
 </p:sld>
 </file>
 
-<file path=ppt/slides/slide3.xml><?xml version="1.0" encoding="utf-8"?>
-<p:sld xmlns:a="http://schemas.openxmlformats.org/drawingml/2006/main" xmlns:r="http://schemas.openxmlformats.org/officeDocument/2006/relationships" xmlns:p="http://schemas.openxmlformats.org/presentationml/2006/main">
-  <p:cSld>
-    <p:bg>
-      <p:bgPr>
-        <a:solidFill>
-          <a:schemeClr val="bg1"/>
-        </a:solidFill>
-        <a:effectLst/>
-      </p:bgPr>
-    </p:bg>
-    <p:spTree>
-      <p:nvGrpSpPr>
-        <p:cNvPr id="1" name=""/>
-        <p:cNvGrpSpPr/>
-        <p:nvPr/>
-      </p:nvGrpSpPr>
-      <p:grpSpPr>
-        <a:xfrm>
-          <a:off x="0" y="0"/>
-          <a:ext cx="0" cy="0"/>
-          <a:chOff x="0" y="0"/>
-          <a:chExt cx="0" cy="0"/>
-        </a:xfrm>
-      </p:grpSpPr>
-      <p:sp>
-        <p:nvSpPr>
-          <p:cNvPr id="11" name="Down Arrow 7">
-            <a:extLst>
-              <a:ext uri="{FF2B5EF4-FFF2-40B4-BE49-F238E27FC236}">
-                <a16:creationId xmlns:a16="http://schemas.microsoft.com/office/drawing/2014/main" id="{D4771268-CB57-404A-9271-370EB28F6090}"/>
-              </a:ext>
-              <a:ext uri="{C183D7F6-B498-43B3-948B-1728B52AA6E4}">
-                <adec:decorative xmlns:adec="http://schemas.microsoft.com/office/drawing/2017/decorative" val="1"/>
-              </a:ext>
-            </a:extLst>
-          </p:cNvPr>
-          <p:cNvSpPr>
-            <a:spLocks noGrp="1" noRot="1" noChangeAspect="1" noMove="1" noResize="1" noEditPoints="1" noAdjustHandles="1" noChangeArrowheads="1" noChangeShapeType="1" noTextEdit="1"/>
-          </p:cNvSpPr>
-          <p:nvPr>
-            <p:extLst>
-              <p:ext uri="{386F3935-93C4-4BCD-93E2-E3B085C9AB24}">
-                <p16:designElem xmlns:p16="http://schemas.microsoft.com/office/powerpoint/2015/main" val="1"/>
-              </p:ext>
-            </p:extLst>
-          </p:nvPr>
-        </p:nvSpPr>
-        <p:spPr>
-          <a:xfrm rot="16200000">
-            <a:off x="800100" y="1491343"/>
-            <a:ext cx="3333749" cy="3499103"/>
-          </a:xfrm>
-          <a:prstGeom prst="downArrow">
-            <a:avLst>
-              <a:gd name="adj1" fmla="val 100000"/>
-              <a:gd name="adj2" fmla="val 15788"/>
-            </a:avLst>
-          </a:prstGeom>
-          <a:solidFill>
-            <a:srgbClr val="404040"/>
-          </a:solidFill>
-          <a:ln w="53975">
-            <a:noFill/>
-          </a:ln>
-        </p:spPr>
-        <p:style>
-          <a:lnRef idx="2">
-            <a:schemeClr val="accent1">
-              <a:shade val="50000"/>
-            </a:schemeClr>
-          </a:lnRef>
-          <a:fillRef idx="1">
-            <a:schemeClr val="accent1"/>
-          </a:fillRef>
-          <a:effectRef idx="0">
-            <a:schemeClr val="accent1"/>
-          </a:effectRef>
-          <a:fontRef idx="minor">
-            <a:schemeClr val="lt1"/>
-          </a:fontRef>
-        </p:style>
-        <p:txBody>
-          <a:bodyPr rtlCol="0" anchor="ctr"/>
-          <a:lstStyle/>
-          <a:p>
-            <a:pPr algn="ctr"/>
-            <a:endParaRPr lang="en-US"/>
-          </a:p>
-        </p:txBody>
-      </p:sp>
-      <p:sp>
-        <p:nvSpPr>
-          <p:cNvPr id="6" name="TextBox 5">
-            <a:extLst>
-              <a:ext uri="{FF2B5EF4-FFF2-40B4-BE49-F238E27FC236}">
-                <a16:creationId xmlns:a16="http://schemas.microsoft.com/office/drawing/2014/main" id="{B80983AA-0D29-FCDC-BAAD-4D0E472768CC}"/>
-              </a:ext>
-            </a:extLst>
-          </p:cNvPr>
-          <p:cNvSpPr txBox="1"/>
-          <p:nvPr/>
-        </p:nvSpPr>
-        <p:spPr>
-          <a:xfrm>
-            <a:off x="1028700" y="1967266"/>
-            <a:ext cx="2628900" cy="2547257"/>
-          </a:xfrm>
-          <a:prstGeom prst="rect">
-            <a:avLst/>
-          </a:prstGeom>
-          <a:noFill/>
-        </p:spPr>
-        <p:txBody>
-          <a:bodyPr vert="horz" lIns="91440" tIns="45720" rIns="91440" bIns="45720" rtlCol="0" anchor="ctr">
-            <a:normAutofit/>
-          </a:bodyPr>
-          <a:lstStyle/>
-          <a:p>
-            <a:pPr algn="ctr">
-              <a:lnSpc>
-                <a:spcPct val="90000"/>
-              </a:lnSpc>
-              <a:spcBef>
-                <a:spcPct val="0"/>
-              </a:spcBef>
-              <a:spcAft>
-                <a:spcPts val="600"/>
-              </a:spcAft>
-            </a:pPr>
-            <a:r>
-              <a:rPr lang="en-US" sz="3600" kern="1200">
-                <a:solidFill>
-                  <a:srgbClr val="FFFFFF"/>
-                </a:solidFill>
-                <a:latin typeface="+mj-lt"/>
-                <a:ea typeface="+mj-ea"/>
-                <a:cs typeface="+mj-cs"/>
-              </a:rPr>
-              <a:t>Prayer sign up</a:t>
-            </a:r>
-          </a:p>
-        </p:txBody>
-      </p:sp>
-      <p:pic>
-        <p:nvPicPr>
-          <p:cNvPr id="3" name="Picture 2">
-            <a:extLst>
-              <a:ext uri="{FF2B5EF4-FFF2-40B4-BE49-F238E27FC236}">
-                <a16:creationId xmlns:a16="http://schemas.microsoft.com/office/drawing/2014/main" id="{A0C91A17-3EFD-73F4-AF1D-8A720EB62D1D}"/>
-              </a:ext>
-            </a:extLst>
-          </p:cNvPr>
-          <p:cNvPicPr>
-            <a:picLocks noChangeAspect="1"/>
-          </p:cNvPicPr>
-          <p:nvPr/>
-        </p:nvPicPr>
-        <p:blipFill>
-          <a:blip r:embed="rId2"/>
-          <a:stretch>
-            <a:fillRect/>
-          </a:stretch>
-        </p:blipFill>
-        <p:spPr>
-          <a:xfrm>
-            <a:off x="5383296" y="643466"/>
-            <a:ext cx="5568739" cy="5568739"/>
-          </a:xfrm>
-          <a:prstGeom prst="rect">
-            <a:avLst/>
-          </a:prstGeom>
-        </p:spPr>
-      </p:pic>
-    </p:spTree>
-    <p:extLst>
-      <p:ext uri="{BB962C8B-B14F-4D97-AF65-F5344CB8AC3E}">
-        <p14:creationId xmlns:p14="http://schemas.microsoft.com/office/powerpoint/2010/main" val="313243520"/>
-      </p:ext>
-    </p:extLst>
-  </p:cSld>
-  <p:clrMapOvr>
-    <a:masterClrMapping/>
-  </p:clrMapOvr>
-</p:sld>
-</file>
-
-<file path=ppt/slides/slide30.xml><?xml version="1.0" encoding="utf-8"?>
+<file path=ppt/slides/slide33.xml><?xml version="1.0" encoding="utf-8"?>
 <p:sld xmlns:a="http://schemas.openxmlformats.org/drawingml/2006/main" xmlns:r="http://schemas.openxmlformats.org/officeDocument/2006/relationships" xmlns:p="http://schemas.openxmlformats.org/presentationml/2006/main">
   <p:cSld>
     <p:spTree>
@@ -12344,7 +13105,7 @@
 </p:sld>
 </file>
 
-<file path=ppt/slides/slide31.xml><?xml version="1.0" encoding="utf-8"?>
+<file path=ppt/slides/slide34.xml><?xml version="1.0" encoding="utf-8"?>
 <p:sld xmlns:a="http://schemas.openxmlformats.org/drawingml/2006/main" xmlns:r="http://schemas.openxmlformats.org/officeDocument/2006/relationships" xmlns:p="http://schemas.openxmlformats.org/presentationml/2006/main">
   <p:cSld name="Slide 24">
     <p:bg>
@@ -12779,183 +13540,6 @@
               <a:t>Get Lab 1 right now: it's the foundation every future lab this semester depends on</a:t>
             </a:r>
             <a:endParaRPr lang="en-US" sz="1500" dirty="0"/>
-          </a:p>
-        </p:txBody>
-      </p:sp>
-    </p:spTree>
-  </p:cSld>
-  <p:clrMapOvr>
-    <a:masterClrMapping/>
-  </p:clrMapOvr>
-</p:sld>
-</file>
-
-<file path=ppt/slides/slide32.xml><?xml version="1.0" encoding="utf-8"?>
-<p:sld xmlns:a="http://schemas.openxmlformats.org/drawingml/2006/main" xmlns:r="http://schemas.openxmlformats.org/officeDocument/2006/relationships" xmlns:p="http://schemas.openxmlformats.org/presentationml/2006/main">
-  <p:cSld name="Slide 25">
-    <p:bg>
-      <p:bgPr>
-        <a:solidFill>
-          <a:srgbClr val="1B2A4A"/>
-        </a:solidFill>
-        <a:effectLst/>
-      </p:bgPr>
-    </p:bg>
-    <p:spTree>
-      <p:nvGrpSpPr>
-        <p:cNvPr id="1" name=""/>
-        <p:cNvGrpSpPr/>
-        <p:nvPr/>
-      </p:nvGrpSpPr>
-      <p:grpSpPr>
-        <a:xfrm>
-          <a:off x="0" y="0"/>
-          <a:ext cx="0" cy="0"/>
-          <a:chOff x="0" y="0"/>
-          <a:chExt cx="0" cy="0"/>
-        </a:xfrm>
-      </p:grpSpPr>
-      <p:sp>
-        <p:nvSpPr>
-          <p:cNvPr id="2" name="Shape 0"/>
-          <p:cNvSpPr/>
-          <p:nvPr/>
-        </p:nvSpPr>
-        <p:spPr>
-          <a:xfrm>
-            <a:off x="5413248" y="1920240"/>
-            <a:ext cx="1371600" cy="1371600"/>
-          </a:xfrm>
-          <a:prstGeom prst="ellipse">
-            <a:avLst/>
-          </a:prstGeom>
-          <a:solidFill>
-            <a:srgbClr val="00B4D8"/>
-          </a:solidFill>
-          <a:ln/>
-        </p:spPr>
-        <p:txBody>
-          <a:bodyPr/>
-          <a:lstStyle/>
-          <a:p>
-            <a:endParaRPr lang="en-US"/>
-          </a:p>
-        </p:txBody>
-      </p:sp>
-      <p:sp>
-        <p:nvSpPr>
-          <p:cNvPr id="3" name="Text 1"/>
-          <p:cNvSpPr/>
-          <p:nvPr/>
-        </p:nvSpPr>
-        <p:spPr>
-          <a:xfrm>
-            <a:off x="5413248" y="1920240"/>
-            <a:ext cx="1371600" cy="1371600"/>
-          </a:xfrm>
-          <a:prstGeom prst="rect">
-            <a:avLst/>
-          </a:prstGeom>
-          <a:noFill/>
-          <a:ln/>
-        </p:spPr>
-        <p:txBody>
-          <a:bodyPr wrap="square" lIns="0" tIns="0" rIns="0" bIns="0" rtlCol="0" anchor="ctr"/>
-          <a:lstStyle/>
-          <a:p>
-            <a:pPr marL="0" indent="0" algn="ctr">
-              <a:buNone/>
-            </a:pPr>
-            <a:r>
-              <a:rPr lang="en-US" sz="4000" b="1" dirty="0">
-                <a:solidFill>
-                  <a:srgbClr val="1B2A4A"/>
-                </a:solidFill>
-                <a:latin typeface="Cambria" pitchFamily="34" charset="0"/>
-                <a:ea typeface="Cambria" pitchFamily="34" charset="-122"/>
-                <a:cs typeface="Cambria" pitchFamily="34" charset="-120"/>
-              </a:rPr>
-              <a:t>?</a:t>
-            </a:r>
-            <a:endParaRPr lang="en-US" sz="4000" dirty="0"/>
-          </a:p>
-        </p:txBody>
-      </p:sp>
-      <p:sp>
-        <p:nvSpPr>
-          <p:cNvPr id="4" name="Text 2"/>
-          <p:cNvSpPr/>
-          <p:nvPr/>
-        </p:nvSpPr>
-        <p:spPr>
-          <a:xfrm>
-            <a:off x="0" y="3520440"/>
-            <a:ext cx="12191695" cy="822960"/>
-          </a:xfrm>
-          <a:prstGeom prst="rect">
-            <a:avLst/>
-          </a:prstGeom>
-          <a:noFill/>
-          <a:ln/>
-        </p:spPr>
-        <p:txBody>
-          <a:bodyPr wrap="square" lIns="0" tIns="0" rIns="0" bIns="0" rtlCol="0" anchor="ctr"/>
-          <a:lstStyle/>
-          <a:p>
-            <a:pPr marL="0" indent="0" algn="ctr">
-              <a:buNone/>
-            </a:pPr>
-            <a:r>
-              <a:rPr lang="en-US" sz="3600" b="1" dirty="0">
-                <a:solidFill>
-                  <a:srgbClr val="FFFFFF"/>
-                </a:solidFill>
-                <a:latin typeface="Cambria" pitchFamily="34" charset="0"/>
-                <a:ea typeface="Cambria" pitchFamily="34" charset="-122"/>
-                <a:cs typeface="Cambria" pitchFamily="34" charset="-120"/>
-              </a:rPr>
-              <a:t>Questions?</a:t>
-            </a:r>
-            <a:endParaRPr lang="en-US" sz="3600" dirty="0"/>
-          </a:p>
-        </p:txBody>
-      </p:sp>
-      <p:sp>
-        <p:nvSpPr>
-          <p:cNvPr id="5" name="Text 3"/>
-          <p:cNvSpPr/>
-          <p:nvPr/>
-        </p:nvSpPr>
-        <p:spPr>
-          <a:xfrm>
-            <a:off x="0" y="4343400"/>
-            <a:ext cx="12191695" cy="457200"/>
-          </a:xfrm>
-          <a:prstGeom prst="rect">
-            <a:avLst/>
-          </a:prstGeom>
-          <a:noFill/>
-          <a:ln/>
-        </p:spPr>
-        <p:txBody>
-          <a:bodyPr wrap="square" lIns="0" tIns="0" rIns="0" bIns="0" rtlCol="0" anchor="ctr"/>
-          <a:lstStyle/>
-          <a:p>
-            <a:pPr marL="0" indent="0" algn="ctr">
-              <a:buNone/>
-            </a:pPr>
-            <a:r>
-              <a:rPr lang="en-US" sz="1600" dirty="0">
-                <a:solidFill>
-                  <a:srgbClr val="E8EEF7"/>
-                </a:solidFill>
-                <a:latin typeface="Calibri" pitchFamily="34" charset="0"/>
-                <a:ea typeface="Calibri" pitchFamily="34" charset="-122"/>
-                <a:cs typeface="Calibri" pitchFamily="34" charset="-120"/>
-              </a:rPr>
-              <a:t>Sebastian Hayes  ·  sebastian.hayes@byu.edu  ·  Discord</a:t>
-            </a:r>
-            <a:endParaRPr lang="en-US" sz="1600" dirty="0"/>
           </a:p>
         </p:txBody>
       </p:sp>
